--- a/downloads/tlv-webinar-deck.pptx
+++ b/downloads/tlv-webinar-deck.pptx
@@ -23,9 +23,12 @@
     <p:sldId id="271" r:id="rId17"/>
     <p:sldId id="272" r:id="rId18"/>
     <p:sldId id="273" r:id="rId19"/>
+    <p:sldId id="274" r:id="rId20"/>
+    <p:sldId id="275" r:id="rId21"/>
+    <p:sldId id="276" r:id="rId22"/>
   </p:sldIdLst>
   <p:notesMasterIdLst>
-    <p:notesMasterId r:id="rId20"/>
+    <p:notesMasterId r:id="rId23"/>
   </p:notesMasterIdLst>
   <p:sldSz cx="12192000" cy="6858000"/>
   <p:notesSz cx="6858000" cy="12192000"/>
@@ -1353,6 +1356,94 @@
 </p:notes>
 </file>
 
+<file path=ppt/notesSlides/notesSlide19.xml><?xml version="1.0" encoding="utf-8"?>
+<p:notes xmlns:a="http://schemas.openxmlformats.org/drawingml/2006/main" xmlns:r="http://schemas.openxmlformats.org/officeDocument/2006/relationships" xmlns:p="http://schemas.openxmlformats.org/presentationml/2006/main">
+  <p:cSld>
+    <p:spTree>
+      <p:nvGrpSpPr>
+        <p:cNvPr id="1" name=""/>
+        <p:cNvGrpSpPr/>
+        <p:nvPr/>
+      </p:nvGrpSpPr>
+      <p:grpSpPr>
+        <a:xfrm>
+          <a:off x="0" y="0"/>
+          <a:ext cx="0" cy="0"/>
+          <a:chOff x="0" y="0"/>
+          <a:chExt cx="0" cy="0"/>
+        </a:xfrm>
+      </p:grpSpPr>
+      <p:sp>
+        <p:nvSpPr>
+          <p:cNvPr id="2" name="Slide Image Placeholder 1"/>
+          <p:cNvSpPr>
+            <a:spLocks noGrp="1" noRot="1" noChangeAspect="1"/>
+          </p:cNvSpPr>
+          <p:nvPr>
+            <p:ph type="sldImg"/>
+          </p:nvPr>
+        </p:nvSpPr>
+        <p:spPr/>
+      </p:sp>
+      <p:sp>
+        <p:nvSpPr>
+          <p:cNvPr id="3" name="Notes Placeholder 2"/>
+          <p:cNvSpPr>
+            <a:spLocks noGrp="1"/>
+          </p:cNvSpPr>
+          <p:nvPr>
+            <p:ph type="body" idx="1"/>
+          </p:nvPr>
+        </p:nvSpPr>
+        <p:spPr/>
+        <p:txBody>
+          <a:bodyPr/>
+          <a:lstStyle/>
+          <a:p>
+            <a:r>
+              <a:rPr lang="en-US" dirty="0"/>
+              <a:t/>
+            </a:r>
+            <a:endParaRPr lang="en-US" dirty="0"/>
+          </a:p>
+        </p:txBody>
+      </p:sp>
+      <p:sp>
+        <p:nvSpPr>
+          <p:cNvPr id="4" name="Slide Number Placeholder 3"/>
+          <p:cNvSpPr>
+            <a:spLocks noGrp="1"/>
+          </p:cNvSpPr>
+          <p:nvPr>
+            <p:ph type="sldNum" sz="quarter" idx="10"/>
+          </p:nvPr>
+        </p:nvSpPr>
+        <p:spPr/>
+        <p:txBody>
+          <a:bodyPr/>
+          <a:lstStyle/>
+          <a:p>
+            <a:fld id="{F7021451-1387-4CA6-816F-3879F97B5CBC}" type="slidenum">
+              <a:rPr lang="en-US"/>
+              <a:t>19</a:t>
+            </a:fld>
+            <a:endParaRPr lang="en-US"/>
+          </a:p>
+        </p:txBody>
+      </p:sp>
+    </p:spTree>
+    <p:extLst>
+      <p:ext uri="{BB962C8B-B14F-4D97-AF65-F5344CB8AC3E}">
+        <p14:creationId xmlns:p14="http://schemas.microsoft.com/office/powerpoint/2010/main" val="1024086991"/>
+      </p:ext>
+    </p:extLst>
+  </p:cSld>
+  <p:clrMapOvr>
+    <a:masterClrMapping/>
+  </p:clrMapOvr>
+</p:notes>
+</file>
+
 <file path=ppt/notesSlides/notesSlide2.xml><?xml version="1.0" encoding="utf-8"?>
 <p:notes xmlns:a="http://schemas.openxmlformats.org/drawingml/2006/main" xmlns:r="http://schemas.openxmlformats.org/officeDocument/2006/relationships" xmlns:p="http://schemas.openxmlformats.org/presentationml/2006/main">
   <p:cSld>
@@ -1423,6 +1514,182 @@
             <a:fld id="{F7021451-1387-4CA6-816F-3879F97B5CBC}" type="slidenum">
               <a:rPr lang="en-US"/>
               <a:t>2</a:t>
+            </a:fld>
+            <a:endParaRPr lang="en-US"/>
+          </a:p>
+        </p:txBody>
+      </p:sp>
+    </p:spTree>
+    <p:extLst>
+      <p:ext uri="{BB962C8B-B14F-4D97-AF65-F5344CB8AC3E}">
+        <p14:creationId xmlns:p14="http://schemas.microsoft.com/office/powerpoint/2010/main" val="1024086991"/>
+      </p:ext>
+    </p:extLst>
+  </p:cSld>
+  <p:clrMapOvr>
+    <a:masterClrMapping/>
+  </p:clrMapOvr>
+</p:notes>
+</file>
+
+<file path=ppt/notesSlides/notesSlide20.xml><?xml version="1.0" encoding="utf-8"?>
+<p:notes xmlns:a="http://schemas.openxmlformats.org/drawingml/2006/main" xmlns:r="http://schemas.openxmlformats.org/officeDocument/2006/relationships" xmlns:p="http://schemas.openxmlformats.org/presentationml/2006/main">
+  <p:cSld>
+    <p:spTree>
+      <p:nvGrpSpPr>
+        <p:cNvPr id="1" name=""/>
+        <p:cNvGrpSpPr/>
+        <p:nvPr/>
+      </p:nvGrpSpPr>
+      <p:grpSpPr>
+        <a:xfrm>
+          <a:off x="0" y="0"/>
+          <a:ext cx="0" cy="0"/>
+          <a:chOff x="0" y="0"/>
+          <a:chExt cx="0" cy="0"/>
+        </a:xfrm>
+      </p:grpSpPr>
+      <p:sp>
+        <p:nvSpPr>
+          <p:cNvPr id="2" name="Slide Image Placeholder 1"/>
+          <p:cNvSpPr>
+            <a:spLocks noGrp="1" noRot="1" noChangeAspect="1"/>
+          </p:cNvSpPr>
+          <p:nvPr>
+            <p:ph type="sldImg"/>
+          </p:nvPr>
+        </p:nvSpPr>
+        <p:spPr/>
+      </p:sp>
+      <p:sp>
+        <p:nvSpPr>
+          <p:cNvPr id="3" name="Notes Placeholder 2"/>
+          <p:cNvSpPr>
+            <a:spLocks noGrp="1"/>
+          </p:cNvSpPr>
+          <p:nvPr>
+            <p:ph type="body" idx="1"/>
+          </p:nvPr>
+        </p:nvSpPr>
+        <p:spPr/>
+        <p:txBody>
+          <a:bodyPr/>
+          <a:lstStyle/>
+          <a:p>
+            <a:r>
+              <a:rPr lang="en-US" dirty="0"/>
+              <a:t/>
+            </a:r>
+            <a:endParaRPr lang="en-US" dirty="0"/>
+          </a:p>
+        </p:txBody>
+      </p:sp>
+      <p:sp>
+        <p:nvSpPr>
+          <p:cNvPr id="4" name="Slide Number Placeholder 3"/>
+          <p:cNvSpPr>
+            <a:spLocks noGrp="1"/>
+          </p:cNvSpPr>
+          <p:nvPr>
+            <p:ph type="sldNum" sz="quarter" idx="10"/>
+          </p:nvPr>
+        </p:nvSpPr>
+        <p:spPr/>
+        <p:txBody>
+          <a:bodyPr/>
+          <a:lstStyle/>
+          <a:p>
+            <a:fld id="{F7021451-1387-4CA6-816F-3879F97B5CBC}" type="slidenum">
+              <a:rPr lang="en-US"/>
+              <a:t>20</a:t>
+            </a:fld>
+            <a:endParaRPr lang="en-US"/>
+          </a:p>
+        </p:txBody>
+      </p:sp>
+    </p:spTree>
+    <p:extLst>
+      <p:ext uri="{BB962C8B-B14F-4D97-AF65-F5344CB8AC3E}">
+        <p14:creationId xmlns:p14="http://schemas.microsoft.com/office/powerpoint/2010/main" val="1024086991"/>
+      </p:ext>
+    </p:extLst>
+  </p:cSld>
+  <p:clrMapOvr>
+    <a:masterClrMapping/>
+  </p:clrMapOvr>
+</p:notes>
+</file>
+
+<file path=ppt/notesSlides/notesSlide21.xml><?xml version="1.0" encoding="utf-8"?>
+<p:notes xmlns:a="http://schemas.openxmlformats.org/drawingml/2006/main" xmlns:r="http://schemas.openxmlformats.org/officeDocument/2006/relationships" xmlns:p="http://schemas.openxmlformats.org/presentationml/2006/main">
+  <p:cSld>
+    <p:spTree>
+      <p:nvGrpSpPr>
+        <p:cNvPr id="1" name=""/>
+        <p:cNvGrpSpPr/>
+        <p:nvPr/>
+      </p:nvGrpSpPr>
+      <p:grpSpPr>
+        <a:xfrm>
+          <a:off x="0" y="0"/>
+          <a:ext cx="0" cy="0"/>
+          <a:chOff x="0" y="0"/>
+          <a:chExt cx="0" cy="0"/>
+        </a:xfrm>
+      </p:grpSpPr>
+      <p:sp>
+        <p:nvSpPr>
+          <p:cNvPr id="2" name="Slide Image Placeholder 1"/>
+          <p:cNvSpPr>
+            <a:spLocks noGrp="1" noRot="1" noChangeAspect="1"/>
+          </p:cNvSpPr>
+          <p:nvPr>
+            <p:ph type="sldImg"/>
+          </p:nvPr>
+        </p:nvSpPr>
+        <p:spPr/>
+      </p:sp>
+      <p:sp>
+        <p:nvSpPr>
+          <p:cNvPr id="3" name="Notes Placeholder 2"/>
+          <p:cNvSpPr>
+            <a:spLocks noGrp="1"/>
+          </p:cNvSpPr>
+          <p:nvPr>
+            <p:ph type="body" idx="1"/>
+          </p:nvPr>
+        </p:nvSpPr>
+        <p:spPr/>
+        <p:txBody>
+          <a:bodyPr/>
+          <a:lstStyle/>
+          <a:p>
+            <a:r>
+              <a:rPr lang="en-US" dirty="0"/>
+              <a:t/>
+            </a:r>
+            <a:endParaRPr lang="en-US" dirty="0"/>
+          </a:p>
+        </p:txBody>
+      </p:sp>
+      <p:sp>
+        <p:nvSpPr>
+          <p:cNvPr id="4" name="Slide Number Placeholder 3"/>
+          <p:cNvSpPr>
+            <a:spLocks noGrp="1"/>
+          </p:cNvSpPr>
+          <p:nvPr>
+            <p:ph type="sldNum" sz="quarter" idx="10"/>
+          </p:nvPr>
+        </p:nvSpPr>
+        <p:spPr/>
+        <p:txBody>
+          <a:bodyPr/>
+          <a:lstStyle/>
+          <a:p>
+            <a:fld id="{F7021451-1387-4CA6-816F-3879F97B5CBC}" type="slidenum">
+              <a:rPr lang="en-US"/>
+              <a:t>21</a:t>
             </a:fld>
             <a:endParaRPr lang="en-US"/>
           </a:p>
@@ -2783,9 +3050,54 @@
           <a:chExt cx="0" cy="0"/>
         </a:xfrm>
       </p:grpSpPr>
-      <p:sp>
-        <p:nvSpPr>
-          <p:cNvPr id="2" name="Shape 0"/>
+      <p:pic>
+        <p:nvPicPr>
+          <p:cNvPr id="2" name="Image 0" descr="/tmp/claude-0/-home-user-Budget-bot/bb3508b1-6506-5404-ae67-cc0e6ad7c68b/scratchpad/deck/images/hero.jpg">    </p:cNvPr>
+          <p:cNvPicPr>
+            <a:picLocks noChangeAspect="1"/>
+          </p:cNvPicPr>
+          <p:nvPr/>
+        </p:nvPicPr>
+        <p:blipFill>
+          <a:blip r:embed="rId1"/>
+          <a:srcRect l="0" r="0" t="0" b="0"/>
+          <a:stretch/>
+        </p:blipFill>
+        <p:spPr>
+          <a:xfrm>
+            <a:off x="0" y="0"/>
+            <a:ext cx="12191695" cy="6858000"/>
+          </a:xfrm>
+          <a:prstGeom prst="rect">
+            <a:avLst/>
+          </a:prstGeom>
+        </p:spPr>
+      </p:pic>
+      <p:sp>
+        <p:nvSpPr>
+          <p:cNvPr id="3" name="Shape 0"/>
+          <p:cNvSpPr/>
+          <p:nvPr/>
+        </p:nvSpPr>
+        <p:spPr>
+          <a:xfrm>
+            <a:off x="0" y="0"/>
+            <a:ext cx="12191695" cy="6858000"/>
+          </a:xfrm>
+          <a:prstGeom prst="rect">
+            <a:avLst/>
+          </a:prstGeom>
+          <a:solidFill>
+            <a:srgbClr val="0D1B2A">
+              <a:alpha val="86000"/>
+            </a:srgbClr>
+          </a:solidFill>
+          <a:ln/>
+        </p:spPr>
+      </p:sp>
+      <p:sp>
+        <p:nvSpPr>
+          <p:cNvPr id="4" name="Shape 1"/>
           <p:cNvSpPr/>
           <p:nvPr/>
         </p:nvSpPr>
@@ -2810,7 +3122,7 @@
       </p:sp>
       <p:sp>
         <p:nvSpPr>
-          <p:cNvPr id="3" name="Text 1"/>
+          <p:cNvPr id="5" name="Text 2"/>
           <p:cNvSpPr/>
           <p:nvPr/>
         </p:nvSpPr>
@@ -2849,7 +3161,7 @@
       </p:sp>
       <p:sp>
         <p:nvSpPr>
-          <p:cNvPr id="4" name="Text 2"/>
+          <p:cNvPr id="6" name="Text 3"/>
           <p:cNvSpPr/>
           <p:nvPr/>
         </p:nvSpPr>
@@ -2888,7 +3200,7 @@
       </p:sp>
       <p:sp>
         <p:nvSpPr>
-          <p:cNvPr id="5" name="Text 0"/>
+          <p:cNvPr id="7" name="Text 0"/>
           <p:cNvSpPr/>
           <p:nvPr>
             <p:ph idx="100" type="title" hasCustomPrompt="1"/>
@@ -2946,7 +3258,7 @@
       </p:sp>
       <p:sp>
         <p:nvSpPr>
-          <p:cNvPr id="6" name="Text 0"/>
+          <p:cNvPr id="8" name="Text 0"/>
           <p:cNvSpPr/>
           <p:nvPr>
             <p:ph idx="101" type="body" hasCustomPrompt="1"/>
@@ -2987,7 +3299,7 @@
       </p:sp>
       <p:sp>
         <p:nvSpPr>
-          <p:cNvPr id="7" name="Text 5"/>
+          <p:cNvPr id="9" name="Text 6"/>
           <p:cNvSpPr/>
           <p:nvPr/>
         </p:nvSpPr>
@@ -4568,24 +4880,170 @@
           <a:chExt cx="0" cy="0"/>
         </a:xfrm>
       </p:grpSpPr>
-      <p:sp>
-        <p:nvSpPr>
-          <p:cNvPr id="2" name="Shape 0"/>
-          <p:cNvSpPr/>
-          <p:nvPr/>
-        </p:nvSpPr>
-        <p:spPr>
-          <a:xfrm>
-            <a:off x="731520" y="457200"/>
-            <a:ext cx="594360" cy="594360"/>
+      <p:pic>
+        <p:nvPicPr>
+          <p:cNvPr id="2" name="Image 0" descr="/tmp/claude-0/-home-user-Budget-bot/bb3508b1-6506-5404-ae67-cc0e6ad7c68b/scratchpad/deck/images/interior.jpg">    </p:cNvPr>
+          <p:cNvPicPr>
+            <a:picLocks noChangeAspect="1"/>
+          </p:cNvPicPr>
+          <p:nvPr/>
+        </p:nvPicPr>
+        <p:blipFill>
+          <a:blip r:embed="rId1"/>
+          <a:srcRect l="0" r="0" t="0" b="0"/>
+          <a:stretch/>
+        </p:blipFill>
+        <p:spPr>
+          <a:xfrm>
+            <a:off x="0" y="0"/>
+            <a:ext cx="4480560" cy="6858000"/>
+          </a:xfrm>
+          <a:prstGeom prst="rect">
+            <a:avLst/>
+          </a:prstGeom>
+        </p:spPr>
+      </p:pic>
+      <p:sp>
+        <p:nvSpPr>
+          <p:cNvPr id="3" name="Shape 0"/>
+          <p:cNvSpPr/>
+          <p:nvPr/>
+        </p:nvSpPr>
+        <p:spPr>
+          <a:xfrm>
+            <a:off x="0" y="0"/>
+            <a:ext cx="4480560" cy="6858000"/>
+          </a:xfrm>
+          <a:prstGeom prst="rect">
+            <a:avLst/>
+          </a:prstGeom>
+          <a:solidFill>
+            <a:srgbClr val="0D1B2A">
+              <a:alpha val="28000"/>
+            </a:srgbClr>
+          </a:solidFill>
+          <a:ln/>
+        </p:spPr>
+      </p:sp>
+      <p:sp>
+        <p:nvSpPr>
+          <p:cNvPr id="4" name="Text 1"/>
+          <p:cNvSpPr/>
+          <p:nvPr/>
+        </p:nvSpPr>
+        <p:spPr>
+          <a:xfrm>
+            <a:off x="5166360" y="502920"/>
+            <a:ext cx="1371600" cy="1188720"/>
+          </a:xfrm>
+          <a:prstGeom prst="rect">
+            <a:avLst/>
+          </a:prstGeom>
+          <a:noFill/>
+          <a:ln/>
+        </p:spPr>
+        <p:txBody>
+          <a:bodyPr wrap="square" lIns="0" tIns="0" rIns="0" bIns="0" rtlCol="0" anchor="t"/>
+          <a:lstStyle/>
+          <a:p>
+            <a:pPr algn="r" indent="0" marL="0">
+              <a:buNone/>
+            </a:pPr>
+            <a:r>
+              <a:rPr lang="en-US" sz="9000" b="1" dirty="0">
+                <a:solidFill>
+                  <a:srgbClr val="ECE1C6"/>
+                </a:solidFill>
+                <a:latin typeface="Cambria" pitchFamily="34" charset="0"/>
+                <a:ea typeface="Cambria" pitchFamily="34" charset="-122"/>
+                <a:cs typeface="Cambria" pitchFamily="34" charset="-120"/>
+              </a:rPr>
+              <a:t>”</a:t>
+            </a:r>
+            <a:endParaRPr lang="en-US" sz="9000" dirty="0"/>
+          </a:p>
+        </p:txBody>
+      </p:sp>
+      <p:sp>
+        <p:nvSpPr>
+          <p:cNvPr id="5" name="Text 2"/>
+          <p:cNvSpPr/>
+          <p:nvPr/>
+        </p:nvSpPr>
+        <p:spPr>
+          <a:xfrm>
+            <a:off x="5166360" y="1737360"/>
+            <a:ext cx="6293815" cy="2743200"/>
+          </a:xfrm>
+          <a:prstGeom prst="rect">
+            <a:avLst/>
+          </a:prstGeom>
+          <a:noFill/>
+          <a:ln/>
+        </p:spPr>
+        <p:txBody>
+          <a:bodyPr wrap="square" lIns="0" tIns="0" rIns="0" bIns="0" rtlCol="0" anchor="t"/>
+          <a:lstStyle/>
+          <a:p>
+            <a:pPr algn="r" indent="0" marL="0">
+              <a:lnSpc>
+                <a:spcPct val="135000"/>
+              </a:lnSpc>
+              <a:buNone/>
+            </a:pPr>
+            <a:r>
+              <a:rPr lang="en-US" sz="2100" i="1" dirty="0">
+                <a:solidFill>
+                  <a:srgbClr val="0D1B2A"/>
+                </a:solidFill>
+                <a:latin typeface="Cambria" pitchFamily="34" charset="0"/>
+                <a:ea typeface="Cambria" pitchFamily="34" charset="-122"/>
+                <a:cs typeface="Cambria" pitchFamily="34" charset="-120"/>
+              </a:rPr>
+              <a:t>הרגשתי שסוף סוף מישהו בונה איתי אסטרטגיה, לא רק מוכר לי דירה.</a:t>
+            </a:r>
+            <a:endParaRPr lang="en-US" sz="2100" dirty="0"/>
+          </a:p>
+          <a:p>
+            <a:pPr algn="r" indent="0" marL="0">
+              <a:lnSpc>
+                <a:spcPct val="135000"/>
+              </a:lnSpc>
+              <a:buNone/>
+            </a:pPr>
+            <a:r>
+              <a:rPr lang="en-US" sz="2100" i="1" dirty="0">
+                <a:solidFill>
+                  <a:srgbClr val="0D1B2A"/>
+                </a:solidFill>
+                <a:latin typeface="Cambria" pitchFamily="34" charset="0"/>
+                <a:ea typeface="Cambria" pitchFamily="34" charset="-122"/>
+                <a:cs typeface="Cambria" pitchFamily="34" charset="-120"/>
+              </a:rPr>
+              <a:t>התהליך היה שקוף לגמרי, מההתחלה ועד הסוף.</a:t>
+            </a:r>
+            <a:endParaRPr lang="en-US" sz="2100" dirty="0"/>
+          </a:p>
+        </p:txBody>
+      </p:sp>
+      <p:sp>
+        <p:nvSpPr>
+          <p:cNvPr id="6" name="Shape 3"/>
+          <p:cNvSpPr/>
+          <p:nvPr/>
+        </p:nvSpPr>
+        <p:spPr>
+          <a:xfrm>
+            <a:off x="10911535" y="4709160"/>
+            <a:ext cx="502920" cy="502920"/>
           </a:xfrm>
           <a:prstGeom prst="ellipse">
             <a:avLst/>
           </a:prstGeom>
           <a:solidFill>
-            <a:srgbClr val="FFFFFF"/>
+            <a:srgbClr val="F8F7F4"/>
           </a:solidFill>
-          <a:ln w="25400">
+          <a:ln w="19050">
             <a:solidFill>
               <a:srgbClr val="B8963E"/>
             </a:solidFill>
@@ -4595,14 +5053,14 @@
       </p:sp>
       <p:sp>
         <p:nvSpPr>
-          <p:cNvPr id="3" name="Text 1"/>
-          <p:cNvSpPr/>
-          <p:nvPr/>
-        </p:nvSpPr>
-        <p:spPr>
-          <a:xfrm>
-            <a:off x="731520" y="457200"/>
-            <a:ext cx="594360" cy="594360"/>
+          <p:cNvPr id="7" name="Text 4"/>
+          <p:cNvSpPr/>
+          <p:nvPr/>
+        </p:nvSpPr>
+        <p:spPr>
+          <a:xfrm>
+            <a:off x="10911535" y="4709160"/>
+            <a:ext cx="502920" cy="502920"/>
           </a:xfrm>
           <a:prstGeom prst="rect">
             <a:avLst/>
@@ -4618,7 +5076,7 @@
               <a:buNone/>
             </a:pPr>
             <a:r>
-              <a:rPr lang="en-US" sz="2400" b="1" dirty="0">
+              <a:rPr lang="en-US" sz="1500" b="1" dirty="0">
                 <a:solidFill>
                   <a:srgbClr val="8A6E2A"/>
                 </a:solidFill>
@@ -4626,15 +5084,93 @@
                 <a:ea typeface="Cambria" pitchFamily="34" charset="-122"/>
                 <a:cs typeface="Cambria" pitchFamily="34" charset="-120"/>
               </a:rPr>
-              <a:t>3</a:t>
-            </a:r>
-            <a:endParaRPr lang="en-US" sz="2400" dirty="0"/>
-          </a:p>
-        </p:txBody>
-      </p:sp>
-      <p:sp>
-        <p:nvSpPr>
-          <p:cNvPr id="4" name="Text 0"/>
+              <a:t>אכ</a:t>
+            </a:r>
+            <a:endParaRPr lang="en-US" sz="1500" dirty="0"/>
+          </a:p>
+        </p:txBody>
+      </p:sp>
+      <p:sp>
+        <p:nvSpPr>
+          <p:cNvPr id="8" name="Text 5"/>
+          <p:cNvSpPr/>
+          <p:nvPr/>
+        </p:nvSpPr>
+        <p:spPr>
+          <a:xfrm>
+            <a:off x="5166360" y="4754880"/>
+            <a:ext cx="5608015" cy="320040"/>
+          </a:xfrm>
+          <a:prstGeom prst="rect">
+            <a:avLst/>
+          </a:prstGeom>
+          <a:noFill/>
+          <a:ln/>
+        </p:spPr>
+        <p:txBody>
+          <a:bodyPr wrap="square" lIns="0" tIns="0" rIns="0" bIns="0" rtlCol="0" anchor="ctr"/>
+          <a:lstStyle/>
+          <a:p>
+            <a:pPr algn="r" indent="0" marL="0">
+              <a:buNone/>
+            </a:pPr>
+            <a:r>
+              <a:rPr lang="en-US" sz="1400" b="1" dirty="0">
+                <a:solidFill>
+                  <a:srgbClr val="0D1B2A"/>
+                </a:solidFill>
+                <a:latin typeface="Calibri" pitchFamily="34" charset="0"/>
+                <a:ea typeface="Calibri" pitchFamily="34" charset="-122"/>
+                <a:cs typeface="Calibri" pitchFamily="34" charset="-120"/>
+              </a:rPr>
+              <a:t>א. כהן</a:t>
+            </a:r>
+            <a:endParaRPr lang="en-US" sz="1400" dirty="0"/>
+          </a:p>
+        </p:txBody>
+      </p:sp>
+      <p:sp>
+        <p:nvSpPr>
+          <p:cNvPr id="9" name="Text 6"/>
+          <p:cNvSpPr/>
+          <p:nvPr/>
+        </p:nvSpPr>
+        <p:spPr>
+          <a:xfrm>
+            <a:off x="5166360" y="5074920"/>
+            <a:ext cx="5608015" cy="320040"/>
+          </a:xfrm>
+          <a:prstGeom prst="rect">
+            <a:avLst/>
+          </a:prstGeom>
+          <a:noFill/>
+          <a:ln/>
+        </p:spPr>
+        <p:txBody>
+          <a:bodyPr wrap="square" lIns="0" tIns="0" rIns="0" bIns="0" rtlCol="0" anchor="t"/>
+          <a:lstStyle/>
+          <a:p>
+            <a:pPr algn="r" indent="0" marL="0">
+              <a:buNone/>
+            </a:pPr>
+            <a:r>
+              <a:rPr lang="en-US" sz="1150" dirty="0">
+                <a:solidFill>
+                  <a:srgbClr val="6B7280"/>
+                </a:solidFill>
+                <a:latin typeface="Calibri" pitchFamily="34" charset="0"/>
+                <a:ea typeface="Calibri" pitchFamily="34" charset="-122"/>
+                <a:cs typeface="Calibri" pitchFamily="34" charset="-120"/>
+              </a:rPr>
+              <a:t>משקיע פרטי, לקוח The Investor's Circle</a:t>
+            </a:r>
+            <a:endParaRPr lang="en-US" sz="1150" dirty="0"/>
+          </a:p>
+        </p:txBody>
+      </p:sp>
+      <p:sp>
+        <p:nvSpPr>
+          <p:cNvPr id="10" name="Text 0"/>
           <p:cNvSpPr/>
           <p:nvPr>
             <p:ph idx="100" type="title" hasCustomPrompt="1"/>
@@ -4658,328 +5194,7 @@
             <a:pPr algn="r" indent="0" marL="0">
               <a:buNone/>
             </a:pPr>
-            <a:r>
-              <a:rPr lang="en-US" sz="2800" b="1" dirty="0">
-                <a:solidFill>
-                  <a:srgbClr val="0D1B2A"/>
-                </a:solidFill>
-                <a:latin typeface="Cambria" pitchFamily="34" charset="0"/>
-                <a:ea typeface="Cambria" pitchFamily="34" charset="-122"/>
-                <a:cs typeface="Cambria" pitchFamily="34" charset="-120"/>
-              </a:rPr>
-              <a:t>מימוש ותשואה</a:t>
-            </a:r>
             <a:endParaRPr lang="en-US" sz="2800" dirty="0"/>
-          </a:p>
-        </p:txBody>
-      </p:sp>
-      <p:sp>
-        <p:nvSpPr>
-          <p:cNvPr id="5" name="Text 3"/>
-          <p:cNvSpPr/>
-          <p:nvPr/>
-        </p:nvSpPr>
-        <p:spPr>
-          <a:xfrm>
-            <a:off x="731520" y="2057400"/>
-            <a:ext cx="10725912" cy="731520"/>
-          </a:xfrm>
-          <a:prstGeom prst="rect">
-            <a:avLst/>
-          </a:prstGeom>
-          <a:noFill/>
-          <a:ln/>
-        </p:spPr>
-        <p:txBody>
-          <a:bodyPr wrap="square" lIns="0" tIns="0" rIns="0" bIns="0" rtlCol="0" anchor="t"/>
-          <a:lstStyle/>
-          <a:p>
-            <a:pPr algn="r" indent="0" marL="0">
-              <a:lnSpc>
-                <a:spcPts val="1900"/>
-              </a:lnSpc>
-              <a:buNone/>
-            </a:pPr>
-            <a:r>
-              <a:rPr lang="en-US" sz="1400" dirty="0">
-                <a:solidFill>
-                  <a:srgbClr val="6B7280"/>
-                </a:solidFill>
-                <a:latin typeface="Calibri" pitchFamily="34" charset="0"/>
-                <a:ea typeface="Calibri" pitchFamily="34" charset="-122"/>
-                <a:cs typeface="Calibri" pitchFamily="34" charset="-120"/>
-              </a:rPr>
-              <a:t>הרכישה היא רק ההתחלה. השלב הזה קובע אם ההשקעה תישאר דירה שקניתם ומקווים, או תהפוך לתשואה אמיתית.</a:t>
-            </a:r>
-            <a:endParaRPr lang="en-US" sz="1400" dirty="0"/>
-          </a:p>
-        </p:txBody>
-      </p:sp>
-      <p:sp>
-        <p:nvSpPr>
-          <p:cNvPr id="6" name="Shape 4"/>
-          <p:cNvSpPr/>
-          <p:nvPr/>
-        </p:nvSpPr>
-        <p:spPr>
-          <a:xfrm>
-            <a:off x="11183112" y="3017520"/>
-            <a:ext cx="201168" cy="201168"/>
-          </a:xfrm>
-          <a:prstGeom prst="rect">
-            <a:avLst/>
-          </a:prstGeom>
-          <a:solidFill>
-            <a:srgbClr val="FFFFFF"/>
-          </a:solidFill>
-          <a:ln w="15875">
-            <a:solidFill>
-              <a:srgbClr val="8A6E2A"/>
-            </a:solidFill>
-            <a:prstDash val="solid"/>
-          </a:ln>
-        </p:spPr>
-      </p:sp>
-      <p:sp>
-        <p:nvSpPr>
-          <p:cNvPr id="7" name="Text 5"/>
-          <p:cNvSpPr/>
-          <p:nvPr/>
-        </p:nvSpPr>
-        <p:spPr>
-          <a:xfrm>
-            <a:off x="731520" y="2971800"/>
-            <a:ext cx="10314432" cy="612648"/>
-          </a:xfrm>
-          <a:prstGeom prst="rect">
-            <a:avLst/>
-          </a:prstGeom>
-          <a:noFill/>
-          <a:ln/>
-        </p:spPr>
-        <p:txBody>
-          <a:bodyPr wrap="square" lIns="0" tIns="0" rIns="0" bIns="0" rtlCol="0" anchor="t"/>
-          <a:lstStyle/>
-          <a:p>
-            <a:pPr algn="r" indent="0" marL="0">
-              <a:lnSpc>
-                <a:spcPts val="1800"/>
-              </a:lnSpc>
-              <a:buNone/>
-            </a:pPr>
-            <a:r>
-              <a:rPr lang="en-US" sz="1350" dirty="0">
-                <a:solidFill>
-                  <a:srgbClr val="0D1B2A"/>
-                </a:solidFill>
-                <a:latin typeface="Calibri" pitchFamily="34" charset="0"/>
-                <a:ea typeface="Calibri" pitchFamily="34" charset="-122"/>
-                <a:cs typeface="Calibri" pitchFamily="34" charset="-120"/>
-              </a:rPr>
-              <a:t>האם המטרה היא הכנסה שוטפת (השכרה) או מימוש חד-פעמי (מכירה לאחר השבחה)?</a:t>
-            </a:r>
-            <a:endParaRPr lang="en-US" sz="1350" dirty="0"/>
-          </a:p>
-        </p:txBody>
-      </p:sp>
-      <p:sp>
-        <p:nvSpPr>
-          <p:cNvPr id="8" name="Shape 6"/>
-          <p:cNvSpPr/>
-          <p:nvPr/>
-        </p:nvSpPr>
-        <p:spPr>
-          <a:xfrm>
-            <a:off x="11183112" y="3675888"/>
-            <a:ext cx="201168" cy="201168"/>
-          </a:xfrm>
-          <a:prstGeom prst="rect">
-            <a:avLst/>
-          </a:prstGeom>
-          <a:solidFill>
-            <a:srgbClr val="FFFFFF"/>
-          </a:solidFill>
-          <a:ln w="15875">
-            <a:solidFill>
-              <a:srgbClr val="8A6E2A"/>
-            </a:solidFill>
-            <a:prstDash val="solid"/>
-          </a:ln>
-        </p:spPr>
-      </p:sp>
-      <p:sp>
-        <p:nvSpPr>
-          <p:cNvPr id="9" name="Text 7"/>
-          <p:cNvSpPr/>
-          <p:nvPr/>
-        </p:nvSpPr>
-        <p:spPr>
-          <a:xfrm>
-            <a:off x="731520" y="3630168"/>
-            <a:ext cx="10314432" cy="612648"/>
-          </a:xfrm>
-          <a:prstGeom prst="rect">
-            <a:avLst/>
-          </a:prstGeom>
-          <a:noFill/>
-          <a:ln/>
-        </p:spPr>
-        <p:txBody>
-          <a:bodyPr wrap="square" lIns="0" tIns="0" rIns="0" bIns="0" rtlCol="0" anchor="t"/>
-          <a:lstStyle/>
-          <a:p>
-            <a:pPr algn="r" indent="0" marL="0">
-              <a:lnSpc>
-                <a:spcPts val="1800"/>
-              </a:lnSpc>
-              <a:buNone/>
-            </a:pPr>
-            <a:r>
-              <a:rPr lang="en-US" sz="1350" dirty="0">
-                <a:solidFill>
-                  <a:srgbClr val="0D1B2A"/>
-                </a:solidFill>
-                <a:latin typeface="Calibri" pitchFamily="34" charset="0"/>
-                <a:ea typeface="Calibri" pitchFamily="34" charset="-122"/>
-                <a:cs typeface="Calibri" pitchFamily="34" charset="-120"/>
-              </a:rPr>
-              <a:t>מי מלווה את הביצוע בפועל: קבלן, מתכנן, עורך דין, יועץ מיסוי?</a:t>
-            </a:r>
-            <a:endParaRPr lang="en-US" sz="1350" dirty="0"/>
-          </a:p>
-        </p:txBody>
-      </p:sp>
-      <p:sp>
-        <p:nvSpPr>
-          <p:cNvPr id="10" name="Shape 8"/>
-          <p:cNvSpPr/>
-          <p:nvPr/>
-        </p:nvSpPr>
-        <p:spPr>
-          <a:xfrm>
-            <a:off x="11183112" y="4334256"/>
-            <a:ext cx="201168" cy="201168"/>
-          </a:xfrm>
-          <a:prstGeom prst="rect">
-            <a:avLst/>
-          </a:prstGeom>
-          <a:solidFill>
-            <a:srgbClr val="FFFFFF"/>
-          </a:solidFill>
-          <a:ln w="15875">
-            <a:solidFill>
-              <a:srgbClr val="8A6E2A"/>
-            </a:solidFill>
-            <a:prstDash val="solid"/>
-          </a:ln>
-        </p:spPr>
-      </p:sp>
-      <p:sp>
-        <p:nvSpPr>
-          <p:cNvPr id="11" name="Text 9"/>
-          <p:cNvSpPr/>
-          <p:nvPr/>
-        </p:nvSpPr>
-        <p:spPr>
-          <a:xfrm>
-            <a:off x="731520" y="4288536"/>
-            <a:ext cx="10314432" cy="612648"/>
-          </a:xfrm>
-          <a:prstGeom prst="rect">
-            <a:avLst/>
-          </a:prstGeom>
-          <a:noFill/>
-          <a:ln/>
-        </p:spPr>
-        <p:txBody>
-          <a:bodyPr wrap="square" lIns="0" tIns="0" rIns="0" bIns="0" rtlCol="0" anchor="t"/>
-          <a:lstStyle/>
-          <a:p>
-            <a:pPr algn="r" indent="0" marL="0">
-              <a:lnSpc>
-                <a:spcPts val="1800"/>
-              </a:lnSpc>
-              <a:buNone/>
-            </a:pPr>
-            <a:r>
-              <a:rPr lang="en-US" sz="1350" dirty="0">
-                <a:solidFill>
-                  <a:srgbClr val="0D1B2A"/>
-                </a:solidFill>
-                <a:latin typeface="Calibri" pitchFamily="34" charset="0"/>
-                <a:ea typeface="Calibri" pitchFamily="34" charset="-122"/>
-                <a:cs typeface="Calibri" pitchFamily="34" charset="-120"/>
-              </a:rPr>
-              <a:t>מה לוח הזמנים הריאלי לביצוע ההשבחה, ומה קורה אם הוא מתארך?</a:t>
-            </a:r>
-            <a:endParaRPr lang="en-US" sz="1350" dirty="0"/>
-          </a:p>
-        </p:txBody>
-      </p:sp>
-      <p:sp>
-        <p:nvSpPr>
-          <p:cNvPr id="12" name="Shape 10"/>
-          <p:cNvSpPr/>
-          <p:nvPr/>
-        </p:nvSpPr>
-        <p:spPr>
-          <a:xfrm>
-            <a:off x="11183112" y="4992624"/>
-            <a:ext cx="201168" cy="201168"/>
-          </a:xfrm>
-          <a:prstGeom prst="rect">
-            <a:avLst/>
-          </a:prstGeom>
-          <a:solidFill>
-            <a:srgbClr val="FFFFFF"/>
-          </a:solidFill>
-          <a:ln w="15875">
-            <a:solidFill>
-              <a:srgbClr val="8A6E2A"/>
-            </a:solidFill>
-            <a:prstDash val="solid"/>
-          </a:ln>
-        </p:spPr>
-      </p:sp>
-      <p:sp>
-        <p:nvSpPr>
-          <p:cNvPr id="13" name="Text 11"/>
-          <p:cNvSpPr/>
-          <p:nvPr/>
-        </p:nvSpPr>
-        <p:spPr>
-          <a:xfrm>
-            <a:off x="731520" y="4946904"/>
-            <a:ext cx="10314432" cy="612648"/>
-          </a:xfrm>
-          <a:prstGeom prst="rect">
-            <a:avLst/>
-          </a:prstGeom>
-          <a:noFill/>
-          <a:ln/>
-        </p:spPr>
-        <p:txBody>
-          <a:bodyPr wrap="square" lIns="0" tIns="0" rIns="0" bIns="0" rtlCol="0" anchor="t"/>
-          <a:lstStyle/>
-          <a:p>
-            <a:pPr algn="r" indent="0" marL="0">
-              <a:lnSpc>
-                <a:spcPts val="1800"/>
-              </a:lnSpc>
-              <a:buNone/>
-            </a:pPr>
-            <a:r>
-              <a:rPr lang="en-US" sz="1350" dirty="0">
-                <a:solidFill>
-                  <a:srgbClr val="0D1B2A"/>
-                </a:solidFill>
-                <a:latin typeface="Calibri" pitchFamily="34" charset="0"/>
-                <a:ea typeface="Calibri" pitchFamily="34" charset="-122"/>
-                <a:cs typeface="Calibri" pitchFamily="34" charset="-120"/>
-              </a:rPr>
-              <a:t>מתי "מספיק טוב" כדי למכור, לעומת להמשיך להחזיק ולחכות לערך נוסף?</a:t>
-            </a:r>
-            <a:endParaRPr lang="en-US" sz="1350" dirty="0"/>
           </a:p>
         </p:txBody>
       </p:sp>
@@ -5056,42 +5271,124 @@
           <a:chExt cx="0" cy="0"/>
         </a:xfrm>
       </p:grpSpPr>
-      <p:sp>
-        <p:nvSpPr>
-          <p:cNvPr id="2" name="Text 0"/>
-          <p:cNvSpPr/>
-          <p:nvPr>
-            <p:ph idx="100" type="title" hasCustomPrompt="1"/>
-          </p:nvPr>
-        </p:nvSpPr>
-        <p:spPr>
-          <a:xfrm>
-            <a:off x="731520" y="502920"/>
-            <a:ext cx="10725912" cy="822960"/>
-          </a:xfrm>
-          <a:prstGeom prst="rect">
-            <a:avLst/>
-          </a:prstGeom>
-          <a:noFill/>
-          <a:ln/>
-        </p:spPr>
-        <p:txBody>
-          <a:bodyPr wrap="square" rtlCol="0" anchor="ctr"/>
+      <p:pic>
+        <p:nvPicPr>
+          <p:cNvPr id="2" name="Image 0" descr="/tmp/claude-0/-home-user-Budget-bot/bb3508b1-6506-5404-ae67-cc0e6ad7c68b/scratchpad/deck/images/azrieli.jpg">    </p:cNvPr>
+          <p:cNvPicPr>
+            <a:picLocks noChangeAspect="1"/>
+          </p:cNvPicPr>
+          <p:nvPr/>
+        </p:nvPicPr>
+        <p:blipFill>
+          <a:blip r:embed="rId1"/>
+          <a:srcRect l="0" r="0" t="0" b="0"/>
+          <a:stretch/>
+        </p:blipFill>
+        <p:spPr>
+          <a:xfrm>
+            <a:off x="0" y="0"/>
+            <a:ext cx="12191695" cy="2103120"/>
+          </a:xfrm>
+          <a:prstGeom prst="rect">
+            <a:avLst/>
+          </a:prstGeom>
+        </p:spPr>
+      </p:pic>
+      <p:sp>
+        <p:nvSpPr>
+          <p:cNvPr id="3" name="Shape 0"/>
+          <p:cNvSpPr/>
+          <p:nvPr/>
+        </p:nvSpPr>
+        <p:spPr>
+          <a:xfrm>
+            <a:off x="0" y="0"/>
+            <a:ext cx="12191695" cy="2103120"/>
+          </a:xfrm>
+          <a:prstGeom prst="rect">
+            <a:avLst/>
+          </a:prstGeom>
+          <a:solidFill>
+            <a:srgbClr val="0D1B2A">
+              <a:alpha val="65000"/>
+            </a:srgbClr>
+          </a:solidFill>
+          <a:ln/>
+        </p:spPr>
+      </p:sp>
+      <p:sp>
+        <p:nvSpPr>
+          <p:cNvPr id="4" name="Text 1"/>
+          <p:cNvSpPr/>
+          <p:nvPr/>
+        </p:nvSpPr>
+        <p:spPr>
+          <a:xfrm>
+            <a:off x="731520" y="274320"/>
+            <a:ext cx="10725912" cy="320040"/>
+          </a:xfrm>
+          <a:prstGeom prst="rect">
+            <a:avLst/>
+          </a:prstGeom>
+          <a:noFill/>
+          <a:ln/>
+        </p:spPr>
+        <p:txBody>
+          <a:bodyPr wrap="square" lIns="0" tIns="0" rIns="0" bIns="0" rtlCol="0" anchor="ctr"/>
           <a:lstStyle/>
           <a:p>
             <a:pPr algn="r" indent="0" marL="0">
               <a:buNone/>
             </a:pPr>
             <a:r>
+              <a:rPr lang="en-US" sz="1100" b="1" spc="200" kern="0" dirty="0">
+                <a:solidFill>
+                  <a:srgbClr val="D4AE58"/>
+                </a:solidFill>
+                <a:latin typeface="Calibri" pitchFamily="34" charset="0"/>
+                <a:ea typeface="Calibri" pitchFamily="34" charset="-122"/>
+                <a:cs typeface="Calibri" pitchFamily="34" charset="-120"/>
+              </a:rPr>
+              <a:t>בתהליך</a:t>
+            </a:r>
+            <a:endParaRPr lang="en-US" sz="1100" dirty="0"/>
+          </a:p>
+        </p:txBody>
+      </p:sp>
+      <p:sp>
+        <p:nvSpPr>
+          <p:cNvPr id="5" name="Text 2"/>
+          <p:cNvSpPr/>
+          <p:nvPr/>
+        </p:nvSpPr>
+        <p:spPr>
+          <a:xfrm>
+            <a:off x="731520" y="594360"/>
+            <a:ext cx="10725912" cy="914400"/>
+          </a:xfrm>
+          <a:prstGeom prst="rect">
+            <a:avLst/>
+          </a:prstGeom>
+          <a:noFill/>
+          <a:ln/>
+        </p:spPr>
+        <p:txBody>
+          <a:bodyPr wrap="square" lIns="0" tIns="0" rIns="0" bIns="0" rtlCol="0" anchor="ctr"/>
+          <a:lstStyle/>
+          <a:p>
+            <a:pPr algn="r" indent="0" marL="0">
+              <a:buNone/>
+            </a:pPr>
+            <a:r>
               <a:rPr lang="en-US" sz="2800" b="1" dirty="0">
                 <a:solidFill>
-                  <a:srgbClr val="0D1B2A"/>
+                  <a:srgbClr val="FFFFFF"/>
                 </a:solidFill>
                 <a:latin typeface="Cambria" pitchFamily="34" charset="0"/>
                 <a:ea typeface="Cambria" pitchFamily="34" charset="-122"/>
                 <a:cs typeface="Cambria" pitchFamily="34" charset="-120"/>
               </a:rPr>
-              <a:t>למי זה מתאים, ולמי לא</a:t>
+              <a:t>שמעון התרסי, תל אביב</a:t>
             </a:r>
             <a:endParaRPr lang="en-US" sz="2800" dirty="0"/>
           </a:p>
@@ -5099,14 +5396,14 @@
       </p:sp>
       <p:sp>
         <p:nvSpPr>
-          <p:cNvPr id="3" name="Text 1"/>
-          <p:cNvSpPr/>
-          <p:nvPr/>
-        </p:nvSpPr>
-        <p:spPr>
-          <a:xfrm>
-            <a:off x="731520" y="1371600"/>
-            <a:ext cx="10725912" cy="457200"/>
+          <p:cNvPr id="6" name="Text 3"/>
+          <p:cNvSpPr/>
+          <p:nvPr/>
+        </p:nvSpPr>
+        <p:spPr>
+          <a:xfrm>
+            <a:off x="731520" y="2423160"/>
+            <a:ext cx="10725912" cy="822960"/>
           </a:xfrm>
           <a:prstGeom prst="rect">
             <a:avLst/>
@@ -5119,340 +5416,36 @@
           <a:lstStyle/>
           <a:p>
             <a:pPr algn="r" indent="0" marL="0">
-              <a:buNone/>
-            </a:pPr>
-            <a:r>
-              <a:rPr lang="en-US" sz="1400" dirty="0">
-                <a:solidFill>
-                  <a:srgbClr val="6B7280"/>
+              <a:lnSpc>
+                <a:spcPts val="2100"/>
+              </a:lnSpc>
+              <a:buNone/>
+            </a:pPr>
+            <a:r>
+              <a:rPr lang="en-US" sz="1450" dirty="0">
+                <a:solidFill>
+                  <a:srgbClr val="0D1B2A"/>
                 </a:solidFill>
                 <a:latin typeface="Calibri" pitchFamily="34" charset="0"/>
                 <a:ea typeface="Calibri" pitchFamily="34" charset="-122"/>
                 <a:cs typeface="Calibri" pitchFamily="34" charset="-120"/>
               </a:rPr>
-              <a:t>כדי לא לבזבז לכם זמן, בואו נהיה כנים כבר עכשיו.</a:t>
-            </a:r>
-            <a:endParaRPr lang="en-US" sz="1400" dirty="0"/>
-          </a:p>
-        </p:txBody>
-      </p:sp>
-      <p:sp>
-        <p:nvSpPr>
-          <p:cNvPr id="4" name="Shape 2"/>
-          <p:cNvSpPr/>
-          <p:nvPr/>
-        </p:nvSpPr>
-        <p:spPr>
-          <a:xfrm>
-            <a:off x="731520" y="2011680"/>
-            <a:ext cx="5120640" cy="3749040"/>
-          </a:xfrm>
-          <a:prstGeom prst="rect">
-            <a:avLst/>
-          </a:prstGeom>
-          <a:solidFill>
-            <a:srgbClr val="FBF4E2"/>
-          </a:solidFill>
-          <a:ln w="19050">
-            <a:solidFill>
-              <a:srgbClr val="B8963E"/>
-            </a:solidFill>
-            <a:prstDash val="solid"/>
-          </a:ln>
-        </p:spPr>
-      </p:sp>
-      <p:sp>
-        <p:nvSpPr>
-          <p:cNvPr id="5" name="Text 3"/>
-          <p:cNvSpPr/>
-          <p:nvPr/>
-        </p:nvSpPr>
-        <p:spPr>
-          <a:xfrm>
-            <a:off x="1005840" y="2240280"/>
-            <a:ext cx="4572000" cy="365760"/>
-          </a:xfrm>
-          <a:prstGeom prst="rect">
-            <a:avLst/>
-          </a:prstGeom>
-          <a:noFill/>
-          <a:ln/>
-        </p:spPr>
-        <p:txBody>
-          <a:bodyPr wrap="square" lIns="0" tIns="0" rIns="0" bIns="0" rtlCol="0" anchor="ctr"/>
-          <a:lstStyle/>
-          <a:p>
-            <a:pPr algn="r" indent="0" marL="0">
-              <a:buNone/>
-            </a:pPr>
-            <a:r>
-              <a:rPr lang="en-US" sz="1400" b="1" spc="100" kern="0" dirty="0">
-                <a:solidFill>
-                  <a:srgbClr val="8A6E2A"/>
-                </a:solidFill>
-                <a:latin typeface="Calibri" pitchFamily="34" charset="0"/>
-                <a:ea typeface="Calibri" pitchFamily="34" charset="-122"/>
-                <a:cs typeface="Calibri" pitchFamily="34" charset="-120"/>
-              </a:rPr>
-              <a:t>מתאים לכם אם</a:t>
-            </a:r>
-            <a:endParaRPr lang="en-US" sz="1400" dirty="0"/>
-          </a:p>
-        </p:txBody>
-      </p:sp>
-      <p:sp>
-        <p:nvSpPr>
-          <p:cNvPr id="6" name="Text 4"/>
-          <p:cNvSpPr/>
-          <p:nvPr/>
-        </p:nvSpPr>
-        <p:spPr>
-          <a:xfrm>
-            <a:off x="5257800" y="2788920"/>
-            <a:ext cx="365760" cy="548640"/>
-          </a:xfrm>
-          <a:prstGeom prst="rect">
-            <a:avLst/>
-          </a:prstGeom>
-          <a:noFill/>
-          <a:ln/>
-        </p:spPr>
-        <p:txBody>
-          <a:bodyPr wrap="square" lIns="0" tIns="0" rIns="0" bIns="0" rtlCol="0" anchor="t"/>
-          <a:lstStyle/>
-          <a:p>
-            <a:pPr algn="ctr" indent="0" marL="0">
-              <a:buNone/>
-            </a:pPr>
-            <a:r>
-              <a:rPr lang="en-US" sz="1600" b="1" dirty="0">
-                <a:solidFill>
-                  <a:srgbClr val="B8963E"/>
-                </a:solidFill>
-                <a:latin typeface="Calibri" pitchFamily="34" charset="0"/>
-                <a:ea typeface="Calibri" pitchFamily="34" charset="-122"/>
-                <a:cs typeface="Calibri" pitchFamily="34" charset="-120"/>
-              </a:rPr>
-              <a:t>✓</a:t>
-            </a:r>
-            <a:endParaRPr lang="en-US" sz="1600" dirty="0"/>
-          </a:p>
-        </p:txBody>
-      </p:sp>
-      <p:sp>
-        <p:nvSpPr>
-          <p:cNvPr id="7" name="Text 5"/>
-          <p:cNvSpPr/>
-          <p:nvPr/>
-        </p:nvSpPr>
-        <p:spPr>
-          <a:xfrm>
-            <a:off x="1005840" y="2788920"/>
-            <a:ext cx="4114800" cy="594360"/>
-          </a:xfrm>
-          <a:prstGeom prst="rect">
-            <a:avLst/>
-          </a:prstGeom>
-          <a:noFill/>
-          <a:ln/>
-        </p:spPr>
-        <p:txBody>
-          <a:bodyPr wrap="square" lIns="0" tIns="0" rIns="0" bIns="0" rtlCol="0" anchor="t"/>
-          <a:lstStyle/>
-          <a:p>
-            <a:pPr algn="r" indent="0" marL="0">
-              <a:lnSpc>
-                <a:spcPts val="1700"/>
-              </a:lnSpc>
-              <a:buNone/>
-            </a:pPr>
-            <a:r>
-              <a:rPr lang="en-US" sz="1300" dirty="0">
-                <a:solidFill>
-                  <a:srgbClr val="0D1B2A"/>
-                </a:solidFill>
-                <a:latin typeface="Calibri" pitchFamily="34" charset="0"/>
-                <a:ea typeface="Calibri" pitchFamily="34" charset="-122"/>
-                <a:cs typeface="Calibri" pitchFamily="34" charset="-120"/>
-              </a:rPr>
-              <a:t>יש לכם הון פנוי ואתם רוצים לתכנן נכון</a:t>
-            </a:r>
-            <a:endParaRPr lang="en-US" sz="1300" dirty="0"/>
-          </a:p>
-        </p:txBody>
-      </p:sp>
-      <p:sp>
-        <p:nvSpPr>
-          <p:cNvPr id="8" name="Text 6"/>
-          <p:cNvSpPr/>
-          <p:nvPr/>
-        </p:nvSpPr>
-        <p:spPr>
-          <a:xfrm>
-            <a:off x="5257800" y="3474720"/>
-            <a:ext cx="365760" cy="548640"/>
-          </a:xfrm>
-          <a:prstGeom prst="rect">
-            <a:avLst/>
-          </a:prstGeom>
-          <a:noFill/>
-          <a:ln/>
-        </p:spPr>
-        <p:txBody>
-          <a:bodyPr wrap="square" lIns="0" tIns="0" rIns="0" bIns="0" rtlCol="0" anchor="t"/>
-          <a:lstStyle/>
-          <a:p>
-            <a:pPr algn="ctr" indent="0" marL="0">
-              <a:buNone/>
-            </a:pPr>
-            <a:r>
-              <a:rPr lang="en-US" sz="1600" b="1" dirty="0">
-                <a:solidFill>
-                  <a:srgbClr val="B8963E"/>
-                </a:solidFill>
-                <a:latin typeface="Calibri" pitchFamily="34" charset="0"/>
-                <a:ea typeface="Calibri" pitchFamily="34" charset="-122"/>
-                <a:cs typeface="Calibri" pitchFamily="34" charset="-120"/>
-              </a:rPr>
-              <a:t>✓</a:t>
-            </a:r>
-            <a:endParaRPr lang="en-US" sz="1600" dirty="0"/>
-          </a:p>
-        </p:txBody>
-      </p:sp>
-      <p:sp>
-        <p:nvSpPr>
-          <p:cNvPr id="9" name="Text 7"/>
-          <p:cNvSpPr/>
-          <p:nvPr/>
-        </p:nvSpPr>
-        <p:spPr>
-          <a:xfrm>
-            <a:off x="1005840" y="3474720"/>
-            <a:ext cx="4114800" cy="594360"/>
-          </a:xfrm>
-          <a:prstGeom prst="rect">
-            <a:avLst/>
-          </a:prstGeom>
-          <a:noFill/>
-          <a:ln/>
-        </p:spPr>
-        <p:txBody>
-          <a:bodyPr wrap="square" lIns="0" tIns="0" rIns="0" bIns="0" rtlCol="0" anchor="t"/>
-          <a:lstStyle/>
-          <a:p>
-            <a:pPr algn="r" indent="0" marL="0">
-              <a:lnSpc>
-                <a:spcPts val="1700"/>
-              </a:lnSpc>
-              <a:buNone/>
-            </a:pPr>
-            <a:r>
-              <a:rPr lang="en-US" sz="1300" dirty="0">
-                <a:solidFill>
-                  <a:srgbClr val="0D1B2A"/>
-                </a:solidFill>
-                <a:latin typeface="Calibri" pitchFamily="34" charset="0"/>
-                <a:ea typeface="Calibri" pitchFamily="34" charset="-122"/>
-                <a:cs typeface="Calibri" pitchFamily="34" charset="-120"/>
-              </a:rPr>
-              <a:t>אתם מחפשים אסטרטגיה ארוכת טווח, לא "טיפ חם"</a:t>
-            </a:r>
-            <a:endParaRPr lang="en-US" sz="1300" dirty="0"/>
-          </a:p>
-        </p:txBody>
-      </p:sp>
-      <p:sp>
-        <p:nvSpPr>
-          <p:cNvPr id="10" name="Text 8"/>
-          <p:cNvSpPr/>
-          <p:nvPr/>
-        </p:nvSpPr>
-        <p:spPr>
-          <a:xfrm>
-            <a:off x="5257800" y="4160520"/>
-            <a:ext cx="365760" cy="548640"/>
-          </a:xfrm>
-          <a:prstGeom prst="rect">
-            <a:avLst/>
-          </a:prstGeom>
-          <a:noFill/>
-          <a:ln/>
-        </p:spPr>
-        <p:txBody>
-          <a:bodyPr wrap="square" lIns="0" tIns="0" rIns="0" bIns="0" rtlCol="0" anchor="t"/>
-          <a:lstStyle/>
-          <a:p>
-            <a:pPr algn="ctr" indent="0" marL="0">
-              <a:buNone/>
-            </a:pPr>
-            <a:r>
-              <a:rPr lang="en-US" sz="1600" b="1" dirty="0">
-                <a:solidFill>
-                  <a:srgbClr val="B8963E"/>
-                </a:solidFill>
-                <a:latin typeface="Calibri" pitchFamily="34" charset="0"/>
-                <a:ea typeface="Calibri" pitchFamily="34" charset="-122"/>
-                <a:cs typeface="Calibri" pitchFamily="34" charset="-120"/>
-              </a:rPr>
-              <a:t>✓</a:t>
-            </a:r>
-            <a:endParaRPr lang="en-US" sz="1600" dirty="0"/>
-          </a:p>
-        </p:txBody>
-      </p:sp>
-      <p:sp>
-        <p:nvSpPr>
-          <p:cNvPr id="11" name="Text 9"/>
-          <p:cNvSpPr/>
-          <p:nvPr/>
-        </p:nvSpPr>
-        <p:spPr>
-          <a:xfrm>
-            <a:off x="1005840" y="4160520"/>
-            <a:ext cx="4114800" cy="594360"/>
-          </a:xfrm>
-          <a:prstGeom prst="rect">
-            <a:avLst/>
-          </a:prstGeom>
-          <a:noFill/>
-          <a:ln/>
-        </p:spPr>
-        <p:txBody>
-          <a:bodyPr wrap="square" lIns="0" tIns="0" rIns="0" bIns="0" rtlCol="0" anchor="t"/>
-          <a:lstStyle/>
-          <a:p>
-            <a:pPr algn="r" indent="0" marL="0">
-              <a:lnSpc>
-                <a:spcPts val="1700"/>
-              </a:lnSpc>
-              <a:buNone/>
-            </a:pPr>
-            <a:r>
-              <a:rPr lang="en-US" sz="1300" dirty="0">
-                <a:solidFill>
-                  <a:srgbClr val="0D1B2A"/>
-                </a:solidFill>
-                <a:latin typeface="Calibri" pitchFamily="34" charset="0"/>
-                <a:ea typeface="Calibri" pitchFamily="34" charset="-122"/>
-                <a:cs typeface="Calibri" pitchFamily="34" charset="-120"/>
-              </a:rPr>
-              <a:t>מעניין אתכם שוק תל אביב באופן ספציפי</a:t>
-            </a:r>
-            <a:endParaRPr lang="en-US" sz="1300" dirty="0"/>
-          </a:p>
-        </p:txBody>
-      </p:sp>
-      <p:sp>
-        <p:nvSpPr>
-          <p:cNvPr id="12" name="Shape 10"/>
-          <p:cNvSpPr/>
-          <p:nvPr/>
-        </p:nvSpPr>
-        <p:spPr>
-          <a:xfrm>
-            <a:off x="6336792" y="2011680"/>
-            <a:ext cx="5120640" cy="3749040"/>
+              <a:t>שילוב בין פוטנציאל השבחה בטווח הקצר לבין אפשרויות התחדשות עירונית בטווח הבינוני והארוך.</a:t>
+            </a:r>
+            <a:endParaRPr lang="en-US" sz="1450" dirty="0"/>
+          </a:p>
+        </p:txBody>
+      </p:sp>
+      <p:sp>
+        <p:nvSpPr>
+          <p:cNvPr id="7" name="Shape 4"/>
+          <p:cNvSpPr/>
+          <p:nvPr/>
+        </p:nvSpPr>
+        <p:spPr>
+          <a:xfrm>
+            <a:off x="731520" y="3429000"/>
+            <a:ext cx="3429000" cy="1691640"/>
           </a:xfrm>
           <a:prstGeom prst="rect">
             <a:avLst/>
@@ -5460,7 +5453,7 @@
           <a:solidFill>
             <a:srgbClr val="F8F7F4"/>
           </a:solidFill>
-          <a:ln w="19050">
+          <a:ln w="12700">
             <a:solidFill>
               <a:srgbClr val="E8E2D4"/>
             </a:solidFill>
@@ -5470,30 +5463,69 @@
       </p:sp>
       <p:sp>
         <p:nvSpPr>
-          <p:cNvPr id="13" name="Text 11"/>
-          <p:cNvSpPr/>
-          <p:nvPr/>
-        </p:nvSpPr>
-        <p:spPr>
-          <a:xfrm>
-            <a:off x="6611112" y="2240280"/>
-            <a:ext cx="4572000" cy="365760"/>
-          </a:xfrm>
-          <a:prstGeom prst="rect">
-            <a:avLst/>
-          </a:prstGeom>
-          <a:noFill/>
-          <a:ln/>
-        </p:spPr>
-        <p:txBody>
-          <a:bodyPr wrap="square" lIns="0" tIns="0" rIns="0" bIns="0" rtlCol="0" anchor="ctr"/>
-          <a:lstStyle/>
-          <a:p>
-            <a:pPr algn="r" indent="0" marL="0">
-              <a:buNone/>
-            </a:pPr>
-            <a:r>
-              <a:rPr lang="en-US" sz="1400" b="1" spc="100" kern="0" dirty="0">
+          <p:cNvPr id="8" name="Text 5"/>
+          <p:cNvSpPr/>
+          <p:nvPr/>
+        </p:nvSpPr>
+        <p:spPr>
+          <a:xfrm>
+            <a:off x="822960" y="3538728"/>
+            <a:ext cx="3246120" cy="930402"/>
+          </a:xfrm>
+          <a:prstGeom prst="rect">
+            <a:avLst/>
+          </a:prstGeom>
+          <a:noFill/>
+          <a:ln/>
+        </p:spPr>
+        <p:txBody>
+          <a:bodyPr wrap="square" lIns="0" tIns="0" rIns="0" bIns="0" rtlCol="0" anchor="b"/>
+          <a:lstStyle/>
+          <a:p>
+            <a:pPr algn="ctr" indent="0" marL="0">
+              <a:buNone/>
+            </a:pPr>
+            <a:r>
+              <a:rPr lang="en-US" sz="3000" b="1" dirty="0">
+                <a:solidFill>
+                  <a:srgbClr val="8A6E2A"/>
+                </a:solidFill>
+                <a:latin typeface="Cambria" pitchFamily="34" charset="0"/>
+                <a:ea typeface="Cambria" pitchFamily="34" charset="-122"/>
+                <a:cs typeface="Cambria" pitchFamily="34" charset="-120"/>
+              </a:rPr>
+              <a:t>₪2.8M</a:t>
+            </a:r>
+            <a:endParaRPr lang="en-US" sz="3000" dirty="0"/>
+          </a:p>
+        </p:txBody>
+      </p:sp>
+      <p:sp>
+        <p:nvSpPr>
+          <p:cNvPr id="9" name="Text 6"/>
+          <p:cNvSpPr/>
+          <p:nvPr/>
+        </p:nvSpPr>
+        <p:spPr>
+          <a:xfrm>
+            <a:off x="822960" y="4443984"/>
+            <a:ext cx="3246120" cy="592074"/>
+          </a:xfrm>
+          <a:prstGeom prst="rect">
+            <a:avLst/>
+          </a:prstGeom>
+          <a:noFill/>
+          <a:ln/>
+        </p:spPr>
+        <p:txBody>
+          <a:bodyPr wrap="square" lIns="0" tIns="0" rIns="0" bIns="0" rtlCol="0" anchor="t"/>
+          <a:lstStyle/>
+          <a:p>
+            <a:pPr algn="ctr" indent="0" marL="0">
+              <a:buNone/>
+            </a:pPr>
+            <a:r>
+              <a:rPr lang="en-US" sz="1100" dirty="0">
                 <a:solidFill>
                   <a:srgbClr val="6B7280"/>
                 </a:solidFill>
@@ -5501,22 +5533,86 @@
                 <a:ea typeface="Calibri" pitchFamily="34" charset="-122"/>
                 <a:cs typeface="Calibri" pitchFamily="34" charset="-120"/>
               </a:rPr>
-              <a:t>כנראה לא מתאים אם</a:t>
-            </a:r>
-            <a:endParaRPr lang="en-US" sz="1400" dirty="0"/>
-          </a:p>
-        </p:txBody>
-      </p:sp>
-      <p:sp>
-        <p:nvSpPr>
-          <p:cNvPr id="14" name="Text 12"/>
-          <p:cNvSpPr/>
-          <p:nvPr/>
-        </p:nvSpPr>
-        <p:spPr>
-          <a:xfrm>
-            <a:off x="10863072" y="2788920"/>
-            <a:ext cx="365760" cy="548640"/>
+              <a:t>מחיר רכישה</a:t>
+            </a:r>
+            <a:endParaRPr lang="en-US" sz="1100" dirty="0"/>
+          </a:p>
+        </p:txBody>
+      </p:sp>
+      <p:sp>
+        <p:nvSpPr>
+          <p:cNvPr id="10" name="Shape 7"/>
+          <p:cNvSpPr/>
+          <p:nvPr/>
+        </p:nvSpPr>
+        <p:spPr>
+          <a:xfrm>
+            <a:off x="4434840" y="3429000"/>
+            <a:ext cx="3429000" cy="1691640"/>
+          </a:xfrm>
+          <a:prstGeom prst="rect">
+            <a:avLst/>
+          </a:prstGeom>
+          <a:solidFill>
+            <a:srgbClr val="F8F7F4"/>
+          </a:solidFill>
+          <a:ln w="12700">
+            <a:solidFill>
+              <a:srgbClr val="E8E2D4"/>
+            </a:solidFill>
+            <a:prstDash val="solid"/>
+          </a:ln>
+        </p:spPr>
+      </p:sp>
+      <p:sp>
+        <p:nvSpPr>
+          <p:cNvPr id="11" name="Text 8"/>
+          <p:cNvSpPr/>
+          <p:nvPr/>
+        </p:nvSpPr>
+        <p:spPr>
+          <a:xfrm>
+            <a:off x="4526280" y="3538728"/>
+            <a:ext cx="3246120" cy="930402"/>
+          </a:xfrm>
+          <a:prstGeom prst="rect">
+            <a:avLst/>
+          </a:prstGeom>
+          <a:noFill/>
+          <a:ln/>
+        </p:spPr>
+        <p:txBody>
+          <a:bodyPr wrap="square" lIns="0" tIns="0" rIns="0" bIns="0" rtlCol="0" anchor="b"/>
+          <a:lstStyle/>
+          <a:p>
+            <a:pPr algn="ctr" indent="0" marL="0">
+              <a:buNone/>
+            </a:pPr>
+            <a:r>
+              <a:rPr lang="en-US" sz="3000" b="1" dirty="0">
+                <a:solidFill>
+                  <a:srgbClr val="8A6E2A"/>
+                </a:solidFill>
+                <a:latin typeface="Cambria" pitchFamily="34" charset="0"/>
+                <a:ea typeface="Cambria" pitchFamily="34" charset="-122"/>
+                <a:cs typeface="Cambria" pitchFamily="34" charset="-120"/>
+              </a:rPr>
+              <a:t>₪320K</a:t>
+            </a:r>
+            <a:endParaRPr lang="en-US" sz="3000" dirty="0"/>
+          </a:p>
+        </p:txBody>
+      </p:sp>
+      <p:sp>
+        <p:nvSpPr>
+          <p:cNvPr id="12" name="Text 9"/>
+          <p:cNvSpPr/>
+          <p:nvPr/>
+        </p:nvSpPr>
+        <p:spPr>
+          <a:xfrm>
+            <a:off x="4526280" y="4443984"/>
+            <a:ext cx="3246120" cy="592074"/>
           </a:xfrm>
           <a:prstGeom prst="rect">
             <a:avLst/>
@@ -5532,30 +5628,94 @@
               <a:buNone/>
             </a:pPr>
             <a:r>
-              <a:rPr lang="en-US" sz="1600" b="1" dirty="0">
-                <a:solidFill>
-                  <a:srgbClr val="9CA3AF"/>
+              <a:rPr lang="en-US" sz="1100" dirty="0">
+                <a:solidFill>
+                  <a:srgbClr val="6B7280"/>
                 </a:solidFill>
                 <a:latin typeface="Calibri" pitchFamily="34" charset="0"/>
                 <a:ea typeface="Calibri" pitchFamily="34" charset="-122"/>
                 <a:cs typeface="Calibri" pitchFamily="34" charset="-120"/>
               </a:rPr>
-              <a:t>✕</a:t>
-            </a:r>
-            <a:endParaRPr lang="en-US" sz="1600" dirty="0"/>
-          </a:p>
-        </p:txBody>
-      </p:sp>
-      <p:sp>
-        <p:nvSpPr>
-          <p:cNvPr id="15" name="Text 13"/>
-          <p:cNvSpPr/>
-          <p:nvPr/>
-        </p:nvSpPr>
-        <p:spPr>
-          <a:xfrm>
-            <a:off x="6611112" y="2788920"/>
-            <a:ext cx="4114800" cy="594360"/>
+              <a:t>עלות השבחה</a:t>
+            </a:r>
+            <a:endParaRPr lang="en-US" sz="1100" dirty="0"/>
+          </a:p>
+        </p:txBody>
+      </p:sp>
+      <p:sp>
+        <p:nvSpPr>
+          <p:cNvPr id="13" name="Shape 10"/>
+          <p:cNvSpPr/>
+          <p:nvPr/>
+        </p:nvSpPr>
+        <p:spPr>
+          <a:xfrm>
+            <a:off x="8138160" y="3429000"/>
+            <a:ext cx="3429000" cy="1691640"/>
+          </a:xfrm>
+          <a:prstGeom prst="rect">
+            <a:avLst/>
+          </a:prstGeom>
+          <a:solidFill>
+            <a:srgbClr val="FBF4E2"/>
+          </a:solidFill>
+          <a:ln w="12700">
+            <a:solidFill>
+              <a:srgbClr val="E8E2D4"/>
+            </a:solidFill>
+            <a:prstDash val="solid"/>
+          </a:ln>
+        </p:spPr>
+      </p:sp>
+      <p:sp>
+        <p:nvSpPr>
+          <p:cNvPr id="14" name="Text 11"/>
+          <p:cNvSpPr/>
+          <p:nvPr/>
+        </p:nvSpPr>
+        <p:spPr>
+          <a:xfrm>
+            <a:off x="8229600" y="3538728"/>
+            <a:ext cx="3246120" cy="930402"/>
+          </a:xfrm>
+          <a:prstGeom prst="rect">
+            <a:avLst/>
+          </a:prstGeom>
+          <a:noFill/>
+          <a:ln/>
+        </p:spPr>
+        <p:txBody>
+          <a:bodyPr wrap="square" lIns="0" tIns="0" rIns="0" bIns="0" rtlCol="0" anchor="b"/>
+          <a:lstStyle/>
+          <a:p>
+            <a:pPr algn="ctr" indent="0" marL="0">
+              <a:buNone/>
+            </a:pPr>
+            <a:r>
+              <a:rPr lang="en-US" sz="3000" b="1" dirty="0">
+                <a:solidFill>
+                  <a:srgbClr val="8A6E2A"/>
+                </a:solidFill>
+                <a:latin typeface="Cambria" pitchFamily="34" charset="0"/>
+                <a:ea typeface="Cambria" pitchFamily="34" charset="-122"/>
+                <a:cs typeface="Cambria" pitchFamily="34" charset="-120"/>
+              </a:rPr>
+              <a:t>₪4.2M</a:t>
+            </a:r>
+            <a:endParaRPr lang="en-US" sz="3000" dirty="0"/>
+          </a:p>
+        </p:txBody>
+      </p:sp>
+      <p:sp>
+        <p:nvSpPr>
+          <p:cNvPr id="15" name="Text 12"/>
+          <p:cNvSpPr/>
+          <p:nvPr/>
+        </p:nvSpPr>
+        <p:spPr>
+          <a:xfrm>
+            <a:off x="8229600" y="4443984"/>
+            <a:ext cx="3246120" cy="592074"/>
           </a:xfrm>
           <a:prstGeom prst="rect">
             <a:avLst/>
@@ -5567,186 +5727,51 @@
           <a:bodyPr wrap="square" lIns="0" tIns="0" rIns="0" bIns="0" rtlCol="0" anchor="t"/>
           <a:lstStyle/>
           <a:p>
-            <a:pPr algn="r" indent="0" marL="0">
-              <a:lnSpc>
-                <a:spcPts val="1700"/>
-              </a:lnSpc>
-              <a:buNone/>
-            </a:pPr>
-            <a:r>
-              <a:rPr lang="en-US" sz="1300" dirty="0">
-                <a:solidFill>
-                  <a:srgbClr val="0D1B2A"/>
+            <a:pPr algn="ctr" indent="0" marL="0">
+              <a:buNone/>
+            </a:pPr>
+            <a:r>
+              <a:rPr lang="en-US" sz="1100" dirty="0">
+                <a:solidFill>
+                  <a:srgbClr val="6B7280"/>
                 </a:solidFill>
                 <a:latin typeface="Calibri" pitchFamily="34" charset="0"/>
                 <a:ea typeface="Calibri" pitchFamily="34" charset="-122"/>
                 <a:cs typeface="Calibri" pitchFamily="34" charset="-120"/>
               </a:rPr>
-              <a:t>אתם מחפשים "התעשרות מהירה" בלי סיכון</a:t>
-            </a:r>
-            <a:endParaRPr lang="en-US" sz="1300" dirty="0"/>
-          </a:p>
-        </p:txBody>
-      </p:sp>
-      <p:sp>
-        <p:nvSpPr>
-          <p:cNvPr id="16" name="Text 14"/>
-          <p:cNvSpPr/>
-          <p:nvPr/>
-        </p:nvSpPr>
-        <p:spPr>
-          <a:xfrm>
-            <a:off x="10863072" y="3474720"/>
-            <a:ext cx="365760" cy="548640"/>
-          </a:xfrm>
-          <a:prstGeom prst="rect">
-            <a:avLst/>
-          </a:prstGeom>
-          <a:noFill/>
-          <a:ln/>
-        </p:spPr>
-        <p:txBody>
-          <a:bodyPr wrap="square" lIns="0" tIns="0" rIns="0" bIns="0" rtlCol="0" anchor="t"/>
-          <a:lstStyle/>
-          <a:p>
-            <a:pPr algn="ctr" indent="0" marL="0">
-              <a:buNone/>
-            </a:pPr>
-            <a:r>
-              <a:rPr lang="en-US" sz="1600" b="1" dirty="0">
-                <a:solidFill>
-                  <a:srgbClr val="9CA3AF"/>
-                </a:solidFill>
-                <a:latin typeface="Calibri" pitchFamily="34" charset="0"/>
-                <a:ea typeface="Calibri" pitchFamily="34" charset="-122"/>
-                <a:cs typeface="Calibri" pitchFamily="34" charset="-120"/>
-              </a:rPr>
-              <a:t>✕</a:t>
-            </a:r>
-            <a:endParaRPr lang="en-US" sz="1600" dirty="0"/>
-          </a:p>
-        </p:txBody>
-      </p:sp>
-      <p:sp>
-        <p:nvSpPr>
-          <p:cNvPr id="17" name="Text 15"/>
-          <p:cNvSpPr/>
-          <p:nvPr/>
-        </p:nvSpPr>
-        <p:spPr>
-          <a:xfrm>
-            <a:off x="6611112" y="3474720"/>
-            <a:ext cx="4114800" cy="594360"/>
-          </a:xfrm>
-          <a:prstGeom prst="rect">
-            <a:avLst/>
-          </a:prstGeom>
-          <a:noFill/>
-          <a:ln/>
-        </p:spPr>
-        <p:txBody>
-          <a:bodyPr wrap="square" lIns="0" tIns="0" rIns="0" bIns="0" rtlCol="0" anchor="t"/>
+              <a:t>שווי צפוי</a:t>
+            </a:r>
+            <a:endParaRPr lang="en-US" sz="1100" dirty="0"/>
+          </a:p>
+        </p:txBody>
+      </p:sp>
+      <p:sp>
+        <p:nvSpPr>
+          <p:cNvPr id="16" name="Text 0"/>
+          <p:cNvSpPr/>
+          <p:nvPr>
+            <p:ph idx="100" type="title" hasCustomPrompt="1"/>
+          </p:nvPr>
+        </p:nvSpPr>
+        <p:spPr>
+          <a:xfrm>
+            <a:off x="731520" y="502920"/>
+            <a:ext cx="10725912" cy="822960"/>
+          </a:xfrm>
+          <a:prstGeom prst="rect">
+            <a:avLst/>
+          </a:prstGeom>
+          <a:noFill/>
+          <a:ln/>
+        </p:spPr>
+        <p:txBody>
+          <a:bodyPr wrap="square" rtlCol="0" anchor="ctr"/>
           <a:lstStyle/>
           <a:p>
             <a:pPr algn="r" indent="0" marL="0">
-              <a:lnSpc>
-                <a:spcPts val="1700"/>
-              </a:lnSpc>
-              <a:buNone/>
-            </a:pPr>
-            <a:r>
-              <a:rPr lang="en-US" sz="1300" dirty="0">
-                <a:solidFill>
-                  <a:srgbClr val="0D1B2A"/>
-                </a:solidFill>
-                <a:latin typeface="Calibri" pitchFamily="34" charset="0"/>
-                <a:ea typeface="Calibri" pitchFamily="34" charset="-122"/>
-                <a:cs typeface="Calibri" pitchFamily="34" charset="-120"/>
-              </a:rPr>
-              <a:t>אין לכם שום הון פנוי או אופק להשקעה</a:t>
-            </a:r>
-            <a:endParaRPr lang="en-US" sz="1300" dirty="0"/>
-          </a:p>
-        </p:txBody>
-      </p:sp>
-      <p:sp>
-        <p:nvSpPr>
-          <p:cNvPr id="18" name="Text 16"/>
-          <p:cNvSpPr/>
-          <p:nvPr/>
-        </p:nvSpPr>
-        <p:spPr>
-          <a:xfrm>
-            <a:off x="10863072" y="4160520"/>
-            <a:ext cx="365760" cy="548640"/>
-          </a:xfrm>
-          <a:prstGeom prst="rect">
-            <a:avLst/>
-          </a:prstGeom>
-          <a:noFill/>
-          <a:ln/>
-        </p:spPr>
-        <p:txBody>
-          <a:bodyPr wrap="square" lIns="0" tIns="0" rIns="0" bIns="0" rtlCol="0" anchor="t"/>
-          <a:lstStyle/>
-          <a:p>
-            <a:pPr algn="ctr" indent="0" marL="0">
-              <a:buNone/>
-            </a:pPr>
-            <a:r>
-              <a:rPr lang="en-US" sz="1600" b="1" dirty="0">
-                <a:solidFill>
-                  <a:srgbClr val="9CA3AF"/>
-                </a:solidFill>
-                <a:latin typeface="Calibri" pitchFamily="34" charset="0"/>
-                <a:ea typeface="Calibri" pitchFamily="34" charset="-122"/>
-                <a:cs typeface="Calibri" pitchFamily="34" charset="-120"/>
-              </a:rPr>
-              <a:t>✕</a:t>
-            </a:r>
-            <a:endParaRPr lang="en-US" sz="1600" dirty="0"/>
-          </a:p>
-        </p:txBody>
-      </p:sp>
-      <p:sp>
-        <p:nvSpPr>
-          <p:cNvPr id="19" name="Text 17"/>
-          <p:cNvSpPr/>
-          <p:nvPr/>
-        </p:nvSpPr>
-        <p:spPr>
-          <a:xfrm>
-            <a:off x="6611112" y="4160520"/>
-            <a:ext cx="4114800" cy="594360"/>
-          </a:xfrm>
-          <a:prstGeom prst="rect">
-            <a:avLst/>
-          </a:prstGeom>
-          <a:noFill/>
-          <a:ln/>
-        </p:spPr>
-        <p:txBody>
-          <a:bodyPr wrap="square" lIns="0" tIns="0" rIns="0" bIns="0" rtlCol="0" anchor="t"/>
-          <a:lstStyle/>
-          <a:p>
-            <a:pPr algn="r" indent="0" marL="0">
-              <a:lnSpc>
-                <a:spcPts val="1700"/>
-              </a:lnSpc>
-              <a:buNone/>
-            </a:pPr>
-            <a:r>
-              <a:rPr lang="en-US" sz="1300" dirty="0">
-                <a:solidFill>
-                  <a:srgbClr val="0D1B2A"/>
-                </a:solidFill>
-                <a:latin typeface="Calibri" pitchFamily="34" charset="0"/>
-                <a:ea typeface="Calibri" pitchFamily="34" charset="-122"/>
-                <a:cs typeface="Calibri" pitchFamily="34" charset="-120"/>
-              </a:rPr>
-              <a:t>אתם לא מוכנים לקפיצת מדרגה בחייכם</a:t>
-            </a:r>
-            <a:endParaRPr lang="en-US" sz="1300" dirty="0"/>
+              <a:buNone/>
+            </a:pPr>
+            <a:endParaRPr lang="en-US" sz="2800" dirty="0"/>
           </a:p>
         </p:txBody>
       </p:sp>
@@ -5823,16 +5848,187 @@
           <a:chExt cx="0" cy="0"/>
         </a:xfrm>
       </p:grpSpPr>
-      <p:sp>
-        <p:nvSpPr>
-          <p:cNvPr id="2" name="Text 0"/>
-          <p:cNvSpPr/>
-          <p:nvPr/>
-        </p:nvSpPr>
-        <p:spPr>
-          <a:xfrm>
-            <a:off x="914400" y="2286000"/>
-            <a:ext cx="10360152" cy="457200"/>
+      <p:pic>
+        <p:nvPicPr>
+          <p:cNvPr id="2" name="Image 0" descr="/tmp/claude-0/-home-user-Budget-bot/bb3508b1-6506-5404-ae67-cc0e6ad7c68b/scratchpad/deck/images/tel aviv sky line.jpg">    </p:cNvPr>
+          <p:cNvPicPr>
+            <a:picLocks noChangeAspect="1"/>
+          </p:cNvPicPr>
+          <p:nvPr/>
+        </p:nvPicPr>
+        <p:blipFill>
+          <a:blip r:embed="rId1"/>
+          <a:srcRect l="0" r="0" t="0" b="0"/>
+          <a:stretch/>
+        </p:blipFill>
+        <p:spPr>
+          <a:xfrm>
+            <a:off x="0" y="0"/>
+            <a:ext cx="4480560" cy="6858000"/>
+          </a:xfrm>
+          <a:prstGeom prst="rect">
+            <a:avLst/>
+          </a:prstGeom>
+        </p:spPr>
+      </p:pic>
+      <p:sp>
+        <p:nvSpPr>
+          <p:cNvPr id="3" name="Shape 0"/>
+          <p:cNvSpPr/>
+          <p:nvPr/>
+        </p:nvSpPr>
+        <p:spPr>
+          <a:xfrm>
+            <a:off x="0" y="0"/>
+            <a:ext cx="4480560" cy="6858000"/>
+          </a:xfrm>
+          <a:prstGeom prst="rect">
+            <a:avLst/>
+          </a:prstGeom>
+          <a:solidFill>
+            <a:srgbClr val="0D1B2A">
+              <a:alpha val="28000"/>
+            </a:srgbClr>
+          </a:solidFill>
+          <a:ln/>
+        </p:spPr>
+      </p:sp>
+      <p:sp>
+        <p:nvSpPr>
+          <p:cNvPr id="4" name="Text 1"/>
+          <p:cNvSpPr/>
+          <p:nvPr/>
+        </p:nvSpPr>
+        <p:spPr>
+          <a:xfrm>
+            <a:off x="5166360" y="502920"/>
+            <a:ext cx="1371600" cy="1188720"/>
+          </a:xfrm>
+          <a:prstGeom prst="rect">
+            <a:avLst/>
+          </a:prstGeom>
+          <a:noFill/>
+          <a:ln/>
+        </p:spPr>
+        <p:txBody>
+          <a:bodyPr wrap="square" lIns="0" tIns="0" rIns="0" bIns="0" rtlCol="0" anchor="t"/>
+          <a:lstStyle/>
+          <a:p>
+            <a:pPr algn="r" indent="0" marL="0">
+              <a:buNone/>
+            </a:pPr>
+            <a:r>
+              <a:rPr lang="en-US" sz="9000" b="1" dirty="0">
+                <a:solidFill>
+                  <a:srgbClr val="ECE1C6"/>
+                </a:solidFill>
+                <a:latin typeface="Cambria" pitchFamily="34" charset="0"/>
+                <a:ea typeface="Cambria" pitchFamily="34" charset="-122"/>
+                <a:cs typeface="Cambria" pitchFamily="34" charset="-120"/>
+              </a:rPr>
+              <a:t>”</a:t>
+            </a:r>
+            <a:endParaRPr lang="en-US" sz="9000" dirty="0"/>
+          </a:p>
+        </p:txBody>
+      </p:sp>
+      <p:sp>
+        <p:nvSpPr>
+          <p:cNvPr id="5" name="Text 2"/>
+          <p:cNvSpPr/>
+          <p:nvPr/>
+        </p:nvSpPr>
+        <p:spPr>
+          <a:xfrm>
+            <a:off x="5166360" y="1737360"/>
+            <a:ext cx="6293815" cy="2743200"/>
+          </a:xfrm>
+          <a:prstGeom prst="rect">
+            <a:avLst/>
+          </a:prstGeom>
+          <a:noFill/>
+          <a:ln/>
+        </p:spPr>
+        <p:txBody>
+          <a:bodyPr wrap="square" lIns="0" tIns="0" rIns="0" bIns="0" rtlCol="0" anchor="t"/>
+          <a:lstStyle/>
+          <a:p>
+            <a:pPr algn="r" indent="0" marL="0">
+              <a:lnSpc>
+                <a:spcPct val="135000"/>
+              </a:lnSpc>
+              <a:buNone/>
+            </a:pPr>
+            <a:r>
+              <a:rPr lang="en-US" sz="2100" i="1" dirty="0">
+                <a:solidFill>
+                  <a:srgbClr val="0D1B2A"/>
+                </a:solidFill>
+                <a:latin typeface="Cambria" pitchFamily="34" charset="0"/>
+                <a:ea typeface="Cambria" pitchFamily="34" charset="-122"/>
+                <a:cs typeface="Cambria" pitchFamily="34" charset="-120"/>
+              </a:rPr>
+              <a:t>ראיתי בדיוק את הנתונים, את הסיכונים ואת הפוטנציאל.</a:t>
+            </a:r>
+            <a:endParaRPr lang="en-US" sz="2100" dirty="0"/>
+          </a:p>
+          <a:p>
+            <a:pPr algn="r" indent="0" marL="0">
+              <a:lnSpc>
+                <a:spcPct val="135000"/>
+              </a:lnSpc>
+              <a:buNone/>
+            </a:pPr>
+            <a:r>
+              <a:rPr lang="en-US" sz="2100" i="1" dirty="0">
+                <a:solidFill>
+                  <a:srgbClr val="0D1B2A"/>
+                </a:solidFill>
+                <a:latin typeface="Cambria" pitchFamily="34" charset="0"/>
+                <a:ea typeface="Cambria" pitchFamily="34" charset="-122"/>
+                <a:cs typeface="Cambria" pitchFamily="34" charset="-120"/>
+              </a:rPr>
+              <a:t>קיבלתי החלטה מתוך ביטחון, לא מתוך לחץ.</a:t>
+            </a:r>
+            <a:endParaRPr lang="en-US" sz="2100" dirty="0"/>
+          </a:p>
+        </p:txBody>
+      </p:sp>
+      <p:sp>
+        <p:nvSpPr>
+          <p:cNvPr id="6" name="Shape 3"/>
+          <p:cNvSpPr/>
+          <p:nvPr/>
+        </p:nvSpPr>
+        <p:spPr>
+          <a:xfrm>
+            <a:off x="10911535" y="4709160"/>
+            <a:ext cx="502920" cy="502920"/>
+          </a:xfrm>
+          <a:prstGeom prst="ellipse">
+            <a:avLst/>
+          </a:prstGeom>
+          <a:solidFill>
+            <a:srgbClr val="F8F7F4"/>
+          </a:solidFill>
+          <a:ln w="19050">
+            <a:solidFill>
+              <a:srgbClr val="B8963E"/>
+            </a:solidFill>
+            <a:prstDash val="solid"/>
+          </a:ln>
+        </p:spPr>
+      </p:sp>
+      <p:sp>
+        <p:nvSpPr>
+          <p:cNvPr id="7" name="Text 4"/>
+          <p:cNvSpPr/>
+          <p:nvPr/>
+        </p:nvSpPr>
+        <p:spPr>
+          <a:xfrm>
+            <a:off x="10911535" y="4709160"/>
+            <a:ext cx="502920" cy="502920"/>
           </a:xfrm>
           <a:prstGeom prst="rect">
             <a:avLst/>
@@ -5848,23 +6044,101 @@
               <a:buNone/>
             </a:pPr>
             <a:r>
-              <a:rPr lang="en-US" sz="1300" b="1" spc="200" kern="0" dirty="0">
-                <a:solidFill>
-                  <a:srgbClr val="D4AE58"/>
+              <a:rPr lang="en-US" sz="1500" b="1" dirty="0">
+                <a:solidFill>
+                  <a:srgbClr val="8A6E2A"/>
+                </a:solidFill>
+                <a:latin typeface="Cambria" pitchFamily="34" charset="0"/>
+                <a:ea typeface="Cambria" pitchFamily="34" charset="-122"/>
+                <a:cs typeface="Cambria" pitchFamily="34" charset="-120"/>
+              </a:rPr>
+              <a:t>דל</a:t>
+            </a:r>
+            <a:endParaRPr lang="en-US" sz="1500" dirty="0"/>
+          </a:p>
+        </p:txBody>
+      </p:sp>
+      <p:sp>
+        <p:nvSpPr>
+          <p:cNvPr id="8" name="Text 5"/>
+          <p:cNvSpPr/>
+          <p:nvPr/>
+        </p:nvSpPr>
+        <p:spPr>
+          <a:xfrm>
+            <a:off x="5166360" y="4754880"/>
+            <a:ext cx="5608015" cy="320040"/>
+          </a:xfrm>
+          <a:prstGeom prst="rect">
+            <a:avLst/>
+          </a:prstGeom>
+          <a:noFill/>
+          <a:ln/>
+        </p:spPr>
+        <p:txBody>
+          <a:bodyPr wrap="square" lIns="0" tIns="0" rIns="0" bIns="0" rtlCol="0" anchor="ctr"/>
+          <a:lstStyle/>
+          <a:p>
+            <a:pPr algn="r" indent="0" marL="0">
+              <a:buNone/>
+            </a:pPr>
+            <a:r>
+              <a:rPr lang="en-US" sz="1400" b="1" dirty="0">
+                <a:solidFill>
+                  <a:srgbClr val="0D1B2A"/>
                 </a:solidFill>
                 <a:latin typeface="Calibri" pitchFamily="34" charset="0"/>
                 <a:ea typeface="Calibri" pitchFamily="34" charset="-122"/>
                 <a:cs typeface="Calibri" pitchFamily="34" charset="-120"/>
               </a:rPr>
-              <a:t>מי מעביר את הוובינר</a:t>
-            </a:r>
-            <a:endParaRPr lang="en-US" sz="1300" dirty="0"/>
-          </a:p>
-        </p:txBody>
-      </p:sp>
-      <p:sp>
-        <p:nvSpPr>
-          <p:cNvPr id="3" name="Text 0"/>
+              <a:t>ד. לוי</a:t>
+            </a:r>
+            <a:endParaRPr lang="en-US" sz="1400" dirty="0"/>
+          </a:p>
+        </p:txBody>
+      </p:sp>
+      <p:sp>
+        <p:nvSpPr>
+          <p:cNvPr id="9" name="Text 6"/>
+          <p:cNvSpPr/>
+          <p:nvPr/>
+        </p:nvSpPr>
+        <p:spPr>
+          <a:xfrm>
+            <a:off x="5166360" y="5074920"/>
+            <a:ext cx="5608015" cy="320040"/>
+          </a:xfrm>
+          <a:prstGeom prst="rect">
+            <a:avLst/>
+          </a:prstGeom>
+          <a:noFill/>
+          <a:ln/>
+        </p:spPr>
+        <p:txBody>
+          <a:bodyPr wrap="square" lIns="0" tIns="0" rIns="0" bIns="0" rtlCol="0" anchor="t"/>
+          <a:lstStyle/>
+          <a:p>
+            <a:pPr algn="r" indent="0" marL="0">
+              <a:buNone/>
+            </a:pPr>
+            <a:r>
+              <a:rPr lang="en-US" sz="1150" dirty="0">
+                <a:solidFill>
+                  <a:srgbClr val="6B7280"/>
+                </a:solidFill>
+                <a:latin typeface="Calibri" pitchFamily="34" charset="0"/>
+                <a:ea typeface="Calibri" pitchFamily="34" charset="-122"/>
+                <a:cs typeface="Calibri" pitchFamily="34" charset="-120"/>
+              </a:rPr>
+              <a:t>משקיעה, לקוחה The Investor's Circle</a:t>
+            </a:r>
+            <a:endParaRPr lang="en-US" sz="1150" dirty="0"/>
+          </a:p>
+        </p:txBody>
+      </p:sp>
+      <p:sp>
+        <p:nvSpPr>
+          <p:cNvPr id="10" name="Text 0"/>
           <p:cNvSpPr/>
           <p:nvPr>
             <p:ph idx="100" type="title" hasCustomPrompt="1"/>
@@ -5872,8 +6146,8 @@
         </p:nvSpPr>
         <p:spPr>
           <a:xfrm>
-            <a:off x="914400" y="2880360"/>
-            <a:ext cx="10360152" cy="1188720"/>
+            <a:off x="731520" y="502920"/>
+            <a:ext cx="10725912" cy="822960"/>
           </a:xfrm>
           <a:prstGeom prst="rect">
             <a:avLst/>
@@ -5885,21 +6159,58 @@
           <a:bodyPr wrap="square" rtlCol="0" anchor="ctr"/>
           <a:lstStyle/>
           <a:p>
-            <a:pPr algn="ctr" indent="0" marL="0">
-              <a:buNone/>
-            </a:pPr>
-            <a:r>
-              <a:rPr lang="en-US" sz="3400" b="1" dirty="0">
-                <a:solidFill>
-                  <a:srgbClr val="FFFFFF"/>
-                </a:solidFill>
-                <a:latin typeface="Cambria" pitchFamily="34" charset="0"/>
-                <a:ea typeface="Cambria" pitchFamily="34" charset="-122"/>
-                <a:cs typeface="Cambria" pitchFamily="34" charset="-120"/>
-              </a:rPr>
-              <a:t>קצת עלינו, אנשים בדיוק כמוכם</a:t>
-            </a:r>
-            <a:endParaRPr lang="en-US" sz="3400" dirty="0"/>
+            <a:pPr algn="r" indent="0" marL="0">
+              <a:buNone/>
+            </a:pPr>
+            <a:endParaRPr lang="en-US" sz="2800" dirty="0"/>
+          </a:p>
+        </p:txBody>
+      </p:sp>
+      <p:sp>
+        <p:nvSpPr>
+          <p:cNvPr id="25" name="Slide Number Placeholder 0"/>
+          <p:cNvSpPr>
+            <a:spLocks noGrp="1"/>
+          </p:cNvSpPr>
+          <p:nvPr>
+            <p:ph type="sldNum" sz="quarter" idx="4294967295"/>
+          </p:nvPr>
+        </p:nvSpPr>
+        <p:spPr>
+          <a:xfrm>
+            <a:off x="11612880" y="6473952"/>
+            <a:ext cx="800000" cy="300000"/>
+          </a:xfrm>
+          <a:prstGeom prst="rect">
+            <a:avLst/>
+          </a:prstGeom>
+          <a:extLst>
+            <a:ext uri="{C572A759-6A51-4108-AA02-DFA0A04FC94B}">
+              <ma14:wrappingTextBoxFlag xmlns:ma14="http://schemas.microsoft.com/office/mac/drawingml/2011/main" val="0"/>
+            </a:ext>
+          </a:extLst>
+        </p:spPr>
+        <p:txBody>
+          <a:bodyPr/>
+          <a:lstStyle>
+            <a:lvl1pPr>
+              <a:defRPr sz="900">
+                <a:solidFill>
+                  <a:srgbClr val="9CA3AF"/>
+                </a:solidFill>
+                <a:latin typeface="Calibri"/>
+                <a:ea typeface="Calibri"/>
+                <a:cs typeface="Calibri"/>
+              </a:defRPr>
+            </a:lvl1pPr>
+          </a:lstStyle>
+          <a:p>
+            <a:pPr algn="l"/>
+            <a:fld id="{F7021451-1387-4CA6-816F-3879F97B5CBC}" type="slidenum">
+              <a:rPr b="0" lang="en-US"/>
+              <a:t>15</a:t>
+            </a:fld>
+            <a:endParaRPr lang="en-US"/>
           </a:p>
         </p:txBody>
       </p:sp>
@@ -5930,86 +6241,20 @@
       </p:grpSpPr>
       <p:sp>
         <p:nvSpPr>
-          <p:cNvPr id="2" name="Text 0"/>
-          <p:cNvSpPr/>
-          <p:nvPr>
-            <p:ph idx="100" type="title" hasCustomPrompt="1"/>
-          </p:nvPr>
-        </p:nvSpPr>
-        <p:spPr>
-          <a:xfrm>
-            <a:off x="731520" y="502920"/>
-            <a:ext cx="10725912" cy="822960"/>
-          </a:xfrm>
-          <a:prstGeom prst="rect">
-            <a:avLst/>
-          </a:prstGeom>
-          <a:noFill/>
-          <a:ln/>
-        </p:spPr>
-        <p:txBody>
-          <a:bodyPr wrap="square" rtlCol="0" anchor="ctr"/>
-          <a:lstStyle/>
-          <a:p>
-            <a:pPr algn="r" indent="0" marL="0">
-              <a:buNone/>
-            </a:pPr>
-            <a:r>
-              <a:rPr lang="en-US" sz="2800" b="1" dirty="0">
-                <a:solidFill>
-                  <a:srgbClr val="0D1B2A"/>
-                </a:solidFill>
-                <a:latin typeface="Cambria" pitchFamily="34" charset="0"/>
-                <a:ea typeface="Cambria" pitchFamily="34" charset="-122"/>
-                <a:cs typeface="Cambria" pitchFamily="34" charset="-120"/>
-              </a:rPr>
-              <a:t>הצוות מאחורי The Investor's Circle TLV</a:t>
-            </a:r>
-            <a:endParaRPr lang="en-US" sz="2800" dirty="0"/>
-          </a:p>
-        </p:txBody>
-      </p:sp>
-      <p:sp>
-        <p:nvSpPr>
-          <p:cNvPr id="3" name="Shape 1"/>
-          <p:cNvSpPr/>
-          <p:nvPr/>
-        </p:nvSpPr>
-        <p:spPr>
-          <a:xfrm>
-            <a:off x="731520" y="1691640"/>
-            <a:ext cx="5074920" cy="3931920"/>
-          </a:xfrm>
-          <a:prstGeom prst="rect">
+          <p:cNvPr id="2" name="Shape 0"/>
+          <p:cNvSpPr/>
+          <p:nvPr/>
+        </p:nvSpPr>
+        <p:spPr>
+          <a:xfrm>
+            <a:off x="731520" y="457200"/>
+            <a:ext cx="594360" cy="594360"/>
+          </a:xfrm>
+          <a:prstGeom prst="ellipse">
             <a:avLst/>
           </a:prstGeom>
           <a:solidFill>
             <a:srgbClr val="FFFFFF"/>
-          </a:solidFill>
-          <a:ln w="15875">
-            <a:solidFill>
-              <a:srgbClr val="E8E2D4"/>
-            </a:solidFill>
-            <a:prstDash val="solid"/>
-          </a:ln>
-        </p:spPr>
-      </p:sp>
-      <p:sp>
-        <p:nvSpPr>
-          <p:cNvPr id="4" name="Shape 2"/>
-          <p:cNvSpPr/>
-          <p:nvPr/>
-        </p:nvSpPr>
-        <p:spPr>
-          <a:xfrm>
-            <a:off x="2766060" y="1965960"/>
-            <a:ext cx="1005840" cy="1005840"/>
-          </a:xfrm>
-          <a:prstGeom prst="ellipse">
-            <a:avLst/>
-          </a:prstGeom>
-          <a:solidFill>
-            <a:srgbClr val="F8F7F4"/>
           </a:solidFill>
           <a:ln w="25400">
             <a:solidFill>
@@ -6021,14 +6266,14 @@
       </p:sp>
       <p:sp>
         <p:nvSpPr>
-          <p:cNvPr id="5" name="Text 3"/>
-          <p:cNvSpPr/>
-          <p:nvPr/>
-        </p:nvSpPr>
-        <p:spPr>
-          <a:xfrm>
-            <a:off x="2766060" y="1965960"/>
-            <a:ext cx="1005840" cy="1005840"/>
+          <p:cNvPr id="3" name="Text 1"/>
+          <p:cNvSpPr/>
+          <p:nvPr/>
+        </p:nvSpPr>
+        <p:spPr>
+          <a:xfrm>
+            <a:off x="731520" y="457200"/>
+            <a:ext cx="594360" cy="594360"/>
           </a:xfrm>
           <a:prstGeom prst="rect">
             <a:avLst/>
@@ -6052,7 +6297,7 @@
                 <a:ea typeface="Cambria" pitchFamily="34" charset="-122"/>
                 <a:cs typeface="Cambria" pitchFamily="34" charset="-120"/>
               </a:rPr>
-              <a:t>דא</a:t>
+              <a:t>3</a:t>
             </a:r>
             <a:endParaRPr lang="en-US" sz="2400" dirty="0"/>
           </a:p>
@@ -6060,134 +6305,97 @@
       </p:sp>
       <p:sp>
         <p:nvSpPr>
-          <p:cNvPr id="6" name="Text 4"/>
-          <p:cNvSpPr/>
-          <p:nvPr/>
-        </p:nvSpPr>
-        <p:spPr>
-          <a:xfrm>
-            <a:off x="1005840" y="3154680"/>
-            <a:ext cx="4526280" cy="320040"/>
-          </a:xfrm>
-          <a:prstGeom prst="rect">
-            <a:avLst/>
-          </a:prstGeom>
-          <a:noFill/>
-          <a:ln/>
-        </p:spPr>
-        <p:txBody>
-          <a:bodyPr wrap="square" lIns="0" tIns="0" rIns="0" bIns="0" rtlCol="0" anchor="ctr"/>
-          <a:lstStyle/>
-          <a:p>
-            <a:pPr algn="ctr" indent="0" marL="0">
-              <a:buNone/>
-            </a:pPr>
-            <a:r>
-              <a:rPr lang="en-US" sz="1100" b="1" spc="100" kern="0" dirty="0">
-                <a:solidFill>
-                  <a:srgbClr val="8A6E2A"/>
+          <p:cNvPr id="4" name="Text 0"/>
+          <p:cNvSpPr/>
+          <p:nvPr>
+            <p:ph idx="100" type="title" hasCustomPrompt="1"/>
+          </p:nvPr>
+        </p:nvSpPr>
+        <p:spPr>
+          <a:xfrm>
+            <a:off x="731520" y="502920"/>
+            <a:ext cx="10725912" cy="822960"/>
+          </a:xfrm>
+          <a:prstGeom prst="rect">
+            <a:avLst/>
+          </a:prstGeom>
+          <a:noFill/>
+          <a:ln/>
+        </p:spPr>
+        <p:txBody>
+          <a:bodyPr wrap="square" rtlCol="0" anchor="ctr"/>
+          <a:lstStyle/>
+          <a:p>
+            <a:pPr algn="r" indent="0" marL="0">
+              <a:buNone/>
+            </a:pPr>
+            <a:r>
+              <a:rPr lang="en-US" sz="2800" b="1" dirty="0">
+                <a:solidFill>
+                  <a:srgbClr val="0D1B2A"/>
+                </a:solidFill>
+                <a:latin typeface="Cambria" pitchFamily="34" charset="0"/>
+                <a:ea typeface="Cambria" pitchFamily="34" charset="-122"/>
+                <a:cs typeface="Cambria" pitchFamily="34" charset="-120"/>
+              </a:rPr>
+              <a:t>מימוש ותשואה</a:t>
+            </a:r>
+            <a:endParaRPr lang="en-US" sz="2800" dirty="0"/>
+          </a:p>
+        </p:txBody>
+      </p:sp>
+      <p:sp>
+        <p:nvSpPr>
+          <p:cNvPr id="5" name="Text 3"/>
+          <p:cNvSpPr/>
+          <p:nvPr/>
+        </p:nvSpPr>
+        <p:spPr>
+          <a:xfrm>
+            <a:off x="731520" y="2057400"/>
+            <a:ext cx="10725912" cy="731520"/>
+          </a:xfrm>
+          <a:prstGeom prst="rect">
+            <a:avLst/>
+          </a:prstGeom>
+          <a:noFill/>
+          <a:ln/>
+        </p:spPr>
+        <p:txBody>
+          <a:bodyPr wrap="square" lIns="0" tIns="0" rIns="0" bIns="0" rtlCol="0" anchor="t"/>
+          <a:lstStyle/>
+          <a:p>
+            <a:pPr algn="r" indent="0" marL="0">
+              <a:lnSpc>
+                <a:spcPts val="1900"/>
+              </a:lnSpc>
+              <a:buNone/>
+            </a:pPr>
+            <a:r>
+              <a:rPr lang="en-US" sz="1400" dirty="0">
+                <a:solidFill>
+                  <a:srgbClr val="6B7280"/>
                 </a:solidFill>
                 <a:latin typeface="Calibri" pitchFamily="34" charset="0"/>
                 <a:ea typeface="Calibri" pitchFamily="34" charset="-122"/>
                 <a:cs typeface="Calibri" pitchFamily="34" charset="-120"/>
               </a:rPr>
-              <a:t>מייסד ושותף מנהל</a:t>
-            </a:r>
-            <a:endParaRPr lang="en-US" sz="1100" dirty="0"/>
-          </a:p>
-        </p:txBody>
-      </p:sp>
-      <p:sp>
-        <p:nvSpPr>
-          <p:cNvPr id="7" name="Text 5"/>
-          <p:cNvSpPr/>
-          <p:nvPr/>
-        </p:nvSpPr>
-        <p:spPr>
-          <a:xfrm>
-            <a:off x="1005840" y="3474720"/>
-            <a:ext cx="4526280" cy="457200"/>
-          </a:xfrm>
-          <a:prstGeom prst="rect">
-            <a:avLst/>
-          </a:prstGeom>
-          <a:noFill/>
-          <a:ln/>
-        </p:spPr>
-        <p:txBody>
-          <a:bodyPr wrap="square" lIns="0" tIns="0" rIns="0" bIns="0" rtlCol="0" anchor="ctr"/>
-          <a:lstStyle/>
-          <a:p>
-            <a:pPr algn="ctr" indent="0" marL="0">
-              <a:buNone/>
-            </a:pPr>
-            <a:r>
-              <a:rPr lang="en-US" sz="2000" b="1" dirty="0">
-                <a:solidFill>
-                  <a:srgbClr val="0D1B2A"/>
-                </a:solidFill>
-                <a:latin typeface="Cambria" pitchFamily="34" charset="0"/>
-                <a:ea typeface="Cambria" pitchFamily="34" charset="-122"/>
-                <a:cs typeface="Cambria" pitchFamily="34" charset="-120"/>
-              </a:rPr>
-              <a:t>דורון אפריאט</a:t>
-            </a:r>
-            <a:endParaRPr lang="en-US" sz="2000" dirty="0"/>
-          </a:p>
-        </p:txBody>
-      </p:sp>
-      <p:sp>
-        <p:nvSpPr>
-          <p:cNvPr id="8" name="Text 6"/>
-          <p:cNvSpPr/>
-          <p:nvPr/>
-        </p:nvSpPr>
-        <p:spPr>
-          <a:xfrm>
-            <a:off x="1097280" y="4023360"/>
-            <a:ext cx="4343400" cy="1463040"/>
-          </a:xfrm>
-          <a:prstGeom prst="rect">
-            <a:avLst/>
-          </a:prstGeom>
-          <a:noFill/>
-          <a:ln/>
-        </p:spPr>
-        <p:txBody>
-          <a:bodyPr wrap="square" lIns="0" tIns="0" rIns="0" bIns="0" rtlCol="0" anchor="t"/>
-          <a:lstStyle/>
-          <a:p>
-            <a:pPr algn="ctr" indent="0" marL="0">
-              <a:lnSpc>
-                <a:spcPts val="1700"/>
-              </a:lnSpc>
-              <a:buNone/>
-            </a:pPr>
-            <a:r>
-              <a:rPr lang="en-US" sz="1200" dirty="0">
-                <a:solidFill>
-                  <a:srgbClr val="6B7280"/>
-                </a:solidFill>
-                <a:latin typeface="Calibri" pitchFamily="34" charset="0"/>
-                <a:ea typeface="Calibri" pitchFamily="34" charset="-122"/>
-                <a:cs typeface="Calibri" pitchFamily="34" charset="-120"/>
-              </a:rPr>
-              <a:t>למעלה מ-15 שנות ניסיון באיתור הזדמנויות והשבחת נכסים בתל אביב, בדגש על הצפון הישן ולב העיר. כל עסקה נבחנת דרך שלוש עדשות: כלכלית, תכנונית ועסקית.</a:t>
-            </a:r>
-            <a:endParaRPr lang="en-US" sz="1200" dirty="0"/>
-          </a:p>
-        </p:txBody>
-      </p:sp>
-      <p:sp>
-        <p:nvSpPr>
-          <p:cNvPr id="9" name="Shape 7"/>
-          <p:cNvSpPr/>
-          <p:nvPr/>
-        </p:nvSpPr>
-        <p:spPr>
-          <a:xfrm>
-            <a:off x="6355080" y="1691640"/>
-            <a:ext cx="5074920" cy="3931920"/>
+              <a:t>הרכישה היא רק ההתחלה. השלב הזה קובע אם ההשקעה תישאר דירה שקניתם ומקווים, או תהפוך לתשואה אמיתית.</a:t>
+            </a:r>
+            <a:endParaRPr lang="en-US" sz="1400" dirty="0"/>
+          </a:p>
+        </p:txBody>
+      </p:sp>
+      <p:sp>
+        <p:nvSpPr>
+          <p:cNvPr id="6" name="Shape 4"/>
+          <p:cNvSpPr/>
+          <p:nvPr/>
+        </p:nvSpPr>
+        <p:spPr>
+          <a:xfrm>
+            <a:off x="11183112" y="3017520"/>
+            <a:ext cx="201168" cy="201168"/>
           </a:xfrm>
           <a:prstGeom prst="rect">
             <a:avLst/>
@@ -6197,7 +6405,7 @@
           </a:solidFill>
           <a:ln w="15875">
             <a:solidFill>
-              <a:srgbClr val="E8E2D4"/>
+              <a:srgbClr val="8A6E2A"/>
             </a:solidFill>
             <a:prstDash val="solid"/>
           </a:ln>
@@ -6205,24 +6413,66 @@
       </p:sp>
       <p:sp>
         <p:nvSpPr>
-          <p:cNvPr id="10" name="Shape 8"/>
-          <p:cNvSpPr/>
-          <p:nvPr/>
-        </p:nvSpPr>
-        <p:spPr>
-          <a:xfrm>
-            <a:off x="8389620" y="1965960"/>
-            <a:ext cx="1005840" cy="1005840"/>
-          </a:xfrm>
-          <a:prstGeom prst="ellipse">
+          <p:cNvPr id="7" name="Text 5"/>
+          <p:cNvSpPr/>
+          <p:nvPr/>
+        </p:nvSpPr>
+        <p:spPr>
+          <a:xfrm>
+            <a:off x="731520" y="2971800"/>
+            <a:ext cx="10314432" cy="612648"/>
+          </a:xfrm>
+          <a:prstGeom prst="rect">
+            <a:avLst/>
+          </a:prstGeom>
+          <a:noFill/>
+          <a:ln/>
+        </p:spPr>
+        <p:txBody>
+          <a:bodyPr wrap="square" lIns="0" tIns="0" rIns="0" bIns="0" rtlCol="0" anchor="t"/>
+          <a:lstStyle/>
+          <a:p>
+            <a:pPr algn="r" indent="0" marL="0">
+              <a:lnSpc>
+                <a:spcPts val="1800"/>
+              </a:lnSpc>
+              <a:buNone/>
+            </a:pPr>
+            <a:r>
+              <a:rPr lang="en-US" sz="1350" dirty="0">
+                <a:solidFill>
+                  <a:srgbClr val="0D1B2A"/>
+                </a:solidFill>
+                <a:latin typeface="Calibri" pitchFamily="34" charset="0"/>
+                <a:ea typeface="Calibri" pitchFamily="34" charset="-122"/>
+                <a:cs typeface="Calibri" pitchFamily="34" charset="-120"/>
+              </a:rPr>
+              <a:t>האם המטרה היא הכנסה שוטפת (השכרה) או מימוש חד-פעמי (מכירה לאחר השבחה)?</a:t>
+            </a:r>
+            <a:endParaRPr lang="en-US" sz="1350" dirty="0"/>
+          </a:p>
+        </p:txBody>
+      </p:sp>
+      <p:sp>
+        <p:nvSpPr>
+          <p:cNvPr id="8" name="Shape 6"/>
+          <p:cNvSpPr/>
+          <p:nvPr/>
+        </p:nvSpPr>
+        <p:spPr>
+          <a:xfrm>
+            <a:off x="11183112" y="3675888"/>
+            <a:ext cx="201168" cy="201168"/>
+          </a:xfrm>
+          <a:prstGeom prst="rect">
             <a:avLst/>
           </a:prstGeom>
           <a:solidFill>
-            <a:srgbClr val="F8F7F4"/>
+            <a:srgbClr val="FFFFFF"/>
           </a:solidFill>
-          <a:ln w="25400">
+          <a:ln w="15875">
             <a:solidFill>
-              <a:srgbClr val="B8963E"/>
+              <a:srgbClr val="8A6E2A"/>
             </a:solidFill>
             <a:prstDash val="solid"/>
           </a:ln>
@@ -6230,160 +6480,177 @@
       </p:sp>
       <p:sp>
         <p:nvSpPr>
-          <p:cNvPr id="11" name="Text 9"/>
-          <p:cNvSpPr/>
-          <p:nvPr/>
-        </p:nvSpPr>
-        <p:spPr>
-          <a:xfrm>
-            <a:off x="8389620" y="1965960"/>
-            <a:ext cx="1005840" cy="1005840"/>
-          </a:xfrm>
-          <a:prstGeom prst="rect">
-            <a:avLst/>
-          </a:prstGeom>
-          <a:noFill/>
-          <a:ln/>
-        </p:spPr>
-        <p:txBody>
-          <a:bodyPr wrap="square" lIns="0" tIns="0" rIns="0" bIns="0" rtlCol="0" anchor="ctr"/>
-          <a:lstStyle/>
-          <a:p>
-            <a:pPr algn="ctr" indent="0" marL="0">
-              <a:buNone/>
-            </a:pPr>
-            <a:r>
-              <a:rPr lang="en-US" sz="2400" b="1" dirty="0">
-                <a:solidFill>
-                  <a:srgbClr val="8A6E2A"/>
-                </a:solidFill>
-                <a:latin typeface="Cambria" pitchFamily="34" charset="0"/>
-                <a:ea typeface="Cambria" pitchFamily="34" charset="-122"/>
-                <a:cs typeface="Cambria" pitchFamily="34" charset="-120"/>
-              </a:rPr>
-              <a:t>יל</a:t>
-            </a:r>
-            <a:endParaRPr lang="en-US" sz="2400" dirty="0"/>
-          </a:p>
-        </p:txBody>
-      </p:sp>
-      <p:sp>
-        <p:nvSpPr>
-          <p:cNvPr id="12" name="Text 10"/>
-          <p:cNvSpPr/>
-          <p:nvPr/>
-        </p:nvSpPr>
-        <p:spPr>
-          <a:xfrm>
-            <a:off x="6629400" y="3154680"/>
-            <a:ext cx="4526280" cy="320040"/>
-          </a:xfrm>
-          <a:prstGeom prst="rect">
-            <a:avLst/>
-          </a:prstGeom>
-          <a:noFill/>
-          <a:ln/>
-        </p:spPr>
-        <p:txBody>
-          <a:bodyPr wrap="square" lIns="0" tIns="0" rIns="0" bIns="0" rtlCol="0" anchor="ctr"/>
-          <a:lstStyle/>
-          <a:p>
-            <a:pPr algn="ctr" indent="0" marL="0">
-              <a:buNone/>
-            </a:pPr>
-            <a:r>
-              <a:rPr lang="en-US" sz="1100" b="1" spc="100" kern="0" dirty="0">
-                <a:solidFill>
-                  <a:srgbClr val="8A6E2A"/>
+          <p:cNvPr id="9" name="Text 7"/>
+          <p:cNvSpPr/>
+          <p:nvPr/>
+        </p:nvSpPr>
+        <p:spPr>
+          <a:xfrm>
+            <a:off x="731520" y="3630168"/>
+            <a:ext cx="10314432" cy="612648"/>
+          </a:xfrm>
+          <a:prstGeom prst="rect">
+            <a:avLst/>
+          </a:prstGeom>
+          <a:noFill/>
+          <a:ln/>
+        </p:spPr>
+        <p:txBody>
+          <a:bodyPr wrap="square" lIns="0" tIns="0" rIns="0" bIns="0" rtlCol="0" anchor="t"/>
+          <a:lstStyle/>
+          <a:p>
+            <a:pPr algn="r" indent="0" marL="0">
+              <a:lnSpc>
+                <a:spcPts val="1800"/>
+              </a:lnSpc>
+              <a:buNone/>
+            </a:pPr>
+            <a:r>
+              <a:rPr lang="en-US" sz="1350" dirty="0">
+                <a:solidFill>
+                  <a:srgbClr val="0D1B2A"/>
                 </a:solidFill>
                 <a:latin typeface="Calibri" pitchFamily="34" charset="0"/>
                 <a:ea typeface="Calibri" pitchFamily="34" charset="-122"/>
                 <a:cs typeface="Calibri" pitchFamily="34" charset="-120"/>
               </a:rPr>
-              <a:t>שותף ומנהל שיווק ופיתוח עסקי</a:t>
-            </a:r>
-            <a:endParaRPr lang="en-US" sz="1100" dirty="0"/>
-          </a:p>
-        </p:txBody>
-      </p:sp>
-      <p:sp>
-        <p:nvSpPr>
-          <p:cNvPr id="13" name="Text 11"/>
-          <p:cNvSpPr/>
-          <p:nvPr/>
-        </p:nvSpPr>
-        <p:spPr>
-          <a:xfrm>
-            <a:off x="6629400" y="3474720"/>
-            <a:ext cx="4526280" cy="457200"/>
-          </a:xfrm>
-          <a:prstGeom prst="rect">
-            <a:avLst/>
-          </a:prstGeom>
-          <a:noFill/>
-          <a:ln/>
-        </p:spPr>
-        <p:txBody>
-          <a:bodyPr wrap="square" lIns="0" tIns="0" rIns="0" bIns="0" rtlCol="0" anchor="ctr"/>
-          <a:lstStyle/>
-          <a:p>
-            <a:pPr algn="ctr" indent="0" marL="0">
-              <a:buNone/>
-            </a:pPr>
-            <a:r>
-              <a:rPr lang="en-US" sz="2000" b="1" dirty="0">
+              <a:t>מי מלווה את הביצוע בפועל: קבלן, מתכנן, עורך דין, יועץ מיסוי?</a:t>
+            </a:r>
+            <a:endParaRPr lang="en-US" sz="1350" dirty="0"/>
+          </a:p>
+        </p:txBody>
+      </p:sp>
+      <p:sp>
+        <p:nvSpPr>
+          <p:cNvPr id="10" name="Shape 8"/>
+          <p:cNvSpPr/>
+          <p:nvPr/>
+        </p:nvSpPr>
+        <p:spPr>
+          <a:xfrm>
+            <a:off x="11183112" y="4334256"/>
+            <a:ext cx="201168" cy="201168"/>
+          </a:xfrm>
+          <a:prstGeom prst="rect">
+            <a:avLst/>
+          </a:prstGeom>
+          <a:solidFill>
+            <a:srgbClr val="FFFFFF"/>
+          </a:solidFill>
+          <a:ln w="15875">
+            <a:solidFill>
+              <a:srgbClr val="8A6E2A"/>
+            </a:solidFill>
+            <a:prstDash val="solid"/>
+          </a:ln>
+        </p:spPr>
+      </p:sp>
+      <p:sp>
+        <p:nvSpPr>
+          <p:cNvPr id="11" name="Text 9"/>
+          <p:cNvSpPr/>
+          <p:nvPr/>
+        </p:nvSpPr>
+        <p:spPr>
+          <a:xfrm>
+            <a:off x="731520" y="4288536"/>
+            <a:ext cx="10314432" cy="612648"/>
+          </a:xfrm>
+          <a:prstGeom prst="rect">
+            <a:avLst/>
+          </a:prstGeom>
+          <a:noFill/>
+          <a:ln/>
+        </p:spPr>
+        <p:txBody>
+          <a:bodyPr wrap="square" lIns="0" tIns="0" rIns="0" bIns="0" rtlCol="0" anchor="t"/>
+          <a:lstStyle/>
+          <a:p>
+            <a:pPr algn="r" indent="0" marL="0">
+              <a:lnSpc>
+                <a:spcPts val="1800"/>
+              </a:lnSpc>
+              <a:buNone/>
+            </a:pPr>
+            <a:r>
+              <a:rPr lang="en-US" sz="1350" dirty="0">
                 <a:solidFill>
                   <a:srgbClr val="0D1B2A"/>
-                </a:solidFill>
-                <a:latin typeface="Cambria" pitchFamily="34" charset="0"/>
-                <a:ea typeface="Cambria" pitchFamily="34" charset="-122"/>
-                <a:cs typeface="Cambria" pitchFamily="34" charset="-120"/>
-              </a:rPr>
-              <a:t>יובל לב</a:t>
-            </a:r>
-            <a:endParaRPr lang="en-US" sz="2000" dirty="0"/>
-          </a:p>
-        </p:txBody>
-      </p:sp>
-      <p:sp>
-        <p:nvSpPr>
-          <p:cNvPr id="14" name="Text 12"/>
-          <p:cNvSpPr/>
-          <p:nvPr/>
-        </p:nvSpPr>
-        <p:spPr>
-          <a:xfrm>
-            <a:off x="6720840" y="4023360"/>
-            <a:ext cx="4343400" cy="1463040"/>
-          </a:xfrm>
-          <a:prstGeom prst="rect">
-            <a:avLst/>
-          </a:prstGeom>
-          <a:noFill/>
-          <a:ln/>
-        </p:spPr>
-        <p:txBody>
-          <a:bodyPr wrap="square" lIns="0" tIns="0" rIns="0" bIns="0" rtlCol="0" anchor="t"/>
-          <a:lstStyle/>
-          <a:p>
-            <a:pPr algn="ctr" indent="0" marL="0">
-              <a:lnSpc>
-                <a:spcPts val="1700"/>
-              </a:lnSpc>
-              <a:buNone/>
-            </a:pPr>
-            <a:r>
-              <a:rPr lang="en-US" sz="1200" dirty="0">
-                <a:solidFill>
-                  <a:srgbClr val="6B7280"/>
                 </a:solidFill>
                 <a:latin typeface="Calibri" pitchFamily="34" charset="0"/>
                 <a:ea typeface="Calibri" pitchFamily="34" charset="-122"/>
                 <a:cs typeface="Calibri" pitchFamily="34" charset="-120"/>
               </a:rPr>
-              <a:t>למעלה מעשור בניהול שיווק ופיתוח עסקי, לצד פעילות מעשית בנדל"ן. מתמחה במיצוי פוטנציאל הנכס לאחר הרכישה, ובהפיכת כל לקוח למשקיע בטוח ועצמאי יותר.</a:t>
-            </a:r>
-            <a:endParaRPr lang="en-US" sz="1200" dirty="0"/>
+              <a:t>מה לוח הזמנים הריאלי לביצוע ההשבחה, ומה קורה אם הוא מתארך?</a:t>
+            </a:r>
+            <a:endParaRPr lang="en-US" sz="1350" dirty="0"/>
+          </a:p>
+        </p:txBody>
+      </p:sp>
+      <p:sp>
+        <p:nvSpPr>
+          <p:cNvPr id="12" name="Shape 10"/>
+          <p:cNvSpPr/>
+          <p:nvPr/>
+        </p:nvSpPr>
+        <p:spPr>
+          <a:xfrm>
+            <a:off x="11183112" y="4992624"/>
+            <a:ext cx="201168" cy="201168"/>
+          </a:xfrm>
+          <a:prstGeom prst="rect">
+            <a:avLst/>
+          </a:prstGeom>
+          <a:solidFill>
+            <a:srgbClr val="FFFFFF"/>
+          </a:solidFill>
+          <a:ln w="15875">
+            <a:solidFill>
+              <a:srgbClr val="8A6E2A"/>
+            </a:solidFill>
+            <a:prstDash val="solid"/>
+          </a:ln>
+        </p:spPr>
+      </p:sp>
+      <p:sp>
+        <p:nvSpPr>
+          <p:cNvPr id="13" name="Text 11"/>
+          <p:cNvSpPr/>
+          <p:nvPr/>
+        </p:nvSpPr>
+        <p:spPr>
+          <a:xfrm>
+            <a:off x="731520" y="4946904"/>
+            <a:ext cx="10314432" cy="612648"/>
+          </a:xfrm>
+          <a:prstGeom prst="rect">
+            <a:avLst/>
+          </a:prstGeom>
+          <a:noFill/>
+          <a:ln/>
+        </p:spPr>
+        <p:txBody>
+          <a:bodyPr wrap="square" lIns="0" tIns="0" rIns="0" bIns="0" rtlCol="0" anchor="t"/>
+          <a:lstStyle/>
+          <a:p>
+            <a:pPr algn="r" indent="0" marL="0">
+              <a:lnSpc>
+                <a:spcPts val="1800"/>
+              </a:lnSpc>
+              <a:buNone/>
+            </a:pPr>
+            <a:r>
+              <a:rPr lang="en-US" sz="1350" dirty="0">
+                <a:solidFill>
+                  <a:srgbClr val="0D1B2A"/>
+                </a:solidFill>
+                <a:latin typeface="Calibri" pitchFamily="34" charset="0"/>
+                <a:ea typeface="Calibri" pitchFamily="34" charset="-122"/>
+                <a:cs typeface="Calibri" pitchFamily="34" charset="-120"/>
+              </a:rPr>
+              <a:t>מתי "מספיק טוב" כדי למכור, לעומת להמשיך להחזיק ולחכות לערך נוסף?</a:t>
+            </a:r>
+            <a:endParaRPr lang="en-US" sz="1350" dirty="0"/>
           </a:p>
         </p:txBody>
       </p:sp>
@@ -6464,36 +6731,77 @@
         <p:nvSpPr>
           <p:cNvPr id="2" name="Text 0"/>
           <p:cNvSpPr/>
-          <p:nvPr/>
-        </p:nvSpPr>
-        <p:spPr>
-          <a:xfrm>
-            <a:off x="914400" y="1188720"/>
-            <a:ext cx="10360152" cy="457200"/>
-          </a:xfrm>
-          <a:prstGeom prst="rect">
-            <a:avLst/>
-          </a:prstGeom>
-          <a:noFill/>
-          <a:ln/>
-        </p:spPr>
-        <p:txBody>
-          <a:bodyPr wrap="square" lIns="0" tIns="0" rIns="0" bIns="0" rtlCol="0" anchor="ctr"/>
-          <a:lstStyle/>
-          <a:p>
-            <a:pPr algn="ctr" indent="0" marL="0">
-              <a:buNone/>
-            </a:pPr>
-            <a:r>
-              <a:rPr lang="en-US" sz="1400" b="1" spc="200" kern="0" dirty="0">
-                <a:solidFill>
-                  <a:srgbClr val="D4AE58"/>
+          <p:nvPr>
+            <p:ph idx="100" type="title" hasCustomPrompt="1"/>
+          </p:nvPr>
+        </p:nvSpPr>
+        <p:spPr>
+          <a:xfrm>
+            <a:off x="731520" y="502920"/>
+            <a:ext cx="10725912" cy="822960"/>
+          </a:xfrm>
+          <a:prstGeom prst="rect">
+            <a:avLst/>
+          </a:prstGeom>
+          <a:noFill/>
+          <a:ln/>
+        </p:spPr>
+        <p:txBody>
+          <a:bodyPr wrap="square" rtlCol="0" anchor="ctr"/>
+          <a:lstStyle/>
+          <a:p>
+            <a:pPr algn="r" indent="0" marL="0">
+              <a:buNone/>
+            </a:pPr>
+            <a:r>
+              <a:rPr lang="en-US" sz="2800" b="1" dirty="0">
+                <a:solidFill>
+                  <a:srgbClr val="0D1B2A"/>
+                </a:solidFill>
+                <a:latin typeface="Cambria" pitchFamily="34" charset="0"/>
+                <a:ea typeface="Cambria" pitchFamily="34" charset="-122"/>
+                <a:cs typeface="Cambria" pitchFamily="34" charset="-120"/>
+              </a:rPr>
+              <a:t>למי זה מתאים, ולמי לא</a:t>
+            </a:r>
+            <a:endParaRPr lang="en-US" sz="2800" dirty="0"/>
+          </a:p>
+        </p:txBody>
+      </p:sp>
+      <p:sp>
+        <p:nvSpPr>
+          <p:cNvPr id="3" name="Text 1"/>
+          <p:cNvSpPr/>
+          <p:nvPr/>
+        </p:nvSpPr>
+        <p:spPr>
+          <a:xfrm>
+            <a:off x="731520" y="1371600"/>
+            <a:ext cx="10725912" cy="457200"/>
+          </a:xfrm>
+          <a:prstGeom prst="rect">
+            <a:avLst/>
+          </a:prstGeom>
+          <a:noFill/>
+          <a:ln/>
+        </p:spPr>
+        <p:txBody>
+          <a:bodyPr wrap="square" lIns="0" tIns="0" rIns="0" bIns="0" rtlCol="0" anchor="t"/>
+          <a:lstStyle/>
+          <a:p>
+            <a:pPr algn="r" indent="0" marL="0">
+              <a:buNone/>
+            </a:pPr>
+            <a:r>
+              <a:rPr lang="en-US" sz="1400" dirty="0">
+                <a:solidFill>
+                  <a:srgbClr val="6B7280"/>
                 </a:solidFill>
                 <a:latin typeface="Calibri" pitchFamily="34" charset="0"/>
                 <a:ea typeface="Calibri" pitchFamily="34" charset="-122"/>
                 <a:cs typeface="Calibri" pitchFamily="34" charset="-120"/>
               </a:rPr>
-              <a:t>השלב הבא</a:t>
+              <a:t>כדי לא לבזבז לכם זמן, בואו נהיה כנים כבר עכשיו.</a:t>
             </a:r>
             <a:endParaRPr lang="en-US" sz="1400" dirty="0"/>
           </a:p>
@@ -6501,63 +6809,24 @@
       </p:sp>
       <p:sp>
         <p:nvSpPr>
-          <p:cNvPr id="3" name="Text 1"/>
-          <p:cNvSpPr/>
-          <p:nvPr/>
-        </p:nvSpPr>
-        <p:spPr>
-          <a:xfrm>
-            <a:off x="914400" y="1691640"/>
-            <a:ext cx="10360152" cy="822960"/>
-          </a:xfrm>
-          <a:prstGeom prst="rect">
-            <a:avLst/>
-          </a:prstGeom>
-          <a:noFill/>
-          <a:ln/>
-        </p:spPr>
-        <p:txBody>
-          <a:bodyPr wrap="square" lIns="0" tIns="0" rIns="0" bIns="0" rtlCol="0" anchor="ctr"/>
-          <a:lstStyle/>
-          <a:p>
-            <a:pPr algn="ctr" indent="0" marL="0">
-              <a:buNone/>
-            </a:pPr>
-            <a:r>
-              <a:rPr lang="en-US" sz="3200" b="1" dirty="0">
-                <a:solidFill>
-                  <a:srgbClr val="FFFFFF"/>
-                </a:solidFill>
-                <a:latin typeface="Cambria" pitchFamily="34" charset="0"/>
-                <a:ea typeface="Cambria" pitchFamily="34" charset="-122"/>
-                <a:cs typeface="Cambria" pitchFamily="34" charset="-120"/>
-              </a:rPr>
-              <a:t>מה מקבלים אחרי הוובינר</a:t>
-            </a:r>
-            <a:endParaRPr lang="en-US" sz="3200" dirty="0"/>
-          </a:p>
-        </p:txBody>
-      </p:sp>
-      <p:sp>
-        <p:nvSpPr>
           <p:cNvPr id="4" name="Shape 2"/>
           <p:cNvSpPr/>
           <p:nvPr/>
         </p:nvSpPr>
         <p:spPr>
           <a:xfrm>
-            <a:off x="731520" y="2834640"/>
-            <a:ext cx="3291840" cy="2377440"/>
+            <a:off x="731520" y="2011680"/>
+            <a:ext cx="5120640" cy="3749040"/>
           </a:xfrm>
           <a:prstGeom prst="rect">
             <a:avLst/>
           </a:prstGeom>
           <a:solidFill>
-            <a:srgbClr val="132233"/>
+            <a:srgbClr val="FBF4E2"/>
           </a:solidFill>
-          <a:ln w="12700">
+          <a:ln w="19050">
             <a:solidFill>
-              <a:srgbClr val="3A4C60"/>
+              <a:srgbClr val="B8963E"/>
             </a:solidFill>
             <a:prstDash val="solid"/>
           </a:ln>
@@ -6571,8 +6840,8 @@
         </p:nvSpPr>
         <p:spPr>
           <a:xfrm>
-            <a:off x="960120" y="3017520"/>
-            <a:ext cx="914400" cy="457200"/>
+            <a:off x="1005840" y="2240280"/>
+            <a:ext cx="4572000" cy="365760"/>
           </a:xfrm>
           <a:prstGeom prst="rect">
             <a:avLst/>
@@ -6584,73 +6853,34 @@
           <a:bodyPr wrap="square" lIns="0" tIns="0" rIns="0" bIns="0" rtlCol="0" anchor="ctr"/>
           <a:lstStyle/>
           <a:p>
-            <a:pPr algn="l" indent="0" marL="0">
-              <a:buNone/>
-            </a:pPr>
-            <a:r>
-              <a:rPr lang="en-US" sz="2000" dirty="0">
-                <a:solidFill>
-                  <a:srgbClr val="B8963E"/>
-                </a:solidFill>
-                <a:latin typeface="Cambria" pitchFamily="34" charset="0"/>
-                <a:ea typeface="Cambria" pitchFamily="34" charset="-122"/>
-                <a:cs typeface="Cambria" pitchFamily="34" charset="-120"/>
-              </a:rPr>
-              <a:t>01</a:t>
-            </a:r>
-            <a:endParaRPr lang="en-US" sz="2000" dirty="0"/>
-          </a:p>
-        </p:txBody>
-      </p:sp>
-      <p:sp>
-        <p:nvSpPr>
-          <p:cNvPr id="6" name="Text 4"/>
-          <p:cNvSpPr/>
-          <p:nvPr/>
-        </p:nvSpPr>
-        <p:spPr>
-          <a:xfrm>
-            <a:off x="960120" y="3611880"/>
-            <a:ext cx="2834640" cy="457200"/>
-          </a:xfrm>
-          <a:prstGeom prst="rect">
-            <a:avLst/>
-          </a:prstGeom>
-          <a:noFill/>
-          <a:ln/>
-        </p:spPr>
-        <p:txBody>
-          <a:bodyPr wrap="square" lIns="0" tIns="0" rIns="0" bIns="0" rtlCol="0" anchor="t"/>
-          <a:lstStyle/>
-          <a:p>
             <a:pPr algn="r" indent="0" marL="0">
               <a:buNone/>
             </a:pPr>
             <a:r>
-              <a:rPr lang="en-US" sz="1450" b="1" dirty="0">
-                <a:solidFill>
-                  <a:srgbClr val="FFFFFF"/>
+              <a:rPr lang="en-US" sz="1400" b="1" spc="100" kern="0" dirty="0">
+                <a:solidFill>
+                  <a:srgbClr val="8A6E2A"/>
                 </a:solidFill>
                 <a:latin typeface="Calibri" pitchFamily="34" charset="0"/>
                 <a:ea typeface="Calibri" pitchFamily="34" charset="-122"/>
                 <a:cs typeface="Calibri" pitchFamily="34" charset="-120"/>
               </a:rPr>
-              <a:t>חוברת עבודה דיגיטלית</a:t>
-            </a:r>
-            <a:endParaRPr lang="en-US" sz="1450" dirty="0"/>
-          </a:p>
-        </p:txBody>
-      </p:sp>
-      <p:sp>
-        <p:nvSpPr>
-          <p:cNvPr id="7" name="Text 5"/>
-          <p:cNvSpPr/>
-          <p:nvPr/>
-        </p:nvSpPr>
-        <p:spPr>
-          <a:xfrm>
-            <a:off x="960120" y="4114800"/>
-            <a:ext cx="2834640" cy="914400"/>
+              <a:t>מתאים לכם אם</a:t>
+            </a:r>
+            <a:endParaRPr lang="en-US" sz="1400" dirty="0"/>
+          </a:p>
+        </p:txBody>
+      </p:sp>
+      <p:sp>
+        <p:nvSpPr>
+          <p:cNvPr id="6" name="Text 4"/>
+          <p:cNvSpPr/>
+          <p:nvPr/>
+        </p:nvSpPr>
+        <p:spPr>
+          <a:xfrm>
+            <a:off x="5257800" y="2788920"/>
+            <a:ext cx="365760" cy="548640"/>
           </a:xfrm>
           <a:prstGeom prst="rect">
             <a:avLst/>
@@ -6662,47 +6892,248 @@
           <a:bodyPr wrap="square" lIns="0" tIns="0" rIns="0" bIns="0" rtlCol="0" anchor="t"/>
           <a:lstStyle/>
           <a:p>
-            <a:pPr algn="r" indent="0" marL="0">
-              <a:lnSpc>
-                <a:spcPts val="1600"/>
-              </a:lnSpc>
-              <a:buNone/>
-            </a:pPr>
-            <a:r>
-              <a:rPr lang="en-US" sz="1150" dirty="0">
-                <a:solidFill>
-                  <a:srgbClr val="C9CFD6"/>
+            <a:pPr algn="ctr" indent="0" marL="0">
+              <a:buNone/>
+            </a:pPr>
+            <a:r>
+              <a:rPr lang="en-US" sz="1600" b="1" dirty="0">
+                <a:solidFill>
+                  <a:srgbClr val="B8963E"/>
                 </a:solidFill>
                 <a:latin typeface="Calibri" pitchFamily="34" charset="0"/>
                 <a:ea typeface="Calibri" pitchFamily="34" charset="-122"/>
                 <a:cs typeface="Calibri" pitchFamily="34" charset="-120"/>
               </a:rPr>
-              <a:t>מפת הדרכים המלאה ב-PDF, עם הצ'ק-ליסטים מהוובינר</a:t>
-            </a:r>
-            <a:endParaRPr lang="en-US" sz="1150" dirty="0"/>
-          </a:p>
-        </p:txBody>
-      </p:sp>
-      <p:sp>
-        <p:nvSpPr>
-          <p:cNvPr id="8" name="Shape 6"/>
-          <p:cNvSpPr/>
-          <p:nvPr/>
-        </p:nvSpPr>
-        <p:spPr>
-          <a:xfrm>
-            <a:off x="4361688" y="2834640"/>
-            <a:ext cx="3291840" cy="2377440"/>
+              <a:t>✓</a:t>
+            </a:r>
+            <a:endParaRPr lang="en-US" sz="1600" dirty="0"/>
+          </a:p>
+        </p:txBody>
+      </p:sp>
+      <p:sp>
+        <p:nvSpPr>
+          <p:cNvPr id="7" name="Text 5"/>
+          <p:cNvSpPr/>
+          <p:nvPr/>
+        </p:nvSpPr>
+        <p:spPr>
+          <a:xfrm>
+            <a:off x="1005840" y="2788920"/>
+            <a:ext cx="4114800" cy="594360"/>
+          </a:xfrm>
+          <a:prstGeom prst="rect">
+            <a:avLst/>
+          </a:prstGeom>
+          <a:noFill/>
+          <a:ln/>
+        </p:spPr>
+        <p:txBody>
+          <a:bodyPr wrap="square" lIns="0" tIns="0" rIns="0" bIns="0" rtlCol="0" anchor="t"/>
+          <a:lstStyle/>
+          <a:p>
+            <a:pPr algn="r" indent="0" marL="0">
+              <a:lnSpc>
+                <a:spcPts val="1700"/>
+              </a:lnSpc>
+              <a:buNone/>
+            </a:pPr>
+            <a:r>
+              <a:rPr lang="en-US" sz="1300" dirty="0">
+                <a:solidFill>
+                  <a:srgbClr val="0D1B2A"/>
+                </a:solidFill>
+                <a:latin typeface="Calibri" pitchFamily="34" charset="0"/>
+                <a:ea typeface="Calibri" pitchFamily="34" charset="-122"/>
+                <a:cs typeface="Calibri" pitchFamily="34" charset="-120"/>
+              </a:rPr>
+              <a:t>יש לכם הון פנוי ואתם רוצים לתכנן נכון</a:t>
+            </a:r>
+            <a:endParaRPr lang="en-US" sz="1300" dirty="0"/>
+          </a:p>
+        </p:txBody>
+      </p:sp>
+      <p:sp>
+        <p:nvSpPr>
+          <p:cNvPr id="8" name="Text 6"/>
+          <p:cNvSpPr/>
+          <p:nvPr/>
+        </p:nvSpPr>
+        <p:spPr>
+          <a:xfrm>
+            <a:off x="5257800" y="3474720"/>
+            <a:ext cx="365760" cy="548640"/>
+          </a:xfrm>
+          <a:prstGeom prst="rect">
+            <a:avLst/>
+          </a:prstGeom>
+          <a:noFill/>
+          <a:ln/>
+        </p:spPr>
+        <p:txBody>
+          <a:bodyPr wrap="square" lIns="0" tIns="0" rIns="0" bIns="0" rtlCol="0" anchor="t"/>
+          <a:lstStyle/>
+          <a:p>
+            <a:pPr algn="ctr" indent="0" marL="0">
+              <a:buNone/>
+            </a:pPr>
+            <a:r>
+              <a:rPr lang="en-US" sz="1600" b="1" dirty="0">
+                <a:solidFill>
+                  <a:srgbClr val="B8963E"/>
+                </a:solidFill>
+                <a:latin typeface="Calibri" pitchFamily="34" charset="0"/>
+                <a:ea typeface="Calibri" pitchFamily="34" charset="-122"/>
+                <a:cs typeface="Calibri" pitchFamily="34" charset="-120"/>
+              </a:rPr>
+              <a:t>✓</a:t>
+            </a:r>
+            <a:endParaRPr lang="en-US" sz="1600" dirty="0"/>
+          </a:p>
+        </p:txBody>
+      </p:sp>
+      <p:sp>
+        <p:nvSpPr>
+          <p:cNvPr id="9" name="Text 7"/>
+          <p:cNvSpPr/>
+          <p:nvPr/>
+        </p:nvSpPr>
+        <p:spPr>
+          <a:xfrm>
+            <a:off x="1005840" y="3474720"/>
+            <a:ext cx="4114800" cy="594360"/>
+          </a:xfrm>
+          <a:prstGeom prst="rect">
+            <a:avLst/>
+          </a:prstGeom>
+          <a:noFill/>
+          <a:ln/>
+        </p:spPr>
+        <p:txBody>
+          <a:bodyPr wrap="square" lIns="0" tIns="0" rIns="0" bIns="0" rtlCol="0" anchor="t"/>
+          <a:lstStyle/>
+          <a:p>
+            <a:pPr algn="r" indent="0" marL="0">
+              <a:lnSpc>
+                <a:spcPts val="1700"/>
+              </a:lnSpc>
+              <a:buNone/>
+            </a:pPr>
+            <a:r>
+              <a:rPr lang="en-US" sz="1300" dirty="0">
+                <a:solidFill>
+                  <a:srgbClr val="0D1B2A"/>
+                </a:solidFill>
+                <a:latin typeface="Calibri" pitchFamily="34" charset="0"/>
+                <a:ea typeface="Calibri" pitchFamily="34" charset="-122"/>
+                <a:cs typeface="Calibri" pitchFamily="34" charset="-120"/>
+              </a:rPr>
+              <a:t>אתם מחפשים אסטרטגיה ארוכת טווח, לא "טיפ חם"</a:t>
+            </a:r>
+            <a:endParaRPr lang="en-US" sz="1300" dirty="0"/>
+          </a:p>
+        </p:txBody>
+      </p:sp>
+      <p:sp>
+        <p:nvSpPr>
+          <p:cNvPr id="10" name="Text 8"/>
+          <p:cNvSpPr/>
+          <p:nvPr/>
+        </p:nvSpPr>
+        <p:spPr>
+          <a:xfrm>
+            <a:off x="5257800" y="4160520"/>
+            <a:ext cx="365760" cy="548640"/>
+          </a:xfrm>
+          <a:prstGeom prst="rect">
+            <a:avLst/>
+          </a:prstGeom>
+          <a:noFill/>
+          <a:ln/>
+        </p:spPr>
+        <p:txBody>
+          <a:bodyPr wrap="square" lIns="0" tIns="0" rIns="0" bIns="0" rtlCol="0" anchor="t"/>
+          <a:lstStyle/>
+          <a:p>
+            <a:pPr algn="ctr" indent="0" marL="0">
+              <a:buNone/>
+            </a:pPr>
+            <a:r>
+              <a:rPr lang="en-US" sz="1600" b="1" dirty="0">
+                <a:solidFill>
+                  <a:srgbClr val="B8963E"/>
+                </a:solidFill>
+                <a:latin typeface="Calibri" pitchFamily="34" charset="0"/>
+                <a:ea typeface="Calibri" pitchFamily="34" charset="-122"/>
+                <a:cs typeface="Calibri" pitchFamily="34" charset="-120"/>
+              </a:rPr>
+              <a:t>✓</a:t>
+            </a:r>
+            <a:endParaRPr lang="en-US" sz="1600" dirty="0"/>
+          </a:p>
+        </p:txBody>
+      </p:sp>
+      <p:sp>
+        <p:nvSpPr>
+          <p:cNvPr id="11" name="Text 9"/>
+          <p:cNvSpPr/>
+          <p:nvPr/>
+        </p:nvSpPr>
+        <p:spPr>
+          <a:xfrm>
+            <a:off x="1005840" y="4160520"/>
+            <a:ext cx="4114800" cy="594360"/>
+          </a:xfrm>
+          <a:prstGeom prst="rect">
+            <a:avLst/>
+          </a:prstGeom>
+          <a:noFill/>
+          <a:ln/>
+        </p:spPr>
+        <p:txBody>
+          <a:bodyPr wrap="square" lIns="0" tIns="0" rIns="0" bIns="0" rtlCol="0" anchor="t"/>
+          <a:lstStyle/>
+          <a:p>
+            <a:pPr algn="r" indent="0" marL="0">
+              <a:lnSpc>
+                <a:spcPts val="1700"/>
+              </a:lnSpc>
+              <a:buNone/>
+            </a:pPr>
+            <a:r>
+              <a:rPr lang="en-US" sz="1300" dirty="0">
+                <a:solidFill>
+                  <a:srgbClr val="0D1B2A"/>
+                </a:solidFill>
+                <a:latin typeface="Calibri" pitchFamily="34" charset="0"/>
+                <a:ea typeface="Calibri" pitchFamily="34" charset="-122"/>
+                <a:cs typeface="Calibri" pitchFamily="34" charset="-120"/>
+              </a:rPr>
+              <a:t>מעניין אתכם שוק תל אביב באופן ספציפי</a:t>
+            </a:r>
+            <a:endParaRPr lang="en-US" sz="1300" dirty="0"/>
+          </a:p>
+        </p:txBody>
+      </p:sp>
+      <p:sp>
+        <p:nvSpPr>
+          <p:cNvPr id="12" name="Shape 10"/>
+          <p:cNvSpPr/>
+          <p:nvPr/>
+        </p:nvSpPr>
+        <p:spPr>
+          <a:xfrm>
+            <a:off x="6336792" y="2011680"/>
+            <a:ext cx="5120640" cy="3749040"/>
           </a:xfrm>
           <a:prstGeom prst="rect">
             <a:avLst/>
           </a:prstGeom>
           <a:solidFill>
-            <a:srgbClr val="132233"/>
+            <a:srgbClr val="F8F7F4"/>
           </a:solidFill>
-          <a:ln w="12700">
+          <a:ln w="19050">
             <a:solidFill>
-              <a:srgbClr val="3A4C60"/>
+              <a:srgbClr val="E8E2D4"/>
             </a:solidFill>
             <a:prstDash val="solid"/>
           </a:ln>
@@ -6710,14 +7141,14 @@
       </p:sp>
       <p:sp>
         <p:nvSpPr>
-          <p:cNvPr id="9" name="Text 7"/>
-          <p:cNvSpPr/>
-          <p:nvPr/>
-        </p:nvSpPr>
-        <p:spPr>
-          <a:xfrm>
-            <a:off x="4590288" y="3017520"/>
-            <a:ext cx="914400" cy="457200"/>
+          <p:cNvPr id="13" name="Text 11"/>
+          <p:cNvSpPr/>
+          <p:nvPr/>
+        </p:nvSpPr>
+        <p:spPr>
+          <a:xfrm>
+            <a:off x="6611112" y="2240280"/>
+            <a:ext cx="4572000" cy="365760"/>
           </a:xfrm>
           <a:prstGeom prst="rect">
             <a:avLst/>
@@ -6729,73 +7160,34 @@
           <a:bodyPr wrap="square" lIns="0" tIns="0" rIns="0" bIns="0" rtlCol="0" anchor="ctr"/>
           <a:lstStyle/>
           <a:p>
-            <a:pPr algn="l" indent="0" marL="0">
-              <a:buNone/>
-            </a:pPr>
-            <a:r>
-              <a:rPr lang="en-US" sz="2000" dirty="0">
-                <a:solidFill>
-                  <a:srgbClr val="B8963E"/>
-                </a:solidFill>
-                <a:latin typeface="Cambria" pitchFamily="34" charset="0"/>
-                <a:ea typeface="Cambria" pitchFamily="34" charset="-122"/>
-                <a:cs typeface="Cambria" pitchFamily="34" charset="-120"/>
-              </a:rPr>
-              <a:t>02</a:t>
-            </a:r>
-            <a:endParaRPr lang="en-US" sz="2000" dirty="0"/>
-          </a:p>
-        </p:txBody>
-      </p:sp>
-      <p:sp>
-        <p:nvSpPr>
-          <p:cNvPr id="10" name="Text 8"/>
-          <p:cNvSpPr/>
-          <p:nvPr/>
-        </p:nvSpPr>
-        <p:spPr>
-          <a:xfrm>
-            <a:off x="4590288" y="3611880"/>
-            <a:ext cx="2834640" cy="457200"/>
-          </a:xfrm>
-          <a:prstGeom prst="rect">
-            <a:avLst/>
-          </a:prstGeom>
-          <a:noFill/>
-          <a:ln/>
-        </p:spPr>
-        <p:txBody>
-          <a:bodyPr wrap="square" lIns="0" tIns="0" rIns="0" bIns="0" rtlCol="0" anchor="t"/>
-          <a:lstStyle/>
-          <a:p>
             <a:pPr algn="r" indent="0" marL="0">
               <a:buNone/>
             </a:pPr>
             <a:r>
-              <a:rPr lang="en-US" sz="1450" b="1" dirty="0">
-                <a:solidFill>
-                  <a:srgbClr val="FFFFFF"/>
+              <a:rPr lang="en-US" sz="1400" b="1" spc="100" kern="0" dirty="0">
+                <a:solidFill>
+                  <a:srgbClr val="6B7280"/>
                 </a:solidFill>
                 <a:latin typeface="Calibri" pitchFamily="34" charset="0"/>
                 <a:ea typeface="Calibri" pitchFamily="34" charset="-122"/>
                 <a:cs typeface="Calibri" pitchFamily="34" charset="-120"/>
               </a:rPr>
-              <a:t>הקלטת הוובינר</a:t>
-            </a:r>
-            <a:endParaRPr lang="en-US" sz="1450" dirty="0"/>
-          </a:p>
-        </p:txBody>
-      </p:sp>
-      <p:sp>
-        <p:nvSpPr>
-          <p:cNvPr id="11" name="Text 9"/>
-          <p:cNvSpPr/>
-          <p:nvPr/>
-        </p:nvSpPr>
-        <p:spPr>
-          <a:xfrm>
-            <a:off x="4590288" y="4114800"/>
-            <a:ext cx="2834640" cy="914400"/>
+              <a:t>כנראה לא מתאים אם</a:t>
+            </a:r>
+            <a:endParaRPr lang="en-US" sz="1400" dirty="0"/>
+          </a:p>
+        </p:txBody>
+      </p:sp>
+      <p:sp>
+        <p:nvSpPr>
+          <p:cNvPr id="14" name="Text 12"/>
+          <p:cNvSpPr/>
+          <p:nvPr/>
+        </p:nvSpPr>
+        <p:spPr>
+          <a:xfrm>
+            <a:off x="10863072" y="2788920"/>
+            <a:ext cx="365760" cy="548640"/>
           </a:xfrm>
           <a:prstGeom prst="rect">
             <a:avLst/>
@@ -6807,101 +7199,34 @@
           <a:bodyPr wrap="square" lIns="0" tIns="0" rIns="0" bIns="0" rtlCol="0" anchor="t"/>
           <a:lstStyle/>
           <a:p>
-            <a:pPr algn="r" indent="0" marL="0">
-              <a:lnSpc>
-                <a:spcPts val="1600"/>
-              </a:lnSpc>
-              <a:buNone/>
-            </a:pPr>
-            <a:r>
-              <a:rPr lang="en-US" sz="1150" dirty="0">
-                <a:solidFill>
-                  <a:srgbClr val="C9CFD6"/>
+            <a:pPr algn="ctr" indent="0" marL="0">
+              <a:buNone/>
+            </a:pPr>
+            <a:r>
+              <a:rPr lang="en-US" sz="1600" b="1" dirty="0">
+                <a:solidFill>
+                  <a:srgbClr val="9CA3AF"/>
                 </a:solidFill>
                 <a:latin typeface="Calibri" pitchFamily="34" charset="0"/>
                 <a:ea typeface="Calibri" pitchFamily="34" charset="-122"/>
                 <a:cs typeface="Calibri" pitchFamily="34" charset="-120"/>
               </a:rPr>
-              <a:t>למי שרוצה לחזור על החומר, או פספס משהו</a:t>
-            </a:r>
-            <a:endParaRPr lang="en-US" sz="1150" dirty="0"/>
-          </a:p>
-        </p:txBody>
-      </p:sp>
-      <p:sp>
-        <p:nvSpPr>
-          <p:cNvPr id="12" name="Shape 10"/>
-          <p:cNvSpPr/>
-          <p:nvPr/>
-        </p:nvSpPr>
-        <p:spPr>
-          <a:xfrm>
-            <a:off x="7991856" y="2834640"/>
-            <a:ext cx="3291840" cy="2377440"/>
-          </a:xfrm>
-          <a:prstGeom prst="rect">
-            <a:avLst/>
-          </a:prstGeom>
-          <a:solidFill>
-            <a:srgbClr val="132233"/>
-          </a:solidFill>
-          <a:ln w="12700">
-            <a:solidFill>
-              <a:srgbClr val="3A4C60"/>
-            </a:solidFill>
-            <a:prstDash val="solid"/>
-          </a:ln>
-        </p:spPr>
-      </p:sp>
-      <p:sp>
-        <p:nvSpPr>
-          <p:cNvPr id="13" name="Text 11"/>
-          <p:cNvSpPr/>
-          <p:nvPr/>
-        </p:nvSpPr>
-        <p:spPr>
-          <a:xfrm>
-            <a:off x="8220456" y="3017520"/>
-            <a:ext cx="914400" cy="457200"/>
-          </a:xfrm>
-          <a:prstGeom prst="rect">
-            <a:avLst/>
-          </a:prstGeom>
-          <a:noFill/>
-          <a:ln/>
-        </p:spPr>
-        <p:txBody>
-          <a:bodyPr wrap="square" lIns="0" tIns="0" rIns="0" bIns="0" rtlCol="0" anchor="ctr"/>
-          <a:lstStyle/>
-          <a:p>
-            <a:pPr algn="l" indent="0" marL="0">
-              <a:buNone/>
-            </a:pPr>
-            <a:r>
-              <a:rPr lang="en-US" sz="2000" dirty="0">
-                <a:solidFill>
-                  <a:srgbClr val="B8963E"/>
-                </a:solidFill>
-                <a:latin typeface="Cambria" pitchFamily="34" charset="0"/>
-                <a:ea typeface="Cambria" pitchFamily="34" charset="-122"/>
-                <a:cs typeface="Cambria" pitchFamily="34" charset="-120"/>
-              </a:rPr>
-              <a:t>03</a:t>
-            </a:r>
-            <a:endParaRPr lang="en-US" sz="2000" dirty="0"/>
-          </a:p>
-        </p:txBody>
-      </p:sp>
-      <p:sp>
-        <p:nvSpPr>
-          <p:cNvPr id="14" name="Text 12"/>
-          <p:cNvSpPr/>
-          <p:nvPr/>
-        </p:nvSpPr>
-        <p:spPr>
-          <a:xfrm>
-            <a:off x="8220456" y="3611880"/>
-            <a:ext cx="2834640" cy="457200"/>
+              <a:t>✕</a:t>
+            </a:r>
+            <a:endParaRPr lang="en-US" sz="1600" dirty="0"/>
+          </a:p>
+        </p:txBody>
+      </p:sp>
+      <p:sp>
+        <p:nvSpPr>
+          <p:cNvPr id="15" name="Text 13"/>
+          <p:cNvSpPr/>
+          <p:nvPr/>
+        </p:nvSpPr>
+        <p:spPr>
+          <a:xfrm>
+            <a:off x="6611112" y="2788920"/>
+            <a:ext cx="4114800" cy="594360"/>
           </a:xfrm>
           <a:prstGeom prst="rect">
             <a:avLst/>
@@ -6914,33 +7239,36 @@
           <a:lstStyle/>
           <a:p>
             <a:pPr algn="r" indent="0" marL="0">
-              <a:buNone/>
-            </a:pPr>
-            <a:r>
-              <a:rPr lang="en-US" sz="1450" b="1" dirty="0">
-                <a:solidFill>
-                  <a:srgbClr val="FFFFFF"/>
+              <a:lnSpc>
+                <a:spcPts val="1700"/>
+              </a:lnSpc>
+              <a:buNone/>
+            </a:pPr>
+            <a:r>
+              <a:rPr lang="en-US" sz="1300" dirty="0">
+                <a:solidFill>
+                  <a:srgbClr val="0D1B2A"/>
                 </a:solidFill>
                 <a:latin typeface="Calibri" pitchFamily="34" charset="0"/>
                 <a:ea typeface="Calibri" pitchFamily="34" charset="-122"/>
                 <a:cs typeface="Calibri" pitchFamily="34" charset="-120"/>
               </a:rPr>
-              <a:t>שיחת אפיון אישית</a:t>
-            </a:r>
-            <a:endParaRPr lang="en-US" sz="1450" dirty="0"/>
-          </a:p>
-        </p:txBody>
-      </p:sp>
-      <p:sp>
-        <p:nvSpPr>
-          <p:cNvPr id="15" name="Text 13"/>
-          <p:cNvSpPr/>
-          <p:nvPr/>
-        </p:nvSpPr>
-        <p:spPr>
-          <a:xfrm>
-            <a:off x="8220456" y="4114800"/>
-            <a:ext cx="2834640" cy="914400"/>
+              <a:t>אתם מחפשים "התעשרות מהירה" בלי סיכון</a:t>
+            </a:r>
+            <a:endParaRPr lang="en-US" sz="1300" dirty="0"/>
+          </a:p>
+        </p:txBody>
+      </p:sp>
+      <p:sp>
+        <p:nvSpPr>
+          <p:cNvPr id="16" name="Text 14"/>
+          <p:cNvSpPr/>
+          <p:nvPr/>
+        </p:nvSpPr>
+        <p:spPr>
+          <a:xfrm>
+            <a:off x="10863072" y="3474720"/>
+            <a:ext cx="365760" cy="548640"/>
           </a:xfrm>
           <a:prstGeom prst="rect">
             <a:avLst/>
@@ -6952,84 +7280,192 @@
           <a:bodyPr wrap="square" lIns="0" tIns="0" rIns="0" bIns="0" rtlCol="0" anchor="t"/>
           <a:lstStyle/>
           <a:p>
-            <a:pPr algn="r" indent="0" marL="0">
-              <a:lnSpc>
-                <a:spcPts val="1600"/>
-              </a:lnSpc>
-              <a:buNone/>
-            </a:pPr>
-            <a:r>
-              <a:rPr lang="en-US" sz="1150" dirty="0">
-                <a:solidFill>
-                  <a:srgbClr val="C9CFD6"/>
+            <a:pPr algn="ctr" indent="0" marL="0">
+              <a:buNone/>
+            </a:pPr>
+            <a:r>
+              <a:rPr lang="en-US" sz="1600" b="1" dirty="0">
+                <a:solidFill>
+                  <a:srgbClr val="9CA3AF"/>
                 </a:solidFill>
                 <a:latin typeface="Calibri" pitchFamily="34" charset="0"/>
                 <a:ea typeface="Calibri" pitchFamily="34" charset="-122"/>
                 <a:cs typeface="Calibri" pitchFamily="34" charset="-120"/>
               </a:rPr>
-              <a:t>למי שרוצה להמשיך קדימה, בלי שום התחייבות</a:t>
-            </a:r>
-            <a:endParaRPr lang="en-US" sz="1150" dirty="0"/>
-          </a:p>
-        </p:txBody>
-      </p:sp>
-      <p:sp>
-        <p:nvSpPr>
-          <p:cNvPr id="16" name="Text 0"/>
-          <p:cNvSpPr/>
+              <a:t>✕</a:t>
+            </a:r>
+            <a:endParaRPr lang="en-US" sz="1600" dirty="0"/>
+          </a:p>
+        </p:txBody>
+      </p:sp>
+      <p:sp>
+        <p:nvSpPr>
+          <p:cNvPr id="17" name="Text 15"/>
+          <p:cNvSpPr/>
+          <p:nvPr/>
+        </p:nvSpPr>
+        <p:spPr>
+          <a:xfrm>
+            <a:off x="6611112" y="3474720"/>
+            <a:ext cx="4114800" cy="594360"/>
+          </a:xfrm>
+          <a:prstGeom prst="rect">
+            <a:avLst/>
+          </a:prstGeom>
+          <a:noFill/>
+          <a:ln/>
+        </p:spPr>
+        <p:txBody>
+          <a:bodyPr wrap="square" lIns="0" tIns="0" rIns="0" bIns="0" rtlCol="0" anchor="t"/>
+          <a:lstStyle/>
+          <a:p>
+            <a:pPr algn="r" indent="0" marL="0">
+              <a:lnSpc>
+                <a:spcPts val="1700"/>
+              </a:lnSpc>
+              <a:buNone/>
+            </a:pPr>
+            <a:r>
+              <a:rPr lang="en-US" sz="1300" dirty="0">
+                <a:solidFill>
+                  <a:srgbClr val="0D1B2A"/>
+                </a:solidFill>
+                <a:latin typeface="Calibri" pitchFamily="34" charset="0"/>
+                <a:ea typeface="Calibri" pitchFamily="34" charset="-122"/>
+                <a:cs typeface="Calibri" pitchFamily="34" charset="-120"/>
+              </a:rPr>
+              <a:t>אין לכם שום הון פנוי או אופק להשקעה</a:t>
+            </a:r>
+            <a:endParaRPr lang="en-US" sz="1300" dirty="0"/>
+          </a:p>
+        </p:txBody>
+      </p:sp>
+      <p:sp>
+        <p:nvSpPr>
+          <p:cNvPr id="18" name="Text 16"/>
+          <p:cNvSpPr/>
+          <p:nvPr/>
+        </p:nvSpPr>
+        <p:spPr>
+          <a:xfrm>
+            <a:off x="10863072" y="4160520"/>
+            <a:ext cx="365760" cy="548640"/>
+          </a:xfrm>
+          <a:prstGeom prst="rect">
+            <a:avLst/>
+          </a:prstGeom>
+          <a:noFill/>
+          <a:ln/>
+        </p:spPr>
+        <p:txBody>
+          <a:bodyPr wrap="square" lIns="0" tIns="0" rIns="0" bIns="0" rtlCol="0" anchor="t"/>
+          <a:lstStyle/>
+          <a:p>
+            <a:pPr algn="ctr" indent="0" marL="0">
+              <a:buNone/>
+            </a:pPr>
+            <a:r>
+              <a:rPr lang="en-US" sz="1600" b="1" dirty="0">
+                <a:solidFill>
+                  <a:srgbClr val="9CA3AF"/>
+                </a:solidFill>
+                <a:latin typeface="Calibri" pitchFamily="34" charset="0"/>
+                <a:ea typeface="Calibri" pitchFamily="34" charset="-122"/>
+                <a:cs typeface="Calibri" pitchFamily="34" charset="-120"/>
+              </a:rPr>
+              <a:t>✕</a:t>
+            </a:r>
+            <a:endParaRPr lang="en-US" sz="1600" dirty="0"/>
+          </a:p>
+        </p:txBody>
+      </p:sp>
+      <p:sp>
+        <p:nvSpPr>
+          <p:cNvPr id="19" name="Text 17"/>
+          <p:cNvSpPr/>
+          <p:nvPr/>
+        </p:nvSpPr>
+        <p:spPr>
+          <a:xfrm>
+            <a:off x="6611112" y="4160520"/>
+            <a:ext cx="4114800" cy="594360"/>
+          </a:xfrm>
+          <a:prstGeom prst="rect">
+            <a:avLst/>
+          </a:prstGeom>
+          <a:noFill/>
+          <a:ln/>
+        </p:spPr>
+        <p:txBody>
+          <a:bodyPr wrap="square" lIns="0" tIns="0" rIns="0" bIns="0" rtlCol="0" anchor="t"/>
+          <a:lstStyle/>
+          <a:p>
+            <a:pPr algn="r" indent="0" marL="0">
+              <a:lnSpc>
+                <a:spcPts val="1700"/>
+              </a:lnSpc>
+              <a:buNone/>
+            </a:pPr>
+            <a:r>
+              <a:rPr lang="en-US" sz="1300" dirty="0">
+                <a:solidFill>
+                  <a:srgbClr val="0D1B2A"/>
+                </a:solidFill>
+                <a:latin typeface="Calibri" pitchFamily="34" charset="0"/>
+                <a:ea typeface="Calibri" pitchFamily="34" charset="-122"/>
+                <a:cs typeface="Calibri" pitchFamily="34" charset="-120"/>
+              </a:rPr>
+              <a:t>אתם לא מוכנים לקפיצת מדרגה בחייכם</a:t>
+            </a:r>
+            <a:endParaRPr lang="en-US" sz="1300" dirty="0"/>
+          </a:p>
+        </p:txBody>
+      </p:sp>
+      <p:sp>
+        <p:nvSpPr>
+          <p:cNvPr id="25" name="Slide Number Placeholder 0"/>
+          <p:cNvSpPr>
+            <a:spLocks noGrp="1"/>
+          </p:cNvSpPr>
           <p:nvPr>
-            <p:ph idx="100" type="title" hasCustomPrompt="1"/>
+            <p:ph type="sldNum" sz="quarter" idx="4294967295"/>
           </p:nvPr>
         </p:nvSpPr>
         <p:spPr>
           <a:xfrm>
-            <a:off x="914400" y="2423160"/>
-            <a:ext cx="10360152" cy="1463040"/>
-          </a:xfrm>
-          <a:prstGeom prst="rect">
-            <a:avLst/>
-          </a:prstGeom>
-          <a:noFill/>
-          <a:ln/>
-        </p:spPr>
-        <p:txBody>
-          <a:bodyPr wrap="square" rtlCol="0" anchor="ctr"/>
-          <a:lstStyle/>
-          <a:p>
-            <a:pPr algn="ctr" indent="0" marL="0">
-              <a:buNone/>
-            </a:pPr>
-            <a:endParaRPr lang="en-US" sz="4000" dirty="0"/>
-          </a:p>
-        </p:txBody>
-      </p:sp>
-      <p:sp>
-        <p:nvSpPr>
-          <p:cNvPr id="17" name="Text 0"/>
-          <p:cNvSpPr/>
-          <p:nvPr>
-            <p:ph idx="101" type="body" hasCustomPrompt="1"/>
-          </p:nvPr>
-        </p:nvSpPr>
-        <p:spPr>
-          <a:xfrm>
-            <a:off x="1371600" y="3977640"/>
-            <a:ext cx="9445752" cy="822960"/>
-          </a:xfrm>
-          <a:prstGeom prst="rect">
-            <a:avLst/>
-          </a:prstGeom>
-          <a:noFill/>
-          <a:ln/>
-        </p:spPr>
-        <p:txBody>
-          <a:bodyPr wrap="square" rtlCol="0" anchor="t"/>
-          <a:lstStyle/>
-          <a:p>
-            <a:pPr algn="ctr" indent="0" marL="0">
-              <a:buNone/>
-            </a:pPr>
-            <a:endParaRPr lang="en-US" sz="1600" dirty="0"/>
+            <a:off x="11612880" y="6473952"/>
+            <a:ext cx="800000" cy="300000"/>
+          </a:xfrm>
+          <a:prstGeom prst="rect">
+            <a:avLst/>
+          </a:prstGeom>
+          <a:extLst>
+            <a:ext uri="{C572A759-6A51-4108-AA02-DFA0A04FC94B}">
+              <ma14:wrappingTextBoxFlag xmlns:ma14="http://schemas.microsoft.com/office/mac/drawingml/2011/main" val="0"/>
+            </a:ext>
+          </a:extLst>
+        </p:spPr>
+        <p:txBody>
+          <a:bodyPr/>
+          <a:lstStyle>
+            <a:lvl1pPr>
+              <a:defRPr sz="900">
+                <a:solidFill>
+                  <a:srgbClr val="9CA3AF"/>
+                </a:solidFill>
+                <a:latin typeface="Calibri"/>
+                <a:ea typeface="Calibri"/>
+                <a:cs typeface="Calibri"/>
+              </a:defRPr>
+            </a:lvl1pPr>
+          </a:lstStyle>
+          <a:p>
+            <a:pPr algn="l"/>
+            <a:fld id="{F7021451-1387-4CA6-816F-3879F97B5CBC}" type="slidenum">
+              <a:rPr b="0" lang="en-US"/>
+              <a:t>17</a:t>
+            </a:fld>
+            <a:endParaRPr lang="en-US"/>
           </a:p>
         </p:txBody>
       </p:sp>
@@ -7058,24 +7494,240 @@
           <a:chExt cx="0" cy="0"/>
         </a:xfrm>
       </p:grpSpPr>
-      <p:sp>
-        <p:nvSpPr>
-          <p:cNvPr id="2" name="Shape 0"/>
-          <p:cNvSpPr/>
-          <p:nvPr/>
-        </p:nvSpPr>
-        <p:spPr>
-          <a:xfrm>
-            <a:off x="5684368" y="1280160"/>
-            <a:ext cx="822960" cy="822960"/>
+      <p:pic>
+        <p:nvPicPr>
+          <p:cNvPr id="2" name="Image 0" descr="/tmp/claude-0/-home-user-Budget-bot/bb3508b1-6506-5404-ae67-cc0e6ad7c68b/scratchpad/deck/images/azrieli.jpg">    </p:cNvPr>
+          <p:cNvPicPr>
+            <a:picLocks noChangeAspect="1"/>
+          </p:cNvPicPr>
+          <p:nvPr/>
+        </p:nvPicPr>
+        <p:blipFill>
+          <a:blip r:embed="rId1"/>
+          <a:srcRect l="0" r="0" t="0" b="0"/>
+          <a:stretch/>
+        </p:blipFill>
+        <p:spPr>
+          <a:xfrm>
+            <a:off x="0" y="0"/>
+            <a:ext cx="12191695" cy="6858000"/>
+          </a:xfrm>
+          <a:prstGeom prst="rect">
+            <a:avLst/>
+          </a:prstGeom>
+        </p:spPr>
+      </p:pic>
+      <p:sp>
+        <p:nvSpPr>
+          <p:cNvPr id="3" name="Shape 0"/>
+          <p:cNvSpPr/>
+          <p:nvPr/>
+        </p:nvSpPr>
+        <p:spPr>
+          <a:xfrm>
+            <a:off x="0" y="0"/>
+            <a:ext cx="12191695" cy="6858000"/>
+          </a:xfrm>
+          <a:prstGeom prst="rect">
+            <a:avLst/>
+          </a:prstGeom>
+          <a:solidFill>
+            <a:srgbClr val="0D1B2A">
+              <a:alpha val="84000"/>
+            </a:srgbClr>
+          </a:solidFill>
+          <a:ln/>
+        </p:spPr>
+      </p:sp>
+      <p:sp>
+        <p:nvSpPr>
+          <p:cNvPr id="4" name="Text 1"/>
+          <p:cNvSpPr/>
+          <p:nvPr/>
+        </p:nvSpPr>
+        <p:spPr>
+          <a:xfrm>
+            <a:off x="914400" y="2286000"/>
+            <a:ext cx="10360152" cy="457200"/>
+          </a:xfrm>
+          <a:prstGeom prst="rect">
+            <a:avLst/>
+          </a:prstGeom>
+          <a:noFill/>
+          <a:ln/>
+        </p:spPr>
+        <p:txBody>
+          <a:bodyPr wrap="square" lIns="0" tIns="0" rIns="0" bIns="0" rtlCol="0" anchor="ctr"/>
+          <a:lstStyle/>
+          <a:p>
+            <a:pPr algn="ctr" indent="0" marL="0">
+              <a:buNone/>
+            </a:pPr>
+            <a:r>
+              <a:rPr lang="en-US" sz="1300" b="1" spc="200" kern="0" dirty="0">
+                <a:solidFill>
+                  <a:srgbClr val="D4AE58"/>
+                </a:solidFill>
+                <a:latin typeface="Calibri" pitchFamily="34" charset="0"/>
+                <a:ea typeface="Calibri" pitchFamily="34" charset="-122"/>
+                <a:cs typeface="Calibri" pitchFamily="34" charset="-120"/>
+              </a:rPr>
+              <a:t>מי מעביר את הוובינר</a:t>
+            </a:r>
+            <a:endParaRPr lang="en-US" sz="1300" dirty="0"/>
+          </a:p>
+        </p:txBody>
+      </p:sp>
+      <p:sp>
+        <p:nvSpPr>
+          <p:cNvPr id="5" name="Text 0"/>
+          <p:cNvSpPr/>
+          <p:nvPr>
+            <p:ph idx="100" type="title" hasCustomPrompt="1"/>
+          </p:nvPr>
+        </p:nvSpPr>
+        <p:spPr>
+          <a:xfrm>
+            <a:off x="914400" y="2880360"/>
+            <a:ext cx="10360152" cy="1188720"/>
+          </a:xfrm>
+          <a:prstGeom prst="rect">
+            <a:avLst/>
+          </a:prstGeom>
+          <a:noFill/>
+          <a:ln/>
+        </p:spPr>
+        <p:txBody>
+          <a:bodyPr wrap="square" rtlCol="0" anchor="ctr"/>
+          <a:lstStyle/>
+          <a:p>
+            <a:pPr algn="ctr" indent="0" marL="0">
+              <a:buNone/>
+            </a:pPr>
+            <a:r>
+              <a:rPr lang="en-US" sz="3400" b="1" dirty="0">
+                <a:solidFill>
+                  <a:srgbClr val="FFFFFF"/>
+                </a:solidFill>
+                <a:latin typeface="Cambria" pitchFamily="34" charset="0"/>
+                <a:ea typeface="Cambria" pitchFamily="34" charset="-122"/>
+                <a:cs typeface="Cambria" pitchFamily="34" charset="-120"/>
+              </a:rPr>
+              <a:t>קצת עלינו, אנשים בדיוק כמוכם</a:t>
+            </a:r>
+            <a:endParaRPr lang="en-US" sz="3400" dirty="0"/>
+          </a:p>
+        </p:txBody>
+      </p:sp>
+    </p:spTree>
+  </p:cSld>
+  <p:clrMapOvr>
+    <a:masterClrMapping/>
+  </p:clrMapOvr>
+</p:sld>
+</file>
+
+<file path=ppt/slides/slide19.xml><?xml version="1.0" encoding="utf-8"?>
+<p:sld xmlns:a="http://schemas.openxmlformats.org/drawingml/2006/main" xmlns:r="http://schemas.openxmlformats.org/officeDocument/2006/relationships" xmlns:p="http://schemas.openxmlformats.org/presentationml/2006/main">
+  <p:cSld name="Slide 19">
+    <p:spTree>
+      <p:nvGrpSpPr>
+        <p:cNvPr id="1" name=""/>
+        <p:cNvGrpSpPr/>
+        <p:nvPr/>
+      </p:nvGrpSpPr>
+      <p:grpSpPr>
+        <a:xfrm>
+          <a:off x="0" y="0"/>
+          <a:ext cx="0" cy="0"/>
+          <a:chOff x="0" y="0"/>
+          <a:chExt cx="0" cy="0"/>
+        </a:xfrm>
+      </p:grpSpPr>
+      <p:sp>
+        <p:nvSpPr>
+          <p:cNvPr id="2" name="Text 0"/>
+          <p:cNvSpPr/>
+          <p:nvPr>
+            <p:ph idx="100" type="title" hasCustomPrompt="1"/>
+          </p:nvPr>
+        </p:nvSpPr>
+        <p:spPr>
+          <a:xfrm>
+            <a:off x="731520" y="502920"/>
+            <a:ext cx="10725912" cy="822960"/>
+          </a:xfrm>
+          <a:prstGeom prst="rect">
+            <a:avLst/>
+          </a:prstGeom>
+          <a:noFill/>
+          <a:ln/>
+        </p:spPr>
+        <p:txBody>
+          <a:bodyPr wrap="square" rtlCol="0" anchor="ctr"/>
+          <a:lstStyle/>
+          <a:p>
+            <a:pPr algn="r" indent="0" marL="0">
+              <a:buNone/>
+            </a:pPr>
+            <a:r>
+              <a:rPr lang="en-US" sz="2800" b="1" dirty="0">
+                <a:solidFill>
+                  <a:srgbClr val="0D1B2A"/>
+                </a:solidFill>
+                <a:latin typeface="Cambria" pitchFamily="34" charset="0"/>
+                <a:ea typeface="Cambria" pitchFamily="34" charset="-122"/>
+                <a:cs typeface="Cambria" pitchFamily="34" charset="-120"/>
+              </a:rPr>
+              <a:t>הצוות מאחורי The Investor's Circle TLV</a:t>
+            </a:r>
+            <a:endParaRPr lang="en-US" sz="2800" dirty="0"/>
+          </a:p>
+        </p:txBody>
+      </p:sp>
+      <p:sp>
+        <p:nvSpPr>
+          <p:cNvPr id="3" name="Shape 1"/>
+          <p:cNvSpPr/>
+          <p:nvPr/>
+        </p:nvSpPr>
+        <p:spPr>
+          <a:xfrm>
+            <a:off x="731520" y="1691640"/>
+            <a:ext cx="5074920" cy="3931920"/>
+          </a:xfrm>
+          <a:prstGeom prst="rect">
+            <a:avLst/>
+          </a:prstGeom>
+          <a:solidFill>
+            <a:srgbClr val="FFFFFF"/>
+          </a:solidFill>
+          <a:ln w="15875">
+            <a:solidFill>
+              <a:srgbClr val="E8E2D4"/>
+            </a:solidFill>
+            <a:prstDash val="solid"/>
+          </a:ln>
+        </p:spPr>
+      </p:sp>
+      <p:sp>
+        <p:nvSpPr>
+          <p:cNvPr id="4" name="Shape 2"/>
+          <p:cNvSpPr/>
+          <p:nvPr/>
+        </p:nvSpPr>
+        <p:spPr>
+          <a:xfrm>
+            <a:off x="2766060" y="1965960"/>
+            <a:ext cx="1005840" cy="1005840"/>
           </a:xfrm>
           <a:prstGeom prst="ellipse">
             <a:avLst/>
           </a:prstGeom>
           <a:solidFill>
-            <a:srgbClr val="0D1B2A"/>
+            <a:srgbClr val="F8F7F4"/>
           </a:solidFill>
-          <a:ln w="19050">
+          <a:ln w="25400">
             <a:solidFill>
               <a:srgbClr val="B8963E"/>
             </a:solidFill>
@@ -7085,14 +7737,14 @@
       </p:sp>
       <p:sp>
         <p:nvSpPr>
-          <p:cNvPr id="3" name="Text 1"/>
-          <p:cNvSpPr/>
-          <p:nvPr/>
-        </p:nvSpPr>
-        <p:spPr>
-          <a:xfrm>
-            <a:off x="5684368" y="1280160"/>
-            <a:ext cx="822960" cy="822960"/>
+          <p:cNvPr id="5" name="Text 3"/>
+          <p:cNvSpPr/>
+          <p:nvPr/>
+        </p:nvSpPr>
+        <p:spPr>
+          <a:xfrm>
+            <a:off x="2766060" y="1965960"/>
+            <a:ext cx="1005840" cy="1005840"/>
           </a:xfrm>
           <a:prstGeom prst="rect">
             <a:avLst/>
@@ -7108,30 +7760,30 @@
               <a:buNone/>
             </a:pPr>
             <a:r>
-              <a:rPr lang="en-US" sz="2520" dirty="0">
-                <a:solidFill>
-                  <a:srgbClr val="D4AE58"/>
+              <a:rPr lang="en-US" sz="2400" b="1" dirty="0">
+                <a:solidFill>
+                  <a:srgbClr val="8A6E2A"/>
                 </a:solidFill>
                 <a:latin typeface="Cambria" pitchFamily="34" charset="0"/>
                 <a:ea typeface="Cambria" pitchFamily="34" charset="-122"/>
                 <a:cs typeface="Cambria" pitchFamily="34" charset="-120"/>
               </a:rPr>
-              <a:t>◆</a:t>
-            </a:r>
-            <a:endParaRPr lang="en-US" sz="2520" dirty="0"/>
-          </a:p>
-        </p:txBody>
-      </p:sp>
-      <p:sp>
-        <p:nvSpPr>
-          <p:cNvPr id="4" name="Text 2"/>
-          <p:cNvSpPr/>
-          <p:nvPr/>
-        </p:nvSpPr>
-        <p:spPr>
-          <a:xfrm>
-            <a:off x="914400" y="2377440"/>
-            <a:ext cx="10360152" cy="822960"/>
+              <a:t>דא</a:t>
+            </a:r>
+            <a:endParaRPr lang="en-US" sz="2400" dirty="0"/>
+          </a:p>
+        </p:txBody>
+      </p:sp>
+      <p:sp>
+        <p:nvSpPr>
+          <p:cNvPr id="6" name="Text 4"/>
+          <p:cNvSpPr/>
+          <p:nvPr/>
+        </p:nvSpPr>
+        <p:spPr>
+          <a:xfrm>
+            <a:off x="1005840" y="3154680"/>
+            <a:ext cx="4526280" cy="320040"/>
           </a:xfrm>
           <a:prstGeom prst="rect">
             <a:avLst/>
@@ -7147,217 +7799,355 @@
               <a:buNone/>
             </a:pPr>
             <a:r>
-              <a:rPr lang="en-US" sz="3400" b="1" dirty="0">
-                <a:solidFill>
-                  <a:srgbClr val="FFFFFF"/>
+              <a:rPr lang="en-US" sz="1100" b="1" spc="100" kern="0" dirty="0">
+                <a:solidFill>
+                  <a:srgbClr val="8A6E2A"/>
+                </a:solidFill>
+                <a:latin typeface="Calibri" pitchFamily="34" charset="0"/>
+                <a:ea typeface="Calibri" pitchFamily="34" charset="-122"/>
+                <a:cs typeface="Calibri" pitchFamily="34" charset="-120"/>
+              </a:rPr>
+              <a:t>מייסד ושותף מנהל</a:t>
+            </a:r>
+            <a:endParaRPr lang="en-US" sz="1100" dirty="0"/>
+          </a:p>
+        </p:txBody>
+      </p:sp>
+      <p:sp>
+        <p:nvSpPr>
+          <p:cNvPr id="7" name="Text 5"/>
+          <p:cNvSpPr/>
+          <p:nvPr/>
+        </p:nvSpPr>
+        <p:spPr>
+          <a:xfrm>
+            <a:off x="1005840" y="3474720"/>
+            <a:ext cx="4526280" cy="457200"/>
+          </a:xfrm>
+          <a:prstGeom prst="rect">
+            <a:avLst/>
+          </a:prstGeom>
+          <a:noFill/>
+          <a:ln/>
+        </p:spPr>
+        <p:txBody>
+          <a:bodyPr wrap="square" lIns="0" tIns="0" rIns="0" bIns="0" rtlCol="0" anchor="ctr"/>
+          <a:lstStyle/>
+          <a:p>
+            <a:pPr algn="ctr" indent="0" marL="0">
+              <a:buNone/>
+            </a:pPr>
+            <a:r>
+              <a:rPr lang="en-US" sz="2000" b="1" dirty="0">
+                <a:solidFill>
+                  <a:srgbClr val="0D1B2A"/>
                 </a:solidFill>
                 <a:latin typeface="Cambria" pitchFamily="34" charset="0"/>
                 <a:ea typeface="Cambria" pitchFamily="34" charset="-122"/>
                 <a:cs typeface="Cambria" pitchFamily="34" charset="-120"/>
               </a:rPr>
-              <a:t>תודה שהייתם איתנו</a:t>
-            </a:r>
-            <a:endParaRPr lang="en-US" sz="3400" dirty="0"/>
-          </a:p>
-        </p:txBody>
-      </p:sp>
-      <p:sp>
-        <p:nvSpPr>
-          <p:cNvPr id="5" name="Text 3"/>
-          <p:cNvSpPr/>
-          <p:nvPr/>
-        </p:nvSpPr>
-        <p:spPr>
-          <a:xfrm>
-            <a:off x="914400" y="3154680"/>
-            <a:ext cx="10360152" cy="548640"/>
-          </a:xfrm>
-          <a:prstGeom prst="rect">
-            <a:avLst/>
-          </a:prstGeom>
-          <a:noFill/>
-          <a:ln/>
-        </p:spPr>
-        <p:txBody>
-          <a:bodyPr wrap="square" lIns="0" tIns="0" rIns="0" bIns="0" rtlCol="0" anchor="ctr"/>
+              <a:t>דורון אפריאט</a:t>
+            </a:r>
+            <a:endParaRPr lang="en-US" sz="2000" dirty="0"/>
+          </a:p>
+        </p:txBody>
+      </p:sp>
+      <p:sp>
+        <p:nvSpPr>
+          <p:cNvPr id="8" name="Text 6"/>
+          <p:cNvSpPr/>
+          <p:nvPr/>
+        </p:nvSpPr>
+        <p:spPr>
+          <a:xfrm>
+            <a:off x="1097280" y="4023360"/>
+            <a:ext cx="4343400" cy="1463040"/>
+          </a:xfrm>
+          <a:prstGeom prst="rect">
+            <a:avLst/>
+          </a:prstGeom>
+          <a:noFill/>
+          <a:ln/>
+        </p:spPr>
+        <p:txBody>
+          <a:bodyPr wrap="square" lIns="0" tIns="0" rIns="0" bIns="0" rtlCol="0" anchor="t"/>
           <a:lstStyle/>
           <a:p>
             <a:pPr algn="ctr" indent="0" marL="0">
-              <a:buNone/>
-            </a:pPr>
-            <a:r>
-              <a:rPr lang="en-US" sz="1600" i="1" dirty="0">
-                <a:solidFill>
-                  <a:srgbClr val="D4AE58"/>
+              <a:lnSpc>
+                <a:spcPts val="1700"/>
+              </a:lnSpc>
+              <a:buNone/>
+            </a:pPr>
+            <a:r>
+              <a:rPr lang="en-US" sz="1200" dirty="0">
+                <a:solidFill>
+                  <a:srgbClr val="6B7280"/>
                 </a:solidFill>
                 <a:latin typeface="Calibri" pitchFamily="34" charset="0"/>
                 <a:ea typeface="Calibri" pitchFamily="34" charset="-122"/>
                 <a:cs typeface="Calibri" pitchFamily="34" charset="-120"/>
               </a:rPr>
-              <a:t>עכשיו זמן לשאלות</a:t>
-            </a:r>
-            <a:endParaRPr lang="en-US" sz="1600" dirty="0"/>
-          </a:p>
-        </p:txBody>
-      </p:sp>
-      <p:sp>
-        <p:nvSpPr>
-          <p:cNvPr id="6" name="Text 4"/>
-          <p:cNvSpPr/>
-          <p:nvPr/>
-        </p:nvSpPr>
-        <p:spPr>
-          <a:xfrm>
-            <a:off x="914400" y="4114800"/>
-            <a:ext cx="10360152" cy="822960"/>
-          </a:xfrm>
-          <a:prstGeom prst="rect">
-            <a:avLst/>
-          </a:prstGeom>
-          <a:noFill/>
-          <a:ln/>
-        </p:spPr>
-        <p:txBody>
-          <a:bodyPr wrap="square" lIns="0" tIns="0" rIns="0" bIns="0" rtlCol="0" anchor="t"/>
+              <a:t>למעלה מ-15 שנות ניסיון באיתור הזדמנויות והשבחת נכסים בתל אביב, בדגש על הצפון הישן ולב העיר. כל עסקה נבחנת דרך שלוש עדשות: כלכלית, תכנונית ועסקית.</a:t>
+            </a:r>
+            <a:endParaRPr lang="en-US" sz="1200" dirty="0"/>
+          </a:p>
+        </p:txBody>
+      </p:sp>
+      <p:sp>
+        <p:nvSpPr>
+          <p:cNvPr id="9" name="Shape 7"/>
+          <p:cNvSpPr/>
+          <p:nvPr/>
+        </p:nvSpPr>
+        <p:spPr>
+          <a:xfrm>
+            <a:off x="6355080" y="1691640"/>
+            <a:ext cx="5074920" cy="3931920"/>
+          </a:xfrm>
+          <a:prstGeom prst="rect">
+            <a:avLst/>
+          </a:prstGeom>
+          <a:solidFill>
+            <a:srgbClr val="FFFFFF"/>
+          </a:solidFill>
+          <a:ln w="15875">
+            <a:solidFill>
+              <a:srgbClr val="E8E2D4"/>
+            </a:solidFill>
+            <a:prstDash val="solid"/>
+          </a:ln>
+        </p:spPr>
+      </p:sp>
+      <p:sp>
+        <p:nvSpPr>
+          <p:cNvPr id="10" name="Shape 8"/>
+          <p:cNvSpPr/>
+          <p:nvPr/>
+        </p:nvSpPr>
+        <p:spPr>
+          <a:xfrm>
+            <a:off x="8389620" y="1965960"/>
+            <a:ext cx="1005840" cy="1005840"/>
+          </a:xfrm>
+          <a:prstGeom prst="ellipse">
+            <a:avLst/>
+          </a:prstGeom>
+          <a:solidFill>
+            <a:srgbClr val="F8F7F4"/>
+          </a:solidFill>
+          <a:ln w="25400">
+            <a:solidFill>
+              <a:srgbClr val="B8963E"/>
+            </a:solidFill>
+            <a:prstDash val="solid"/>
+          </a:ln>
+        </p:spPr>
+      </p:sp>
+      <p:sp>
+        <p:nvSpPr>
+          <p:cNvPr id="11" name="Text 9"/>
+          <p:cNvSpPr/>
+          <p:nvPr/>
+        </p:nvSpPr>
+        <p:spPr>
+          <a:xfrm>
+            <a:off x="8389620" y="1965960"/>
+            <a:ext cx="1005840" cy="1005840"/>
+          </a:xfrm>
+          <a:prstGeom prst="rect">
+            <a:avLst/>
+          </a:prstGeom>
+          <a:noFill/>
+          <a:ln/>
+        </p:spPr>
+        <p:txBody>
+          <a:bodyPr wrap="square" lIns="0" tIns="0" rIns="0" bIns="0" rtlCol="0" anchor="ctr"/>
           <a:lstStyle/>
           <a:p>
             <a:pPr algn="ctr" indent="0" marL="0">
-              <a:spcAft>
-                <a:spcPts val="600"/>
-              </a:spcAft>
-              <a:buNone/>
-            </a:pPr>
-            <a:r>
-              <a:rPr lang="en-US" sz="1400" dirty="0">
-                <a:solidFill>
-                  <a:srgbClr val="C9CFD6"/>
+              <a:buNone/>
+            </a:pPr>
+            <a:r>
+              <a:rPr lang="en-US" sz="2400" b="1" dirty="0">
+                <a:solidFill>
+                  <a:srgbClr val="8A6E2A"/>
+                </a:solidFill>
+                <a:latin typeface="Cambria" pitchFamily="34" charset="0"/>
+                <a:ea typeface="Cambria" pitchFamily="34" charset="-122"/>
+                <a:cs typeface="Cambria" pitchFamily="34" charset="-120"/>
+              </a:rPr>
+              <a:t>יל</a:t>
+            </a:r>
+            <a:endParaRPr lang="en-US" sz="2400" dirty="0"/>
+          </a:p>
+        </p:txBody>
+      </p:sp>
+      <p:sp>
+        <p:nvSpPr>
+          <p:cNvPr id="12" name="Text 10"/>
+          <p:cNvSpPr/>
+          <p:nvPr/>
+        </p:nvSpPr>
+        <p:spPr>
+          <a:xfrm>
+            <a:off x="6629400" y="3154680"/>
+            <a:ext cx="4526280" cy="320040"/>
+          </a:xfrm>
+          <a:prstGeom prst="rect">
+            <a:avLst/>
+          </a:prstGeom>
+          <a:noFill/>
+          <a:ln/>
+        </p:spPr>
+        <p:txBody>
+          <a:bodyPr wrap="square" lIns="0" tIns="0" rIns="0" bIns="0" rtlCol="0" anchor="ctr"/>
+          <a:lstStyle/>
+          <a:p>
+            <a:pPr algn="ctr" indent="0" marL="0">
+              <a:buNone/>
+            </a:pPr>
+            <a:r>
+              <a:rPr lang="en-US" sz="1100" b="1" spc="100" kern="0" dirty="0">
+                <a:solidFill>
+                  <a:srgbClr val="8A6E2A"/>
                 </a:solidFill>
                 <a:latin typeface="Calibri" pitchFamily="34" charset="0"/>
                 <a:ea typeface="Calibri" pitchFamily="34" charset="-122"/>
                 <a:cs typeface="Calibri" pitchFamily="34" charset="-120"/>
               </a:rPr>
-              <a:t>contact@tlv-investor.com</a:t>
-            </a:r>
-            <a:endParaRPr lang="en-US" sz="1400" dirty="0"/>
-          </a:p>
+              <a:t>שותף ומנהל שיווק ופיתוח עסקי</a:t>
+            </a:r>
+            <a:endParaRPr lang="en-US" sz="1100" dirty="0"/>
+          </a:p>
+        </p:txBody>
+      </p:sp>
+      <p:sp>
+        <p:nvSpPr>
+          <p:cNvPr id="13" name="Text 11"/>
+          <p:cNvSpPr/>
+          <p:nvPr/>
+        </p:nvSpPr>
+        <p:spPr>
+          <a:xfrm>
+            <a:off x="6629400" y="3474720"/>
+            <a:ext cx="4526280" cy="457200"/>
+          </a:xfrm>
+          <a:prstGeom prst="rect">
+            <a:avLst/>
+          </a:prstGeom>
+          <a:noFill/>
+          <a:ln/>
+        </p:spPr>
+        <p:txBody>
+          <a:bodyPr wrap="square" lIns="0" tIns="0" rIns="0" bIns="0" rtlCol="0" anchor="ctr"/>
+          <a:lstStyle/>
           <a:p>
             <a:pPr algn="ctr" indent="0" marL="0">
-              <a:spcAft>
-                <a:spcPts val="600"/>
-              </a:spcAft>
-              <a:buNone/>
-            </a:pPr>
-            <a:r>
-              <a:rPr lang="en-US" sz="1400" dirty="0">
-                <a:solidFill>
-                  <a:srgbClr val="C9CFD6"/>
+              <a:buNone/>
+            </a:pPr>
+            <a:r>
+              <a:rPr lang="en-US" sz="2000" b="1" dirty="0">
+                <a:solidFill>
+                  <a:srgbClr val="0D1B2A"/>
+                </a:solidFill>
+                <a:latin typeface="Cambria" pitchFamily="34" charset="0"/>
+                <a:ea typeface="Cambria" pitchFamily="34" charset="-122"/>
+                <a:cs typeface="Cambria" pitchFamily="34" charset="-120"/>
+              </a:rPr>
+              <a:t>יובל לב</a:t>
+            </a:r>
+            <a:endParaRPr lang="en-US" sz="2000" dirty="0"/>
+          </a:p>
+        </p:txBody>
+      </p:sp>
+      <p:sp>
+        <p:nvSpPr>
+          <p:cNvPr id="14" name="Text 12"/>
+          <p:cNvSpPr/>
+          <p:nvPr/>
+        </p:nvSpPr>
+        <p:spPr>
+          <a:xfrm>
+            <a:off x="6720840" y="4023360"/>
+            <a:ext cx="4343400" cy="1463040"/>
+          </a:xfrm>
+          <a:prstGeom prst="rect">
+            <a:avLst/>
+          </a:prstGeom>
+          <a:noFill/>
+          <a:ln/>
+        </p:spPr>
+        <p:txBody>
+          <a:bodyPr wrap="square" lIns="0" tIns="0" rIns="0" bIns="0" rtlCol="0" anchor="t"/>
+          <a:lstStyle/>
+          <a:p>
+            <a:pPr algn="ctr" indent="0" marL="0">
+              <a:lnSpc>
+                <a:spcPts val="1700"/>
+              </a:lnSpc>
+              <a:buNone/>
+            </a:pPr>
+            <a:r>
+              <a:rPr lang="en-US" sz="1200" dirty="0">
+                <a:solidFill>
+                  <a:srgbClr val="6B7280"/>
                 </a:solidFill>
                 <a:latin typeface="Calibri" pitchFamily="34" charset="0"/>
                 <a:ea typeface="Calibri" pitchFamily="34" charset="-122"/>
                 <a:cs typeface="Calibri" pitchFamily="34" charset="-120"/>
               </a:rPr>
-              <a:t>www.tlv-investor.com</a:t>
-            </a:r>
-            <a:endParaRPr lang="en-US" sz="1400" dirty="0"/>
-          </a:p>
-        </p:txBody>
-      </p:sp>
-      <p:sp>
-        <p:nvSpPr>
-          <p:cNvPr id="7" name="Text 5"/>
-          <p:cNvSpPr/>
-          <p:nvPr/>
-        </p:nvSpPr>
-        <p:spPr>
-          <a:xfrm>
-            <a:off x="914400" y="6126480"/>
-            <a:ext cx="10360152" cy="365760"/>
-          </a:xfrm>
-          <a:prstGeom prst="rect">
-            <a:avLst/>
-          </a:prstGeom>
-          <a:noFill/>
-          <a:ln/>
-        </p:spPr>
-        <p:txBody>
-          <a:bodyPr wrap="square" lIns="0" tIns="0" rIns="0" bIns="0" rtlCol="0" anchor="ctr"/>
-          <a:lstStyle/>
-          <a:p>
-            <a:pPr algn="ctr" indent="0" marL="0">
-              <a:buNone/>
-            </a:pPr>
-            <a:r>
-              <a:rPr lang="en-US" sz="1100" dirty="0">
+              <a:t>למעלה מעשור בניהול שיווק ופיתוח עסקי, לצד פעילות מעשית בנדל"ן. מתמחה במיצוי פוטנציאל הנכס לאחר הרכישה, ובהפיכת כל לקוח למשקיע בטוח ועצמאי יותר.</a:t>
+            </a:r>
+            <a:endParaRPr lang="en-US" sz="1200" dirty="0"/>
+          </a:p>
+        </p:txBody>
+      </p:sp>
+      <p:sp>
+        <p:nvSpPr>
+          <p:cNvPr id="25" name="Slide Number Placeholder 0"/>
+          <p:cNvSpPr>
+            <a:spLocks noGrp="1"/>
+          </p:cNvSpPr>
+          <p:nvPr>
+            <p:ph type="sldNum" sz="quarter" idx="4294967295"/>
+          </p:nvPr>
+        </p:nvSpPr>
+        <p:spPr>
+          <a:xfrm>
+            <a:off x="11612880" y="6473952"/>
+            <a:ext cx="800000" cy="300000"/>
+          </a:xfrm>
+          <a:prstGeom prst="rect">
+            <a:avLst/>
+          </a:prstGeom>
+          <a:extLst>
+            <a:ext uri="{C572A759-6A51-4108-AA02-DFA0A04FC94B}">
+              <ma14:wrappingTextBoxFlag xmlns:ma14="http://schemas.microsoft.com/office/mac/drawingml/2011/main" val="0"/>
+            </a:ext>
+          </a:extLst>
+        </p:spPr>
+        <p:txBody>
+          <a:bodyPr/>
+          <a:lstStyle>
+            <a:lvl1pPr>
+              <a:defRPr sz="900">
                 <a:solidFill>
                   <a:srgbClr val="9CA3AF"/>
                 </a:solidFill>
-                <a:latin typeface="Calibri" pitchFamily="34" charset="0"/>
-                <a:ea typeface="Calibri" pitchFamily="34" charset="-122"/>
-                <a:cs typeface="Calibri" pitchFamily="34" charset="-120"/>
-              </a:rPr>
-              <a:t>The Investor's Circle TLV</a:t>
-            </a:r>
-            <a:endParaRPr lang="en-US" sz="1100" dirty="0"/>
-          </a:p>
-        </p:txBody>
-      </p:sp>
-      <p:sp>
-        <p:nvSpPr>
-          <p:cNvPr id="8" name="Text 0"/>
-          <p:cNvSpPr/>
-          <p:nvPr>
-            <p:ph idx="100" type="title" hasCustomPrompt="1"/>
-          </p:nvPr>
-        </p:nvSpPr>
-        <p:spPr>
-          <a:xfrm>
-            <a:off x="914400" y="2423160"/>
-            <a:ext cx="10360152" cy="1463040"/>
-          </a:xfrm>
-          <a:prstGeom prst="rect">
-            <a:avLst/>
-          </a:prstGeom>
-          <a:noFill/>
-          <a:ln/>
-        </p:spPr>
-        <p:txBody>
-          <a:bodyPr wrap="square" rtlCol="0" anchor="ctr"/>
-          <a:lstStyle/>
-          <a:p>
-            <a:pPr algn="ctr" indent="0" marL="0">
-              <a:buNone/>
-            </a:pPr>
-            <a:endParaRPr lang="en-US" sz="4000" dirty="0"/>
-          </a:p>
-        </p:txBody>
-      </p:sp>
-      <p:sp>
-        <p:nvSpPr>
-          <p:cNvPr id="9" name="Text 0"/>
-          <p:cNvSpPr/>
-          <p:nvPr>
-            <p:ph idx="101" type="body" hasCustomPrompt="1"/>
-          </p:nvPr>
-        </p:nvSpPr>
-        <p:spPr>
-          <a:xfrm>
-            <a:off x="1371600" y="3977640"/>
-            <a:ext cx="9445752" cy="822960"/>
-          </a:xfrm>
-          <a:prstGeom prst="rect">
-            <a:avLst/>
-          </a:prstGeom>
-          <a:noFill/>
-          <a:ln/>
-        </p:spPr>
-        <p:txBody>
-          <a:bodyPr wrap="square" rtlCol="0" anchor="t"/>
-          <a:lstStyle/>
-          <a:p>
-            <a:pPr algn="ctr" indent="0" marL="0">
-              <a:buNone/>
-            </a:pPr>
-            <a:endParaRPr lang="en-US" sz="1600" dirty="0"/>
+                <a:latin typeface="Calibri"/>
+                <a:ea typeface="Calibri"/>
+                <a:cs typeface="Calibri"/>
+              </a:defRPr>
+            </a:lvl1pPr>
+          </a:lstStyle>
+          <a:p>
+            <a:pPr algn="l"/>
+            <a:fld id="{F7021451-1387-4CA6-816F-3879F97B5CBC}" type="slidenum">
+              <a:rPr b="0" lang="en-US"/>
+              <a:t>19</a:t>
+            </a:fld>
+            <a:endParaRPr lang="en-US"/>
           </a:p>
         </p:txBody>
       </p:sp>
@@ -8193,6 +8983,932 @@
 </p:sld>
 </file>
 
+<file path=ppt/slides/slide20.xml><?xml version="1.0" encoding="utf-8"?>
+<p:sld xmlns:a="http://schemas.openxmlformats.org/drawingml/2006/main" xmlns:r="http://schemas.openxmlformats.org/officeDocument/2006/relationships" xmlns:p="http://schemas.openxmlformats.org/presentationml/2006/main">
+  <p:cSld name="Slide 20">
+    <p:spTree>
+      <p:nvGrpSpPr>
+        <p:cNvPr id="1" name=""/>
+        <p:cNvGrpSpPr/>
+        <p:nvPr/>
+      </p:nvGrpSpPr>
+      <p:grpSpPr>
+        <a:xfrm>
+          <a:off x="0" y="0"/>
+          <a:ext cx="0" cy="0"/>
+          <a:chOff x="0" y="0"/>
+          <a:chExt cx="0" cy="0"/>
+        </a:xfrm>
+      </p:grpSpPr>
+      <p:sp>
+        <p:nvSpPr>
+          <p:cNvPr id="2" name="Text 0"/>
+          <p:cNvSpPr/>
+          <p:nvPr/>
+        </p:nvSpPr>
+        <p:spPr>
+          <a:xfrm>
+            <a:off x="914400" y="1188720"/>
+            <a:ext cx="10360152" cy="457200"/>
+          </a:xfrm>
+          <a:prstGeom prst="rect">
+            <a:avLst/>
+          </a:prstGeom>
+          <a:noFill/>
+          <a:ln/>
+        </p:spPr>
+        <p:txBody>
+          <a:bodyPr wrap="square" lIns="0" tIns="0" rIns="0" bIns="0" rtlCol="0" anchor="ctr"/>
+          <a:lstStyle/>
+          <a:p>
+            <a:pPr algn="ctr" indent="0" marL="0">
+              <a:buNone/>
+            </a:pPr>
+            <a:r>
+              <a:rPr lang="en-US" sz="1400" b="1" spc="200" kern="0" dirty="0">
+                <a:solidFill>
+                  <a:srgbClr val="D4AE58"/>
+                </a:solidFill>
+                <a:latin typeface="Calibri" pitchFamily="34" charset="0"/>
+                <a:ea typeface="Calibri" pitchFamily="34" charset="-122"/>
+                <a:cs typeface="Calibri" pitchFamily="34" charset="-120"/>
+              </a:rPr>
+              <a:t>השלב הבא</a:t>
+            </a:r>
+            <a:endParaRPr lang="en-US" sz="1400" dirty="0"/>
+          </a:p>
+        </p:txBody>
+      </p:sp>
+      <p:sp>
+        <p:nvSpPr>
+          <p:cNvPr id="3" name="Text 1"/>
+          <p:cNvSpPr/>
+          <p:nvPr/>
+        </p:nvSpPr>
+        <p:spPr>
+          <a:xfrm>
+            <a:off x="914400" y="1691640"/>
+            <a:ext cx="10360152" cy="822960"/>
+          </a:xfrm>
+          <a:prstGeom prst="rect">
+            <a:avLst/>
+          </a:prstGeom>
+          <a:noFill/>
+          <a:ln/>
+        </p:spPr>
+        <p:txBody>
+          <a:bodyPr wrap="square" lIns="0" tIns="0" rIns="0" bIns="0" rtlCol="0" anchor="ctr"/>
+          <a:lstStyle/>
+          <a:p>
+            <a:pPr algn="ctr" indent="0" marL="0">
+              <a:buNone/>
+            </a:pPr>
+            <a:r>
+              <a:rPr lang="en-US" sz="3200" b="1" dirty="0">
+                <a:solidFill>
+                  <a:srgbClr val="FFFFFF"/>
+                </a:solidFill>
+                <a:latin typeface="Cambria" pitchFamily="34" charset="0"/>
+                <a:ea typeface="Cambria" pitchFamily="34" charset="-122"/>
+                <a:cs typeface="Cambria" pitchFamily="34" charset="-120"/>
+              </a:rPr>
+              <a:t>מה מקבלים אחרי הוובינר</a:t>
+            </a:r>
+            <a:endParaRPr lang="en-US" sz="3200" dirty="0"/>
+          </a:p>
+        </p:txBody>
+      </p:sp>
+      <p:sp>
+        <p:nvSpPr>
+          <p:cNvPr id="4" name="Shape 2"/>
+          <p:cNvSpPr/>
+          <p:nvPr/>
+        </p:nvSpPr>
+        <p:spPr>
+          <a:xfrm>
+            <a:off x="731520" y="2834640"/>
+            <a:ext cx="3291840" cy="2377440"/>
+          </a:xfrm>
+          <a:prstGeom prst="rect">
+            <a:avLst/>
+          </a:prstGeom>
+          <a:solidFill>
+            <a:srgbClr val="132233"/>
+          </a:solidFill>
+          <a:ln w="12700">
+            <a:solidFill>
+              <a:srgbClr val="3A4C60"/>
+            </a:solidFill>
+            <a:prstDash val="solid"/>
+          </a:ln>
+        </p:spPr>
+      </p:sp>
+      <p:sp>
+        <p:nvSpPr>
+          <p:cNvPr id="5" name="Text 3"/>
+          <p:cNvSpPr/>
+          <p:nvPr/>
+        </p:nvSpPr>
+        <p:spPr>
+          <a:xfrm>
+            <a:off x="960120" y="3017520"/>
+            <a:ext cx="914400" cy="457200"/>
+          </a:xfrm>
+          <a:prstGeom prst="rect">
+            <a:avLst/>
+          </a:prstGeom>
+          <a:noFill/>
+          <a:ln/>
+        </p:spPr>
+        <p:txBody>
+          <a:bodyPr wrap="square" lIns="0" tIns="0" rIns="0" bIns="0" rtlCol="0" anchor="ctr"/>
+          <a:lstStyle/>
+          <a:p>
+            <a:pPr algn="l" indent="0" marL="0">
+              <a:buNone/>
+            </a:pPr>
+            <a:r>
+              <a:rPr lang="en-US" sz="2000" dirty="0">
+                <a:solidFill>
+                  <a:srgbClr val="B8963E"/>
+                </a:solidFill>
+                <a:latin typeface="Cambria" pitchFamily="34" charset="0"/>
+                <a:ea typeface="Cambria" pitchFamily="34" charset="-122"/>
+                <a:cs typeface="Cambria" pitchFamily="34" charset="-120"/>
+              </a:rPr>
+              <a:t>01</a:t>
+            </a:r>
+            <a:endParaRPr lang="en-US" sz="2000" dirty="0"/>
+          </a:p>
+        </p:txBody>
+      </p:sp>
+      <p:sp>
+        <p:nvSpPr>
+          <p:cNvPr id="6" name="Text 4"/>
+          <p:cNvSpPr/>
+          <p:nvPr/>
+        </p:nvSpPr>
+        <p:spPr>
+          <a:xfrm>
+            <a:off x="960120" y="3611880"/>
+            <a:ext cx="2834640" cy="457200"/>
+          </a:xfrm>
+          <a:prstGeom prst="rect">
+            <a:avLst/>
+          </a:prstGeom>
+          <a:noFill/>
+          <a:ln/>
+        </p:spPr>
+        <p:txBody>
+          <a:bodyPr wrap="square" lIns="0" tIns="0" rIns="0" bIns="0" rtlCol="0" anchor="t"/>
+          <a:lstStyle/>
+          <a:p>
+            <a:pPr algn="r" indent="0" marL="0">
+              <a:buNone/>
+            </a:pPr>
+            <a:r>
+              <a:rPr lang="en-US" sz="1450" b="1" dirty="0">
+                <a:solidFill>
+                  <a:srgbClr val="FFFFFF"/>
+                </a:solidFill>
+                <a:latin typeface="Calibri" pitchFamily="34" charset="0"/>
+                <a:ea typeface="Calibri" pitchFamily="34" charset="-122"/>
+                <a:cs typeface="Calibri" pitchFamily="34" charset="-120"/>
+              </a:rPr>
+              <a:t>חוברת עבודה דיגיטלית</a:t>
+            </a:r>
+            <a:endParaRPr lang="en-US" sz="1450" dirty="0"/>
+          </a:p>
+        </p:txBody>
+      </p:sp>
+      <p:sp>
+        <p:nvSpPr>
+          <p:cNvPr id="7" name="Text 5"/>
+          <p:cNvSpPr/>
+          <p:nvPr/>
+        </p:nvSpPr>
+        <p:spPr>
+          <a:xfrm>
+            <a:off x="960120" y="4114800"/>
+            <a:ext cx="2834640" cy="914400"/>
+          </a:xfrm>
+          <a:prstGeom prst="rect">
+            <a:avLst/>
+          </a:prstGeom>
+          <a:noFill/>
+          <a:ln/>
+        </p:spPr>
+        <p:txBody>
+          <a:bodyPr wrap="square" lIns="0" tIns="0" rIns="0" bIns="0" rtlCol="0" anchor="t"/>
+          <a:lstStyle/>
+          <a:p>
+            <a:pPr algn="r" indent="0" marL="0">
+              <a:lnSpc>
+                <a:spcPts val="1600"/>
+              </a:lnSpc>
+              <a:buNone/>
+            </a:pPr>
+            <a:r>
+              <a:rPr lang="en-US" sz="1150" dirty="0">
+                <a:solidFill>
+                  <a:srgbClr val="C9CFD6"/>
+                </a:solidFill>
+                <a:latin typeface="Calibri" pitchFamily="34" charset="0"/>
+                <a:ea typeface="Calibri" pitchFamily="34" charset="-122"/>
+                <a:cs typeface="Calibri" pitchFamily="34" charset="-120"/>
+              </a:rPr>
+              <a:t>מפת הדרכים המלאה ב-PDF, עם הצ'ק-ליסטים מהוובינר</a:t>
+            </a:r>
+            <a:endParaRPr lang="en-US" sz="1150" dirty="0"/>
+          </a:p>
+        </p:txBody>
+      </p:sp>
+      <p:sp>
+        <p:nvSpPr>
+          <p:cNvPr id="8" name="Shape 6"/>
+          <p:cNvSpPr/>
+          <p:nvPr/>
+        </p:nvSpPr>
+        <p:spPr>
+          <a:xfrm>
+            <a:off x="4361688" y="2834640"/>
+            <a:ext cx="3291840" cy="2377440"/>
+          </a:xfrm>
+          <a:prstGeom prst="rect">
+            <a:avLst/>
+          </a:prstGeom>
+          <a:solidFill>
+            <a:srgbClr val="132233"/>
+          </a:solidFill>
+          <a:ln w="12700">
+            <a:solidFill>
+              <a:srgbClr val="3A4C60"/>
+            </a:solidFill>
+            <a:prstDash val="solid"/>
+          </a:ln>
+        </p:spPr>
+      </p:sp>
+      <p:sp>
+        <p:nvSpPr>
+          <p:cNvPr id="9" name="Text 7"/>
+          <p:cNvSpPr/>
+          <p:nvPr/>
+        </p:nvSpPr>
+        <p:spPr>
+          <a:xfrm>
+            <a:off x="4590288" y="3017520"/>
+            <a:ext cx="914400" cy="457200"/>
+          </a:xfrm>
+          <a:prstGeom prst="rect">
+            <a:avLst/>
+          </a:prstGeom>
+          <a:noFill/>
+          <a:ln/>
+        </p:spPr>
+        <p:txBody>
+          <a:bodyPr wrap="square" lIns="0" tIns="0" rIns="0" bIns="0" rtlCol="0" anchor="ctr"/>
+          <a:lstStyle/>
+          <a:p>
+            <a:pPr algn="l" indent="0" marL="0">
+              <a:buNone/>
+            </a:pPr>
+            <a:r>
+              <a:rPr lang="en-US" sz="2000" dirty="0">
+                <a:solidFill>
+                  <a:srgbClr val="B8963E"/>
+                </a:solidFill>
+                <a:latin typeface="Cambria" pitchFamily="34" charset="0"/>
+                <a:ea typeface="Cambria" pitchFamily="34" charset="-122"/>
+                <a:cs typeface="Cambria" pitchFamily="34" charset="-120"/>
+              </a:rPr>
+              <a:t>02</a:t>
+            </a:r>
+            <a:endParaRPr lang="en-US" sz="2000" dirty="0"/>
+          </a:p>
+        </p:txBody>
+      </p:sp>
+      <p:sp>
+        <p:nvSpPr>
+          <p:cNvPr id="10" name="Text 8"/>
+          <p:cNvSpPr/>
+          <p:nvPr/>
+        </p:nvSpPr>
+        <p:spPr>
+          <a:xfrm>
+            <a:off x="4590288" y="3611880"/>
+            <a:ext cx="2834640" cy="457200"/>
+          </a:xfrm>
+          <a:prstGeom prst="rect">
+            <a:avLst/>
+          </a:prstGeom>
+          <a:noFill/>
+          <a:ln/>
+        </p:spPr>
+        <p:txBody>
+          <a:bodyPr wrap="square" lIns="0" tIns="0" rIns="0" bIns="0" rtlCol="0" anchor="t"/>
+          <a:lstStyle/>
+          <a:p>
+            <a:pPr algn="r" indent="0" marL="0">
+              <a:buNone/>
+            </a:pPr>
+            <a:r>
+              <a:rPr lang="en-US" sz="1450" b="1" dirty="0">
+                <a:solidFill>
+                  <a:srgbClr val="FFFFFF"/>
+                </a:solidFill>
+                <a:latin typeface="Calibri" pitchFamily="34" charset="0"/>
+                <a:ea typeface="Calibri" pitchFamily="34" charset="-122"/>
+                <a:cs typeface="Calibri" pitchFamily="34" charset="-120"/>
+              </a:rPr>
+              <a:t>הקלטת הוובינר</a:t>
+            </a:r>
+            <a:endParaRPr lang="en-US" sz="1450" dirty="0"/>
+          </a:p>
+        </p:txBody>
+      </p:sp>
+      <p:sp>
+        <p:nvSpPr>
+          <p:cNvPr id="11" name="Text 9"/>
+          <p:cNvSpPr/>
+          <p:nvPr/>
+        </p:nvSpPr>
+        <p:spPr>
+          <a:xfrm>
+            <a:off x="4590288" y="4114800"/>
+            <a:ext cx="2834640" cy="914400"/>
+          </a:xfrm>
+          <a:prstGeom prst="rect">
+            <a:avLst/>
+          </a:prstGeom>
+          <a:noFill/>
+          <a:ln/>
+        </p:spPr>
+        <p:txBody>
+          <a:bodyPr wrap="square" lIns="0" tIns="0" rIns="0" bIns="0" rtlCol="0" anchor="t"/>
+          <a:lstStyle/>
+          <a:p>
+            <a:pPr algn="r" indent="0" marL="0">
+              <a:lnSpc>
+                <a:spcPts val="1600"/>
+              </a:lnSpc>
+              <a:buNone/>
+            </a:pPr>
+            <a:r>
+              <a:rPr lang="en-US" sz="1150" dirty="0">
+                <a:solidFill>
+                  <a:srgbClr val="C9CFD6"/>
+                </a:solidFill>
+                <a:latin typeface="Calibri" pitchFamily="34" charset="0"/>
+                <a:ea typeface="Calibri" pitchFamily="34" charset="-122"/>
+                <a:cs typeface="Calibri" pitchFamily="34" charset="-120"/>
+              </a:rPr>
+              <a:t>למי שרוצה לחזור על החומר, או פספס משהו</a:t>
+            </a:r>
+            <a:endParaRPr lang="en-US" sz="1150" dirty="0"/>
+          </a:p>
+        </p:txBody>
+      </p:sp>
+      <p:sp>
+        <p:nvSpPr>
+          <p:cNvPr id="12" name="Shape 10"/>
+          <p:cNvSpPr/>
+          <p:nvPr/>
+        </p:nvSpPr>
+        <p:spPr>
+          <a:xfrm>
+            <a:off x="7991856" y="2834640"/>
+            <a:ext cx="3291840" cy="2377440"/>
+          </a:xfrm>
+          <a:prstGeom prst="rect">
+            <a:avLst/>
+          </a:prstGeom>
+          <a:solidFill>
+            <a:srgbClr val="132233"/>
+          </a:solidFill>
+          <a:ln w="12700">
+            <a:solidFill>
+              <a:srgbClr val="3A4C60"/>
+            </a:solidFill>
+            <a:prstDash val="solid"/>
+          </a:ln>
+        </p:spPr>
+      </p:sp>
+      <p:sp>
+        <p:nvSpPr>
+          <p:cNvPr id="13" name="Text 11"/>
+          <p:cNvSpPr/>
+          <p:nvPr/>
+        </p:nvSpPr>
+        <p:spPr>
+          <a:xfrm>
+            <a:off x="8220456" y="3017520"/>
+            <a:ext cx="914400" cy="457200"/>
+          </a:xfrm>
+          <a:prstGeom prst="rect">
+            <a:avLst/>
+          </a:prstGeom>
+          <a:noFill/>
+          <a:ln/>
+        </p:spPr>
+        <p:txBody>
+          <a:bodyPr wrap="square" lIns="0" tIns="0" rIns="0" bIns="0" rtlCol="0" anchor="ctr"/>
+          <a:lstStyle/>
+          <a:p>
+            <a:pPr algn="l" indent="0" marL="0">
+              <a:buNone/>
+            </a:pPr>
+            <a:r>
+              <a:rPr lang="en-US" sz="2000" dirty="0">
+                <a:solidFill>
+                  <a:srgbClr val="B8963E"/>
+                </a:solidFill>
+                <a:latin typeface="Cambria" pitchFamily="34" charset="0"/>
+                <a:ea typeface="Cambria" pitchFamily="34" charset="-122"/>
+                <a:cs typeface="Cambria" pitchFamily="34" charset="-120"/>
+              </a:rPr>
+              <a:t>03</a:t>
+            </a:r>
+            <a:endParaRPr lang="en-US" sz="2000" dirty="0"/>
+          </a:p>
+        </p:txBody>
+      </p:sp>
+      <p:sp>
+        <p:nvSpPr>
+          <p:cNvPr id="14" name="Text 12"/>
+          <p:cNvSpPr/>
+          <p:nvPr/>
+        </p:nvSpPr>
+        <p:spPr>
+          <a:xfrm>
+            <a:off x="8220456" y="3611880"/>
+            <a:ext cx="2834640" cy="457200"/>
+          </a:xfrm>
+          <a:prstGeom prst="rect">
+            <a:avLst/>
+          </a:prstGeom>
+          <a:noFill/>
+          <a:ln/>
+        </p:spPr>
+        <p:txBody>
+          <a:bodyPr wrap="square" lIns="0" tIns="0" rIns="0" bIns="0" rtlCol="0" anchor="t"/>
+          <a:lstStyle/>
+          <a:p>
+            <a:pPr algn="r" indent="0" marL="0">
+              <a:buNone/>
+            </a:pPr>
+            <a:r>
+              <a:rPr lang="en-US" sz="1450" b="1" dirty="0">
+                <a:solidFill>
+                  <a:srgbClr val="FFFFFF"/>
+                </a:solidFill>
+                <a:latin typeface="Calibri" pitchFamily="34" charset="0"/>
+                <a:ea typeface="Calibri" pitchFamily="34" charset="-122"/>
+                <a:cs typeface="Calibri" pitchFamily="34" charset="-120"/>
+              </a:rPr>
+              <a:t>שיחת אפיון אישית</a:t>
+            </a:r>
+            <a:endParaRPr lang="en-US" sz="1450" dirty="0"/>
+          </a:p>
+        </p:txBody>
+      </p:sp>
+      <p:sp>
+        <p:nvSpPr>
+          <p:cNvPr id="15" name="Text 13"/>
+          <p:cNvSpPr/>
+          <p:nvPr/>
+        </p:nvSpPr>
+        <p:spPr>
+          <a:xfrm>
+            <a:off x="8220456" y="4114800"/>
+            <a:ext cx="2834640" cy="914400"/>
+          </a:xfrm>
+          <a:prstGeom prst="rect">
+            <a:avLst/>
+          </a:prstGeom>
+          <a:noFill/>
+          <a:ln/>
+        </p:spPr>
+        <p:txBody>
+          <a:bodyPr wrap="square" lIns="0" tIns="0" rIns="0" bIns="0" rtlCol="0" anchor="t"/>
+          <a:lstStyle/>
+          <a:p>
+            <a:pPr algn="r" indent="0" marL="0">
+              <a:lnSpc>
+                <a:spcPts val="1600"/>
+              </a:lnSpc>
+              <a:buNone/>
+            </a:pPr>
+            <a:r>
+              <a:rPr lang="en-US" sz="1150" dirty="0">
+                <a:solidFill>
+                  <a:srgbClr val="C9CFD6"/>
+                </a:solidFill>
+                <a:latin typeface="Calibri" pitchFamily="34" charset="0"/>
+                <a:ea typeface="Calibri" pitchFamily="34" charset="-122"/>
+                <a:cs typeface="Calibri" pitchFamily="34" charset="-120"/>
+              </a:rPr>
+              <a:t>למי שרוצה להמשיך קדימה, בלי שום התחייבות</a:t>
+            </a:r>
+            <a:endParaRPr lang="en-US" sz="1150" dirty="0"/>
+          </a:p>
+        </p:txBody>
+      </p:sp>
+      <p:sp>
+        <p:nvSpPr>
+          <p:cNvPr id="16" name="Text 0"/>
+          <p:cNvSpPr/>
+          <p:nvPr>
+            <p:ph idx="100" type="title" hasCustomPrompt="1"/>
+          </p:nvPr>
+        </p:nvSpPr>
+        <p:spPr>
+          <a:xfrm>
+            <a:off x="914400" y="2423160"/>
+            <a:ext cx="10360152" cy="1463040"/>
+          </a:xfrm>
+          <a:prstGeom prst="rect">
+            <a:avLst/>
+          </a:prstGeom>
+          <a:noFill/>
+          <a:ln/>
+        </p:spPr>
+        <p:txBody>
+          <a:bodyPr wrap="square" rtlCol="0" anchor="ctr"/>
+          <a:lstStyle/>
+          <a:p>
+            <a:pPr algn="ctr" indent="0" marL="0">
+              <a:buNone/>
+            </a:pPr>
+            <a:endParaRPr lang="en-US" sz="4000" dirty="0"/>
+          </a:p>
+        </p:txBody>
+      </p:sp>
+      <p:sp>
+        <p:nvSpPr>
+          <p:cNvPr id="17" name="Text 0"/>
+          <p:cNvSpPr/>
+          <p:nvPr>
+            <p:ph idx="101" type="body" hasCustomPrompt="1"/>
+          </p:nvPr>
+        </p:nvSpPr>
+        <p:spPr>
+          <a:xfrm>
+            <a:off x="1371600" y="3977640"/>
+            <a:ext cx="9445752" cy="822960"/>
+          </a:xfrm>
+          <a:prstGeom prst="rect">
+            <a:avLst/>
+          </a:prstGeom>
+          <a:noFill/>
+          <a:ln/>
+        </p:spPr>
+        <p:txBody>
+          <a:bodyPr wrap="square" rtlCol="0" anchor="t"/>
+          <a:lstStyle/>
+          <a:p>
+            <a:pPr algn="ctr" indent="0" marL="0">
+              <a:buNone/>
+            </a:pPr>
+            <a:endParaRPr lang="en-US" sz="1600" dirty="0"/>
+          </a:p>
+        </p:txBody>
+      </p:sp>
+    </p:spTree>
+  </p:cSld>
+  <p:clrMapOvr>
+    <a:masterClrMapping/>
+  </p:clrMapOvr>
+</p:sld>
+</file>
+
+<file path=ppt/slides/slide21.xml><?xml version="1.0" encoding="utf-8"?>
+<p:sld xmlns:a="http://schemas.openxmlformats.org/drawingml/2006/main" xmlns:r="http://schemas.openxmlformats.org/officeDocument/2006/relationships" xmlns:p="http://schemas.openxmlformats.org/presentationml/2006/main">
+  <p:cSld name="Slide 21">
+    <p:spTree>
+      <p:nvGrpSpPr>
+        <p:cNvPr id="1" name=""/>
+        <p:cNvGrpSpPr/>
+        <p:nvPr/>
+      </p:nvGrpSpPr>
+      <p:grpSpPr>
+        <a:xfrm>
+          <a:off x="0" y="0"/>
+          <a:ext cx="0" cy="0"/>
+          <a:chOff x="0" y="0"/>
+          <a:chExt cx="0" cy="0"/>
+        </a:xfrm>
+      </p:grpSpPr>
+      <p:sp>
+        <p:nvSpPr>
+          <p:cNvPr id="2" name="Shape 0"/>
+          <p:cNvSpPr/>
+          <p:nvPr/>
+        </p:nvSpPr>
+        <p:spPr>
+          <a:xfrm>
+            <a:off x="5684368" y="1280160"/>
+            <a:ext cx="822960" cy="822960"/>
+          </a:xfrm>
+          <a:prstGeom prst="ellipse">
+            <a:avLst/>
+          </a:prstGeom>
+          <a:solidFill>
+            <a:srgbClr val="0D1B2A"/>
+          </a:solidFill>
+          <a:ln w="19050">
+            <a:solidFill>
+              <a:srgbClr val="B8963E"/>
+            </a:solidFill>
+            <a:prstDash val="solid"/>
+          </a:ln>
+        </p:spPr>
+      </p:sp>
+      <p:sp>
+        <p:nvSpPr>
+          <p:cNvPr id="3" name="Text 1"/>
+          <p:cNvSpPr/>
+          <p:nvPr/>
+        </p:nvSpPr>
+        <p:spPr>
+          <a:xfrm>
+            <a:off x="5684368" y="1280160"/>
+            <a:ext cx="822960" cy="822960"/>
+          </a:xfrm>
+          <a:prstGeom prst="rect">
+            <a:avLst/>
+          </a:prstGeom>
+          <a:noFill/>
+          <a:ln/>
+        </p:spPr>
+        <p:txBody>
+          <a:bodyPr wrap="square" lIns="0" tIns="0" rIns="0" bIns="0" rtlCol="0" anchor="ctr"/>
+          <a:lstStyle/>
+          <a:p>
+            <a:pPr algn="ctr" indent="0" marL="0">
+              <a:buNone/>
+            </a:pPr>
+            <a:r>
+              <a:rPr lang="en-US" sz="2520" dirty="0">
+                <a:solidFill>
+                  <a:srgbClr val="D4AE58"/>
+                </a:solidFill>
+                <a:latin typeface="Cambria" pitchFamily="34" charset="0"/>
+                <a:ea typeface="Cambria" pitchFamily="34" charset="-122"/>
+                <a:cs typeface="Cambria" pitchFamily="34" charset="-120"/>
+              </a:rPr>
+              <a:t>◆</a:t>
+            </a:r>
+            <a:endParaRPr lang="en-US" sz="2520" dirty="0"/>
+          </a:p>
+        </p:txBody>
+      </p:sp>
+      <p:sp>
+        <p:nvSpPr>
+          <p:cNvPr id="4" name="Text 2"/>
+          <p:cNvSpPr/>
+          <p:nvPr/>
+        </p:nvSpPr>
+        <p:spPr>
+          <a:xfrm>
+            <a:off x="914400" y="2377440"/>
+            <a:ext cx="10360152" cy="822960"/>
+          </a:xfrm>
+          <a:prstGeom prst="rect">
+            <a:avLst/>
+          </a:prstGeom>
+          <a:noFill/>
+          <a:ln/>
+        </p:spPr>
+        <p:txBody>
+          <a:bodyPr wrap="square" lIns="0" tIns="0" rIns="0" bIns="0" rtlCol="0" anchor="ctr"/>
+          <a:lstStyle/>
+          <a:p>
+            <a:pPr algn="ctr" indent="0" marL="0">
+              <a:buNone/>
+            </a:pPr>
+            <a:r>
+              <a:rPr lang="en-US" sz="3400" b="1" dirty="0">
+                <a:solidFill>
+                  <a:srgbClr val="FFFFFF"/>
+                </a:solidFill>
+                <a:latin typeface="Cambria" pitchFamily="34" charset="0"/>
+                <a:ea typeface="Cambria" pitchFamily="34" charset="-122"/>
+                <a:cs typeface="Cambria" pitchFamily="34" charset="-120"/>
+              </a:rPr>
+              <a:t>תודה שהייתם איתנו</a:t>
+            </a:r>
+            <a:endParaRPr lang="en-US" sz="3400" dirty="0"/>
+          </a:p>
+        </p:txBody>
+      </p:sp>
+      <p:sp>
+        <p:nvSpPr>
+          <p:cNvPr id="5" name="Text 3"/>
+          <p:cNvSpPr/>
+          <p:nvPr/>
+        </p:nvSpPr>
+        <p:spPr>
+          <a:xfrm>
+            <a:off x="914400" y="3154680"/>
+            <a:ext cx="10360152" cy="548640"/>
+          </a:xfrm>
+          <a:prstGeom prst="rect">
+            <a:avLst/>
+          </a:prstGeom>
+          <a:noFill/>
+          <a:ln/>
+        </p:spPr>
+        <p:txBody>
+          <a:bodyPr wrap="square" lIns="0" tIns="0" rIns="0" bIns="0" rtlCol="0" anchor="ctr"/>
+          <a:lstStyle/>
+          <a:p>
+            <a:pPr algn="ctr" indent="0" marL="0">
+              <a:buNone/>
+            </a:pPr>
+            <a:r>
+              <a:rPr lang="en-US" sz="1600" i="1" dirty="0">
+                <a:solidFill>
+                  <a:srgbClr val="D4AE58"/>
+                </a:solidFill>
+                <a:latin typeface="Calibri" pitchFamily="34" charset="0"/>
+                <a:ea typeface="Calibri" pitchFamily="34" charset="-122"/>
+                <a:cs typeface="Calibri" pitchFamily="34" charset="-120"/>
+              </a:rPr>
+              <a:t>עכשיו זמן לשאלות</a:t>
+            </a:r>
+            <a:endParaRPr lang="en-US" sz="1600" dirty="0"/>
+          </a:p>
+        </p:txBody>
+      </p:sp>
+      <p:sp>
+        <p:nvSpPr>
+          <p:cNvPr id="6" name="Text 4"/>
+          <p:cNvSpPr/>
+          <p:nvPr/>
+        </p:nvSpPr>
+        <p:spPr>
+          <a:xfrm>
+            <a:off x="914400" y="4114800"/>
+            <a:ext cx="10360152" cy="822960"/>
+          </a:xfrm>
+          <a:prstGeom prst="rect">
+            <a:avLst/>
+          </a:prstGeom>
+          <a:noFill/>
+          <a:ln/>
+        </p:spPr>
+        <p:txBody>
+          <a:bodyPr wrap="square" lIns="0" tIns="0" rIns="0" bIns="0" rtlCol="0" anchor="t"/>
+          <a:lstStyle/>
+          <a:p>
+            <a:pPr algn="ctr" indent="0" marL="0">
+              <a:spcAft>
+                <a:spcPts val="600"/>
+              </a:spcAft>
+              <a:buNone/>
+            </a:pPr>
+            <a:r>
+              <a:rPr lang="en-US" sz="1400" dirty="0">
+                <a:solidFill>
+                  <a:srgbClr val="C9CFD6"/>
+                </a:solidFill>
+                <a:latin typeface="Calibri" pitchFamily="34" charset="0"/>
+                <a:ea typeface="Calibri" pitchFamily="34" charset="-122"/>
+                <a:cs typeface="Calibri" pitchFamily="34" charset="-120"/>
+              </a:rPr>
+              <a:t>contact@tlv-investor.com</a:t>
+            </a:r>
+            <a:endParaRPr lang="en-US" sz="1400" dirty="0"/>
+          </a:p>
+          <a:p>
+            <a:pPr algn="ctr" indent="0" marL="0">
+              <a:spcAft>
+                <a:spcPts val="600"/>
+              </a:spcAft>
+              <a:buNone/>
+            </a:pPr>
+            <a:r>
+              <a:rPr lang="en-US" sz="1400" dirty="0">
+                <a:solidFill>
+                  <a:srgbClr val="C9CFD6"/>
+                </a:solidFill>
+                <a:latin typeface="Calibri" pitchFamily="34" charset="0"/>
+                <a:ea typeface="Calibri" pitchFamily="34" charset="-122"/>
+                <a:cs typeface="Calibri" pitchFamily="34" charset="-120"/>
+              </a:rPr>
+              <a:t>www.tlv-investor.com</a:t>
+            </a:r>
+            <a:endParaRPr lang="en-US" sz="1400" dirty="0"/>
+          </a:p>
+        </p:txBody>
+      </p:sp>
+      <p:sp>
+        <p:nvSpPr>
+          <p:cNvPr id="7" name="Text 5"/>
+          <p:cNvSpPr/>
+          <p:nvPr/>
+        </p:nvSpPr>
+        <p:spPr>
+          <a:xfrm>
+            <a:off x="914400" y="6126480"/>
+            <a:ext cx="10360152" cy="365760"/>
+          </a:xfrm>
+          <a:prstGeom prst="rect">
+            <a:avLst/>
+          </a:prstGeom>
+          <a:noFill/>
+          <a:ln/>
+        </p:spPr>
+        <p:txBody>
+          <a:bodyPr wrap="square" lIns="0" tIns="0" rIns="0" bIns="0" rtlCol="0" anchor="ctr"/>
+          <a:lstStyle/>
+          <a:p>
+            <a:pPr algn="ctr" indent="0" marL="0">
+              <a:buNone/>
+            </a:pPr>
+            <a:r>
+              <a:rPr lang="en-US" sz="1100" dirty="0">
+                <a:solidFill>
+                  <a:srgbClr val="9CA3AF"/>
+                </a:solidFill>
+                <a:latin typeface="Calibri" pitchFamily="34" charset="0"/>
+                <a:ea typeface="Calibri" pitchFamily="34" charset="-122"/>
+                <a:cs typeface="Calibri" pitchFamily="34" charset="-120"/>
+              </a:rPr>
+              <a:t>The Investor's Circle TLV</a:t>
+            </a:r>
+            <a:endParaRPr lang="en-US" sz="1100" dirty="0"/>
+          </a:p>
+        </p:txBody>
+      </p:sp>
+      <p:sp>
+        <p:nvSpPr>
+          <p:cNvPr id="8" name="Text 0"/>
+          <p:cNvSpPr/>
+          <p:nvPr>
+            <p:ph idx="100" type="title" hasCustomPrompt="1"/>
+          </p:nvPr>
+        </p:nvSpPr>
+        <p:spPr>
+          <a:xfrm>
+            <a:off x="914400" y="2423160"/>
+            <a:ext cx="10360152" cy="1463040"/>
+          </a:xfrm>
+          <a:prstGeom prst="rect">
+            <a:avLst/>
+          </a:prstGeom>
+          <a:noFill/>
+          <a:ln/>
+        </p:spPr>
+        <p:txBody>
+          <a:bodyPr wrap="square" rtlCol="0" anchor="ctr"/>
+          <a:lstStyle/>
+          <a:p>
+            <a:pPr algn="ctr" indent="0" marL="0">
+              <a:buNone/>
+            </a:pPr>
+            <a:endParaRPr lang="en-US" sz="4000" dirty="0"/>
+          </a:p>
+        </p:txBody>
+      </p:sp>
+      <p:sp>
+        <p:nvSpPr>
+          <p:cNvPr id="9" name="Text 0"/>
+          <p:cNvSpPr/>
+          <p:nvPr>
+            <p:ph idx="101" type="body" hasCustomPrompt="1"/>
+          </p:nvPr>
+        </p:nvSpPr>
+        <p:spPr>
+          <a:xfrm>
+            <a:off x="1371600" y="3977640"/>
+            <a:ext cx="9445752" cy="822960"/>
+          </a:xfrm>
+          <a:prstGeom prst="rect">
+            <a:avLst/>
+          </a:prstGeom>
+          <a:noFill/>
+          <a:ln/>
+        </p:spPr>
+        <p:txBody>
+          <a:bodyPr wrap="square" rtlCol="0" anchor="t"/>
+          <a:lstStyle/>
+          <a:p>
+            <a:pPr algn="ctr" indent="0" marL="0">
+              <a:buNone/>
+            </a:pPr>
+            <a:endParaRPr lang="en-US" sz="1600" dirty="0"/>
+          </a:p>
+        </p:txBody>
+      </p:sp>
+    </p:spTree>
+  </p:cSld>
+  <p:clrMapOvr>
+    <a:masterClrMapping/>
+  </p:clrMapOvr>
+</p:sld>
+</file>
+
 <file path=ppt/slides/slide3.xml><?xml version="1.0" encoding="utf-8"?>
 <p:sld xmlns:a="http://schemas.openxmlformats.org/drawingml/2006/main" xmlns:r="http://schemas.openxmlformats.org/officeDocument/2006/relationships" xmlns:p="http://schemas.openxmlformats.org/presentationml/2006/main">
   <p:cSld name="Slide 3">
@@ -9060,9 +10776,54 @@
           <a:chExt cx="0" cy="0"/>
         </a:xfrm>
       </p:grpSpPr>
-      <p:sp>
-        <p:nvSpPr>
-          <p:cNvPr id="2" name="Text 0"/>
+      <p:pic>
+        <p:nvPicPr>
+          <p:cNvPr id="2" name="Image 0" descr="/tmp/claude-0/-home-user-Budget-bot/bb3508b1-6506-5404-ae67-cc0e6ad7c68b/scratchpad/deck/images/tel aviv sky line.jpg">    </p:cNvPr>
+          <p:cNvPicPr>
+            <a:picLocks noChangeAspect="1"/>
+          </p:cNvPicPr>
+          <p:nvPr/>
+        </p:nvPicPr>
+        <p:blipFill>
+          <a:blip r:embed="rId1"/>
+          <a:srcRect l="0" r="0" t="0" b="0"/>
+          <a:stretch/>
+        </p:blipFill>
+        <p:spPr>
+          <a:xfrm>
+            <a:off x="0" y="0"/>
+            <a:ext cx="12191695" cy="6858000"/>
+          </a:xfrm>
+          <a:prstGeom prst="rect">
+            <a:avLst/>
+          </a:prstGeom>
+        </p:spPr>
+      </p:pic>
+      <p:sp>
+        <p:nvSpPr>
+          <p:cNvPr id="3" name="Shape 0"/>
+          <p:cNvSpPr/>
+          <p:nvPr/>
+        </p:nvSpPr>
+        <p:spPr>
+          <a:xfrm>
+            <a:off x="0" y="0"/>
+            <a:ext cx="12191695" cy="6858000"/>
+          </a:xfrm>
+          <a:prstGeom prst="rect">
+            <a:avLst/>
+          </a:prstGeom>
+          <a:solidFill>
+            <a:srgbClr val="0D1B2A">
+              <a:alpha val="82000"/>
+            </a:srgbClr>
+          </a:solidFill>
+          <a:ln/>
+        </p:spPr>
+      </p:sp>
+      <p:sp>
+        <p:nvSpPr>
+          <p:cNvPr id="4" name="Text 1"/>
           <p:cNvSpPr/>
           <p:nvPr/>
         </p:nvSpPr>
@@ -9101,7 +10862,7 @@
       </p:sp>
       <p:sp>
         <p:nvSpPr>
-          <p:cNvPr id="3" name="Text 0"/>
+          <p:cNvPr id="5" name="Text 0"/>
           <p:cNvSpPr/>
           <p:nvPr>
             <p:ph idx="100" type="title" hasCustomPrompt="1"/>

--- a/downloads/tlv-webinar-deck.pptx
+++ b/downloads/tlv-webinar-deck.pptx
@@ -3569,7 +3569,7 @@
                 <a:ea typeface="Calibri" pitchFamily="34" charset="-122"/>
                 <a:cs typeface="Calibri" pitchFamily="34" charset="-120"/>
               </a:rPr>
-              <a:t>מה ההון הפנוי האמיתי שלי להשקעה, אחרי עלויות נלוות (מס רכישה, שכר טרחה, שיפוץ)?</a:t>
+              <a:t>מה ההון הפנוי להשקעה בתל אביב?</a:t>
             </a:r>
             <a:endParaRPr lang="en-US" sz="1350" dirty="0"/>
           </a:p>
@@ -3636,7 +3636,7 @@
                 <a:ea typeface="Calibri" pitchFamily="34" charset="-122"/>
                 <a:cs typeface="Calibri" pitchFamily="34" charset="-120"/>
               </a:rPr>
-              <a:t>האם אני מחפש הכנסה שוטפת משכירות, או עליית ערך לטווח בינוני-ארוך?</a:t>
+              <a:t>האם אני מחפש הכנסה שוטפת משכירות, או עליית ערך משמעותית לטווח קצר או בינוני-ארוך? (תלוי סטטוס דירה יחידה או דירה להשקעה)</a:t>
             </a:r>
             <a:endParaRPr lang="en-US" sz="1350" dirty="0"/>
           </a:p>
@@ -3703,7 +3703,7 @@
                 <a:ea typeface="Calibri" pitchFamily="34" charset="-122"/>
                 <a:cs typeface="Calibri" pitchFamily="34" charset="-120"/>
               </a:rPr>
-              <a:t>מה טווח הזמן הריאלי שלי: 12 חודשים, 3 שנים, או אופק ארוך יותר?</a:t>
+              <a:t>מה טווח הזמן הריאלי שלי: 18 חודשים, 3 שנים, או אופק ארוך יותר?</a:t>
             </a:r>
             <a:endParaRPr lang="en-US" sz="1350" dirty="0"/>
           </a:p>
@@ -4124,7 +4124,7 @@
                 <a:ea typeface="Calibri" pitchFamily="34" charset="-122"/>
                 <a:cs typeface="Calibri" pitchFamily="34" charset="-120"/>
               </a:rPr>
-              <a:t>האם יש אפשרות ממשית להשבחה: שיפוץ, פיצול, שינוי ייעוד, או התחדשות עירונית?</a:t>
+              <a:t>האם יש אפשרות ממשית להשבחה: שיפוץ, פיצול, או התחדשות עירונית?</a:t>
             </a:r>
             <a:endParaRPr lang="en-US" sz="1350" dirty="0"/>
           </a:p>
@@ -6514,7 +6514,7 @@
                 <a:ea typeface="Calibri" pitchFamily="34" charset="-122"/>
                 <a:cs typeface="Calibri" pitchFamily="34" charset="-120"/>
               </a:rPr>
-              <a:t>מי מלווה את הביצוע בפועל: קבלן, מתכנן, עורך דין, יועץ מיסוי?</a:t>
+              <a:t>מי מלווה את התהליך משלב האפיון הפיננסי ועד היעד, מי מלווה את הביצוע בפועל: קבלן, מתכנן, עורך דין, יועץ מיסוי?</a:t>
             </a:r>
             <a:endParaRPr lang="en-US" sz="1350" dirty="0"/>
           </a:p>
